--- a/procesamiento/trabajo2.pptx
+++ b/procesamiento/trabajo2.pptx
@@ -3646,33 +3646,6 @@
               <a:t>.</a:t>
             </a:r>
           </a:p>
-          <a:p>
-            <a:pPr lvl="0" indent="0" marL="0">
-              <a:buNone/>
-            </a:pPr>
-            <a:r>
-              <a:rPr/>
-              <a:t>Tedesco, Laura. 2025. “Raúl Alfonsín’s Government: The Beginning of Political Polarization in Argentina.” </a:t>
-            </a:r>
-            <a:r>
-              <a:rPr i="1"/>
-              <a:t>Journal of World Affairs</a:t>
-            </a:r>
-            <a:r>
-              <a:rPr/>
-              <a:t> 1 (1): 78–93. </a:t>
-            </a:r>
-            <a:r>
-              <a:rPr>
-                <a:hlinkClick r:id="rId3"/>
-              </a:rPr>
-              <a:t>https://doi.org/10.1177/29769442251325357</a:t>
-            </a:r>
-            <a:r>
-              <a:rPr/>
-              <a:t>.</a:t>
-            </a:r>
-          </a:p>
         </p:txBody>
       </p:sp>
     </p:spTree>
@@ -3806,15 +3779,6 @@
             </a:pPr>
             <a:r>
               <a:rPr/>
-              <a:t>Desde la elección de Jair Bolsonaro en Brasil en 2018, América Latina y particularmente Argentina han experimentado transformaciones políticas y sociales marcadas por una creciente polarización y el surgimiento de discursos críticos hacia las instituciones tradicionales. Este proceso alcanzó un punto significativo en las elecciones presidenciales argentinas de 2023, donde Javier Milei resultó electo presidente. Tal como señala (Tedesco 2025) “Milei es, sin duda, una figura sumamente polarizante. Desde su ascenso en la política argentina, Milei se ha caracterizado por su fuerte retórica populista, sus propuestas económicas radicales y su estilo confrontativo, todo lo cual ha contribuido a una creciente polarización política”.</a:t>
-            </a:r>
-          </a:p>
-          <a:p>
-            <a:pPr lvl="0" indent="0" marL="0">
-              <a:buNone/>
-            </a:pPr>
-            <a:r>
-              <a:rPr/>
               <a:t>Diversos estudios han evidenciado un deterioro en la legitimidad de la democracia y una creciente insatisfacción ciudadana con su funcionamiento. En este contexto, resulta relevante analizar cómo se distribuye la satisfacción con la democracia en Argentina durante 2023 y de qué manera esta varía según características sociodemográficas de la población.</a:t>
             </a:r>
           </a:p>
@@ -3854,24 +3818,6 @@
             </a:pPr>
             <a:r>
               <a:rPr/>
-              <a:t>En este marco, estudiar la satisfacción con la democracia permite aproximarse a las percepciones ciudadanas sobre la legitimidad del sistema democrático y observar cómo estas se distribuyen según variables sociodemográficas como edad, sexo y nivel educativo.</a:t>
-            </a:r>
-          </a:p>
-          <a:p>
-            <a:pPr lvl="0" indent="0" marL="0">
-              <a:buNone/>
-            </a:pPr>
-            <a:r>
-              <a:rPr/>
-              <a:t>Asimismo, el estudio resulta pertinente considerando el contexto político argentino de 2023, marcado por el ascenso de Javier Milei y la consolidación de discursos críticos hacia las instituciones políticas tradicionales. En este sentido, la satisfacción con la democracia se aborda como un indicador útil para comprender el escenario social y político en el que emergen este tipo de liderazgos.</a:t>
-            </a:r>
-          </a:p>
-          <a:p>
-            <a:pPr lvl="0" indent="0" marL="0">
-              <a:buNone/>
-            </a:pPr>
-            <a:r>
-              <a:rPr/>
               <a:t>Para ello, se analizarán datos del Latinobarómetro 2023, debido a que este periodo concentra transformaciones políticas y sociales relevantes para observar las percepciones ciudadanas sobre la democracia en Argentina.(“El ascenso de Milei en Argentina y las nuevas extremas derechas de América Latina*,” n.d.)</a:t>
             </a:r>
           </a:p>
@@ -3945,10 +3891,6 @@
               </a:spcBef>
               <a:buNone/>
             </a:pPr>
-            <a:r>
-              <a:rPr b="1"/>
-              <a:t>Variables independientes</a:t>
-            </a:r>
           </a:p>
           <a:p>
             <a:pPr lvl="0" indent="-342900" marL="342900">
@@ -3979,7 +3921,7 @@
             </a:pPr>
             <a:r>
               <a:rPr b="1"/>
-              <a:t>Sexo (</a:t>
+              <a:t>sexo (</a:t>
             </a:r>
             <a:r>
               <a:rPr b="1">
@@ -4048,7 +3990,7 @@
             </a:r>
             <a:r>
               <a:rPr/>
-              <a:t>, incluyendo distintos niveles de educación primaria, secundaria, universitaria y técnica.</a:t>
+              <a:t>, incluyendo distintos niveles de educación primaria, secundaria, universitaria y técnica.–&gt;</a:t>
             </a:r>
           </a:p>
           <a:p>

--- a/procesamiento/trabajo2.pptx
+++ b/procesamiento/trabajo2.pptx
@@ -1,6 +1,6 @@
 
 <file path=ppt/presentation.xml><?xml version="1.0" encoding="utf-8"?>
-<p:presentation xmlns:a="http://schemas.openxmlformats.org/drawingml/2006/main" xmlns:p="http://schemas.openxmlformats.org/presentationml/2006/main" xmlns:r="http://schemas.openxmlformats.org/officeDocument/2006/relationships" autoCompressPictures="0" saveSubsetFonts="1">
+<p:presentation xmlns:a="http://schemas.openxmlformats.org/drawingml/2006/main" xmlns:r="http://schemas.openxmlformats.org/officeDocument/2006/relationships" xmlns:p="http://schemas.openxmlformats.org/presentationml/2006/main" saveSubsetFonts="1" autoCompressPictures="0">
   <p:sldMasterIdLst>
     <p:sldMasterId id="2147483648" r:id="rId1"/>
   </p:sldMasterIdLst>
@@ -8,14 +8,16 @@
     <p:sldId id="256" r:id="rId2"/>
     <p:sldId id="257" r:id="rId3"/>
     <p:sldId id="258" r:id="rId4"/>
-    <p:sldId id="259" r:id="rId5"/>
-    <p:sldId id="260" r:id="rId6"/>
-    <p:sldId id="261" r:id="rId7"/>
-    <p:sldId id="262" r:id="rId8"/>
-    <p:sldId id="263" r:id="rId9"/>
-    <p:sldId id="264" r:id="rId10"/>
-    <p:sldId id="265" r:id="rId11"/>
-    <p:sldId id="266" r:id="rId12"/>
+    <p:sldId id="268" r:id="rId5"/>
+    <p:sldId id="269" r:id="rId6"/>
+    <p:sldId id="259" r:id="rId7"/>
+    <p:sldId id="260" r:id="rId8"/>
+    <p:sldId id="261" r:id="rId9"/>
+    <p:sldId id="262" r:id="rId10"/>
+    <p:sldId id="263" r:id="rId11"/>
+    <p:sldId id="264" r:id="rId12"/>
+    <p:sldId id="265" r:id="rId13"/>
+    <p:sldId id="266" r:id="rId14"/>
   </p:sldIdLst>
   <p:sldSz cx="9144000" cy="5143500" type="screen16x9"/>
   <p:notesSz cx="6858000" cy="9144000"/>
@@ -23,8 +25,8 @@
     <a:defPPr>
       <a:defRPr lang="en-US"/>
     </a:defPPr>
-    <a:lvl1pPr algn="l" defTabSz="457200" eaLnBrk="1" hangingPunct="1" latinLnBrk="0" marL="0" rtl="0">
-      <a:defRPr kern="1200" sz="1800">
+    <a:lvl1pPr marL="0" algn="l" defTabSz="457200" rtl="0" eaLnBrk="1" latinLnBrk="0" hangingPunct="1">
+      <a:defRPr sz="1800" kern="1200">
         <a:solidFill>
           <a:schemeClr val="tx1"/>
         </a:solidFill>
@@ -33,8 +35,8 @@
         <a:cs typeface="+mn-cs"/>
       </a:defRPr>
     </a:lvl1pPr>
-    <a:lvl2pPr algn="l" defTabSz="457200" eaLnBrk="1" hangingPunct="1" latinLnBrk="0" marL="457200" rtl="0">
-      <a:defRPr kern="1200" sz="1800">
+    <a:lvl2pPr marL="457200" algn="l" defTabSz="457200" rtl="0" eaLnBrk="1" latinLnBrk="0" hangingPunct="1">
+      <a:defRPr sz="1800" kern="1200">
         <a:solidFill>
           <a:schemeClr val="tx1"/>
         </a:solidFill>
@@ -43,8 +45,8 @@
         <a:cs typeface="+mn-cs"/>
       </a:defRPr>
     </a:lvl2pPr>
-    <a:lvl3pPr algn="l" defTabSz="457200" eaLnBrk="1" hangingPunct="1" latinLnBrk="0" marL="914400" rtl="0">
-      <a:defRPr kern="1200" sz="1800">
+    <a:lvl3pPr marL="914400" algn="l" defTabSz="457200" rtl="0" eaLnBrk="1" latinLnBrk="0" hangingPunct="1">
+      <a:defRPr sz="1800" kern="1200">
         <a:solidFill>
           <a:schemeClr val="tx1"/>
         </a:solidFill>
@@ -53,8 +55,8 @@
         <a:cs typeface="+mn-cs"/>
       </a:defRPr>
     </a:lvl3pPr>
-    <a:lvl4pPr algn="l" defTabSz="457200" eaLnBrk="1" hangingPunct="1" latinLnBrk="0" marL="1371600" rtl="0">
-      <a:defRPr kern="1200" sz="1800">
+    <a:lvl4pPr marL="1371600" algn="l" defTabSz="457200" rtl="0" eaLnBrk="1" latinLnBrk="0" hangingPunct="1">
+      <a:defRPr sz="1800" kern="1200">
         <a:solidFill>
           <a:schemeClr val="tx1"/>
         </a:solidFill>
@@ -63,8 +65,8 @@
         <a:cs typeface="+mn-cs"/>
       </a:defRPr>
     </a:lvl4pPr>
-    <a:lvl5pPr algn="l" defTabSz="457200" eaLnBrk="1" hangingPunct="1" latinLnBrk="0" marL="1828800" rtl="0">
-      <a:defRPr kern="1200" sz="1800">
+    <a:lvl5pPr marL="1828800" algn="l" defTabSz="457200" rtl="0" eaLnBrk="1" latinLnBrk="0" hangingPunct="1">
+      <a:defRPr sz="1800" kern="1200">
         <a:solidFill>
           <a:schemeClr val="tx1"/>
         </a:solidFill>
@@ -73,8 +75,8 @@
         <a:cs typeface="+mn-cs"/>
       </a:defRPr>
     </a:lvl5pPr>
-    <a:lvl6pPr algn="l" defTabSz="457200" eaLnBrk="1" hangingPunct="1" latinLnBrk="0" marL="2286000" rtl="0">
-      <a:defRPr kern="1200" sz="1800">
+    <a:lvl6pPr marL="2286000" algn="l" defTabSz="457200" rtl="0" eaLnBrk="1" latinLnBrk="0" hangingPunct="1">
+      <a:defRPr sz="1800" kern="1200">
         <a:solidFill>
           <a:schemeClr val="tx1"/>
         </a:solidFill>
@@ -83,8 +85,8 @@
         <a:cs typeface="+mn-cs"/>
       </a:defRPr>
     </a:lvl6pPr>
-    <a:lvl7pPr algn="l" defTabSz="457200" eaLnBrk="1" hangingPunct="1" latinLnBrk="0" marL="2743200" rtl="0">
-      <a:defRPr kern="1200" sz="1800">
+    <a:lvl7pPr marL="2743200" algn="l" defTabSz="457200" rtl="0" eaLnBrk="1" latinLnBrk="0" hangingPunct="1">
+      <a:defRPr sz="1800" kern="1200">
         <a:solidFill>
           <a:schemeClr val="tx1"/>
         </a:solidFill>
@@ -93,8 +95,8 @@
         <a:cs typeface="+mn-cs"/>
       </a:defRPr>
     </a:lvl7pPr>
-    <a:lvl8pPr algn="l" defTabSz="457200" eaLnBrk="1" hangingPunct="1" latinLnBrk="0" marL="3200400" rtl="0">
-      <a:defRPr kern="1200" sz="1800">
+    <a:lvl8pPr marL="3200400" algn="l" defTabSz="457200" rtl="0" eaLnBrk="1" latinLnBrk="0" hangingPunct="1">
+      <a:defRPr sz="1800" kern="1200">
         <a:solidFill>
           <a:schemeClr val="tx1"/>
         </a:solidFill>
@@ -103,8 +105,8 @@
         <a:cs typeface="+mn-cs"/>
       </a:defRPr>
     </a:lvl8pPr>
-    <a:lvl9pPr algn="l" defTabSz="457200" eaLnBrk="1" hangingPunct="1" latinLnBrk="0" marL="3657600" rtl="0">
-      <a:defRPr kern="1200" sz="1800">
+    <a:lvl9pPr marL="3657600" algn="l" defTabSz="457200" rtl="0" eaLnBrk="1" latinLnBrk="0" hangingPunct="1">
+      <a:defRPr sz="1800" kern="1200">
         <a:solidFill>
           <a:schemeClr val="tx1"/>
         </a:solidFill>
@@ -131,6 +133,249 @@
     </p:ext>
   </p:extLst>
 </p:presentation>
+</file>
+
+<file path=ppt/revisionInfo.xml><?xml version="1.0" encoding="utf-8"?>
+<p1510:revInfo xmlns:a="http://schemas.openxmlformats.org/drawingml/2006/main" xmlns:r="http://schemas.openxmlformats.org/officeDocument/2006/relationships" xmlns:p1510="http://schemas.microsoft.com/office/powerpoint/2015/10/main">
+  <p1510:revLst>
+    <p1510:client id="{549BD554-AA1B-46D1-8381-4BA1EC7294E8}" v="2" dt="2026-06-15T17:02:10.247"/>
+  </p1510:revLst>
+</p1510:revInfo>
+</file>
+
+<file path=ppt/changesInfos/changesInfo1.xml><?xml version="1.0" encoding="utf-8"?>
+<pc:chgInfo xmlns:a="http://schemas.openxmlformats.org/drawingml/2006/main" xmlns:r="http://schemas.openxmlformats.org/officeDocument/2006/relationships" xmlns:ac="http://schemas.microsoft.com/office/drawing/2013/main/command" xmlns:pc="http://schemas.microsoft.com/office/powerpoint/2013/main/command">
+  <pc:docChgLst>
+    <pc:chgData name="Antonia Cea" userId="3bfc968ca9625593" providerId="LiveId" clId="{7F5DBAB7-6535-44FC-868C-8D3FA86BFD23}"/>
+    <pc:docChg chg="custSel addSld delSld modSld">
+      <pc:chgData name="Antonia Cea" userId="3bfc968ca9625593" providerId="LiveId" clId="{7F5DBAB7-6535-44FC-868C-8D3FA86BFD23}" dt="2026-06-15T17:06:30.501" v="138" actId="1076"/>
+      <pc:docMkLst>
+        <pc:docMk/>
+      </pc:docMkLst>
+      <pc:sldChg chg="addSp delSp modSp mod">
+        <pc:chgData name="Antonia Cea" userId="3bfc968ca9625593" providerId="LiveId" clId="{7F5DBAB7-6535-44FC-868C-8D3FA86BFD23}" dt="2026-06-15T16:57:52.002" v="55" actId="255"/>
+        <pc:sldMkLst>
+          <pc:docMk/>
+          <pc:sldMk cId="0" sldId="258"/>
+        </pc:sldMkLst>
+        <pc:spChg chg="add mod">
+          <ac:chgData name="Antonia Cea" userId="3bfc968ca9625593" providerId="LiveId" clId="{7F5DBAB7-6535-44FC-868C-8D3FA86BFD23}" dt="2026-06-15T16:57:35.625" v="52" actId="478"/>
+          <ac:spMkLst>
+            <pc:docMk/>
+            <pc:sldMk cId="0" sldId="258"/>
+            <ac:spMk id="3" creationId="{4D6D91DE-4352-2BCF-001B-961E12C6B01D}"/>
+          </ac:spMkLst>
+        </pc:spChg>
+        <pc:spChg chg="mod">
+          <ac:chgData name="Antonia Cea" userId="3bfc968ca9625593" providerId="LiveId" clId="{7F5DBAB7-6535-44FC-868C-8D3FA86BFD23}" dt="2026-06-15T16:57:52.002" v="55" actId="255"/>
+          <ac:spMkLst>
+            <pc:docMk/>
+            <pc:sldMk cId="0" sldId="258"/>
+            <ac:spMk id="4" creationId="{00000000-0000-0000-0000-000000000000}"/>
+          </ac:spMkLst>
+        </pc:spChg>
+        <pc:graphicFrameChg chg="del">
+          <ac:chgData name="Antonia Cea" userId="3bfc968ca9625593" providerId="LiveId" clId="{7F5DBAB7-6535-44FC-868C-8D3FA86BFD23}" dt="2026-06-15T16:57:35.625" v="52" actId="478"/>
+          <ac:graphicFrameMkLst>
+            <pc:docMk/>
+            <pc:sldMk cId="0" sldId="258"/>
+            <ac:graphicFrameMk id="6" creationId="{00000000-0000-0000-0000-000000000000}"/>
+          </ac:graphicFrameMkLst>
+        </pc:graphicFrameChg>
+      </pc:sldChg>
+      <pc:sldChg chg="modSp mod">
+        <pc:chgData name="Antonia Cea" userId="3bfc968ca9625593" providerId="LiveId" clId="{7F5DBAB7-6535-44FC-868C-8D3FA86BFD23}" dt="2026-06-15T16:55:21.560" v="22" actId="1076"/>
+        <pc:sldMkLst>
+          <pc:docMk/>
+          <pc:sldMk cId="0" sldId="259"/>
+        </pc:sldMkLst>
+        <pc:spChg chg="mod">
+          <ac:chgData name="Antonia Cea" userId="3bfc968ca9625593" providerId="LiveId" clId="{7F5DBAB7-6535-44FC-868C-8D3FA86BFD23}" dt="2026-06-15T16:55:02.006" v="20" actId="255"/>
+          <ac:spMkLst>
+            <pc:docMk/>
+            <pc:sldMk cId="0" sldId="259"/>
+            <ac:spMk id="4" creationId="{00000000-0000-0000-0000-000000000000}"/>
+          </ac:spMkLst>
+        </pc:spChg>
+        <pc:graphicFrameChg chg="mod modGraphic">
+          <ac:chgData name="Antonia Cea" userId="3bfc968ca9625593" providerId="LiveId" clId="{7F5DBAB7-6535-44FC-868C-8D3FA86BFD23}" dt="2026-06-15T16:55:21.560" v="22" actId="1076"/>
+          <ac:graphicFrameMkLst>
+            <pc:docMk/>
+            <pc:sldMk cId="0" sldId="259"/>
+            <ac:graphicFrameMk id="6" creationId="{00000000-0000-0000-0000-000000000000}"/>
+          </ac:graphicFrameMkLst>
+        </pc:graphicFrameChg>
+      </pc:sldChg>
+      <pc:sldChg chg="modSp mod">
+        <pc:chgData name="Antonia Cea" userId="3bfc968ca9625593" providerId="LiveId" clId="{7F5DBAB7-6535-44FC-868C-8D3FA86BFD23}" dt="2026-06-15T16:58:59.326" v="64" actId="1076"/>
+        <pc:sldMkLst>
+          <pc:docMk/>
+          <pc:sldMk cId="0" sldId="260"/>
+        </pc:sldMkLst>
+        <pc:spChg chg="mod">
+          <ac:chgData name="Antonia Cea" userId="3bfc968ca9625593" providerId="LiveId" clId="{7F5DBAB7-6535-44FC-868C-8D3FA86BFD23}" dt="2026-06-15T16:58:59.326" v="64" actId="1076"/>
+          <ac:spMkLst>
+            <pc:docMk/>
+            <pc:sldMk cId="0" sldId="260"/>
+            <ac:spMk id="4" creationId="{00000000-0000-0000-0000-000000000000}"/>
+          </ac:spMkLst>
+        </pc:spChg>
+        <pc:graphicFrameChg chg="mod modGraphic">
+          <ac:chgData name="Antonia Cea" userId="3bfc968ca9625593" providerId="LiveId" clId="{7F5DBAB7-6535-44FC-868C-8D3FA86BFD23}" dt="2026-06-15T16:58:55.419" v="63" actId="1076"/>
+          <ac:graphicFrameMkLst>
+            <pc:docMk/>
+            <pc:sldMk cId="0" sldId="260"/>
+            <ac:graphicFrameMk id="6" creationId="{00000000-0000-0000-0000-000000000000}"/>
+          </ac:graphicFrameMkLst>
+        </pc:graphicFrameChg>
+      </pc:sldChg>
+      <pc:sldChg chg="modSp mod">
+        <pc:chgData name="Antonia Cea" userId="3bfc968ca9625593" providerId="LiveId" clId="{7F5DBAB7-6535-44FC-868C-8D3FA86BFD23}" dt="2026-06-15T16:59:20.729" v="66" actId="27636"/>
+        <pc:sldMkLst>
+          <pc:docMk/>
+          <pc:sldMk cId="0" sldId="261"/>
+        </pc:sldMkLst>
+        <pc:spChg chg="mod">
+          <ac:chgData name="Antonia Cea" userId="3bfc968ca9625593" providerId="LiveId" clId="{7F5DBAB7-6535-44FC-868C-8D3FA86BFD23}" dt="2026-06-15T16:59:20.729" v="66" actId="27636"/>
+          <ac:spMkLst>
+            <pc:docMk/>
+            <pc:sldMk cId="0" sldId="261"/>
+            <ac:spMk id="3" creationId="{00000000-0000-0000-0000-000000000000}"/>
+          </ac:spMkLst>
+        </pc:spChg>
+      </pc:sldChg>
+      <pc:sldChg chg="modSp mod">
+        <pc:chgData name="Antonia Cea" userId="3bfc968ca9625593" providerId="LiveId" clId="{7F5DBAB7-6535-44FC-868C-8D3FA86BFD23}" dt="2026-06-15T17:01:36.350" v="87" actId="1076"/>
+        <pc:sldMkLst>
+          <pc:docMk/>
+          <pc:sldMk cId="0" sldId="263"/>
+        </pc:sldMkLst>
+        <pc:spChg chg="mod">
+          <ac:chgData name="Antonia Cea" userId="3bfc968ca9625593" providerId="LiveId" clId="{7F5DBAB7-6535-44FC-868C-8D3FA86BFD23}" dt="2026-06-15T17:01:36.350" v="87" actId="1076"/>
+          <ac:spMkLst>
+            <pc:docMk/>
+            <pc:sldMk cId="0" sldId="263"/>
+            <ac:spMk id="4" creationId="{00000000-0000-0000-0000-000000000000}"/>
+          </ac:spMkLst>
+        </pc:spChg>
+        <pc:picChg chg="mod">
+          <ac:chgData name="Antonia Cea" userId="3bfc968ca9625593" providerId="LiveId" clId="{7F5DBAB7-6535-44FC-868C-8D3FA86BFD23}" dt="2026-06-15T17:01:30.994" v="86" actId="1076"/>
+          <ac:picMkLst>
+            <pc:docMk/>
+            <pc:sldMk cId="0" sldId="263"/>
+            <ac:picMk id="2" creationId="{00000000-0000-0000-0000-000000000000}"/>
+          </ac:picMkLst>
+        </pc:picChg>
+      </pc:sldChg>
+      <pc:sldChg chg="modSp mod">
+        <pc:chgData name="Antonia Cea" userId="3bfc968ca9625593" providerId="LiveId" clId="{7F5DBAB7-6535-44FC-868C-8D3FA86BFD23}" dt="2026-06-15T17:03:31.149" v="106" actId="14100"/>
+        <pc:sldMkLst>
+          <pc:docMk/>
+          <pc:sldMk cId="0" sldId="264"/>
+        </pc:sldMkLst>
+        <pc:spChg chg="mod">
+          <ac:chgData name="Antonia Cea" userId="3bfc968ca9625593" providerId="LiveId" clId="{7F5DBAB7-6535-44FC-868C-8D3FA86BFD23}" dt="2026-06-15T17:03:13.929" v="104" actId="20577"/>
+          <ac:spMkLst>
+            <pc:docMk/>
+            <pc:sldMk cId="0" sldId="264"/>
+            <ac:spMk id="4" creationId="{00000000-0000-0000-0000-000000000000}"/>
+          </ac:spMkLst>
+        </pc:spChg>
+        <pc:picChg chg="mod">
+          <ac:chgData name="Antonia Cea" userId="3bfc968ca9625593" providerId="LiveId" clId="{7F5DBAB7-6535-44FC-868C-8D3FA86BFD23}" dt="2026-06-15T17:03:31.149" v="106" actId="14100"/>
+          <ac:picMkLst>
+            <pc:docMk/>
+            <pc:sldMk cId="0" sldId="264"/>
+            <ac:picMk id="2" creationId="{00000000-0000-0000-0000-000000000000}"/>
+          </ac:picMkLst>
+        </pc:picChg>
+      </pc:sldChg>
+      <pc:sldChg chg="modSp mod">
+        <pc:chgData name="Antonia Cea" userId="3bfc968ca9625593" providerId="LiveId" clId="{7F5DBAB7-6535-44FC-868C-8D3FA86BFD23}" dt="2026-06-15T17:06:30.501" v="138" actId="1076"/>
+        <pc:sldMkLst>
+          <pc:docMk/>
+          <pc:sldMk cId="0" sldId="265"/>
+        </pc:sldMkLst>
+        <pc:spChg chg="mod">
+          <ac:chgData name="Antonia Cea" userId="3bfc968ca9625593" providerId="LiveId" clId="{7F5DBAB7-6535-44FC-868C-8D3FA86BFD23}" dt="2026-06-15T17:06:26.556" v="137" actId="1076"/>
+          <ac:spMkLst>
+            <pc:docMk/>
+            <pc:sldMk cId="0" sldId="265"/>
+            <ac:spMk id="4" creationId="{00000000-0000-0000-0000-000000000000}"/>
+          </ac:spMkLst>
+        </pc:spChg>
+        <pc:picChg chg="mod">
+          <ac:chgData name="Antonia Cea" userId="3bfc968ca9625593" providerId="LiveId" clId="{7F5DBAB7-6535-44FC-868C-8D3FA86BFD23}" dt="2026-06-15T17:06:30.501" v="138" actId="1076"/>
+          <ac:picMkLst>
+            <pc:docMk/>
+            <pc:sldMk cId="0" sldId="265"/>
+            <ac:picMk id="2" creationId="{00000000-0000-0000-0000-000000000000}"/>
+          </ac:picMkLst>
+        </pc:picChg>
+      </pc:sldChg>
+      <pc:sldChg chg="modSp mod">
+        <pc:chgData name="Antonia Cea" userId="3bfc968ca9625593" providerId="LiveId" clId="{7F5DBAB7-6535-44FC-868C-8D3FA86BFD23}" dt="2026-06-15T17:04:07.849" v="109" actId="27636"/>
+        <pc:sldMkLst>
+          <pc:docMk/>
+          <pc:sldMk cId="0" sldId="266"/>
+        </pc:sldMkLst>
+        <pc:spChg chg="mod">
+          <ac:chgData name="Antonia Cea" userId="3bfc968ca9625593" providerId="LiveId" clId="{7F5DBAB7-6535-44FC-868C-8D3FA86BFD23}" dt="2026-06-15T17:04:07.849" v="109" actId="27636"/>
+          <ac:spMkLst>
+            <pc:docMk/>
+            <pc:sldMk cId="0" sldId="266"/>
+            <ac:spMk id="3" creationId="{00000000-0000-0000-0000-000000000000}"/>
+          </ac:spMkLst>
+        </pc:spChg>
+      </pc:sldChg>
+      <pc:sldChg chg="new del">
+        <pc:chgData name="Antonia Cea" userId="3bfc968ca9625593" providerId="LiveId" clId="{7F5DBAB7-6535-44FC-868C-8D3FA86BFD23}" dt="2026-06-15T16:55:41.068" v="25" actId="47"/>
+        <pc:sldMkLst>
+          <pc:docMk/>
+          <pc:sldMk cId="771411359" sldId="267"/>
+        </pc:sldMkLst>
+      </pc:sldChg>
+      <pc:sldChg chg="addSp modSp new mod">
+        <pc:chgData name="Antonia Cea" userId="3bfc968ca9625593" providerId="LiveId" clId="{7F5DBAB7-6535-44FC-868C-8D3FA86BFD23}" dt="2026-06-15T16:56:20.105" v="31" actId="1076"/>
+        <pc:sldMkLst>
+          <pc:docMk/>
+          <pc:sldMk cId="3033524622" sldId="268"/>
+        </pc:sldMkLst>
+        <pc:spChg chg="add mod">
+          <ac:chgData name="Antonia Cea" userId="3bfc968ca9625593" providerId="LiveId" clId="{7F5DBAB7-6535-44FC-868C-8D3FA86BFD23}" dt="2026-06-15T16:56:20.105" v="31" actId="1076"/>
+          <ac:spMkLst>
+            <pc:docMk/>
+            <pc:sldMk cId="3033524622" sldId="268"/>
+            <ac:spMk id="3" creationId="{BE891E19-8A5F-DBF1-F5BA-410E231F1359}"/>
+          </ac:spMkLst>
+        </pc:spChg>
+      </pc:sldChg>
+      <pc:sldChg chg="addSp delSp modSp new mod">
+        <pc:chgData name="Antonia Cea" userId="3bfc968ca9625593" providerId="LiveId" clId="{7F5DBAB7-6535-44FC-868C-8D3FA86BFD23}" dt="2026-06-15T16:57:30.904" v="51" actId="1076"/>
+        <pc:sldMkLst>
+          <pc:docMk/>
+          <pc:sldMk cId="3364651352" sldId="269"/>
+        </pc:sldMkLst>
+        <pc:spChg chg="add del mod">
+          <ac:chgData name="Antonia Cea" userId="3bfc968ca9625593" providerId="LiveId" clId="{7F5DBAB7-6535-44FC-868C-8D3FA86BFD23}" dt="2026-06-15T16:57:10.141" v="41"/>
+          <ac:spMkLst>
+            <pc:docMk/>
+            <pc:sldMk cId="3364651352" sldId="269"/>
+            <ac:spMk id="3" creationId="{7C3C13C9-D64C-03E5-8C2B-2C0F057A70F9}"/>
+          </ac:spMkLst>
+        </pc:spChg>
+        <pc:graphicFrameChg chg="add mod modGraphic">
+          <ac:chgData name="Antonia Cea" userId="3bfc968ca9625593" providerId="LiveId" clId="{7F5DBAB7-6535-44FC-868C-8D3FA86BFD23}" dt="2026-06-15T16:57:30.904" v="51" actId="1076"/>
+          <ac:graphicFrameMkLst>
+            <pc:docMk/>
+            <pc:sldMk cId="3364651352" sldId="269"/>
+            <ac:graphicFrameMk id="4" creationId="{1B1CCC1E-3D90-070D-D965-C846E49E7330}"/>
+          </ac:graphicFrameMkLst>
+        </pc:graphicFrameChg>
+      </pc:sldChg>
+    </pc:docChg>
+  </pc:docChgLst>
+</pc:chgInfo>
 </file>
 
 <file path=ppt/slideLayouts/slideLayout1.xml><?xml version="1.0" encoding="utf-8"?>
@@ -312,7 +557,7 @@
           <a:p>
             <a:fld id="{241EB5C9-1307-BA42-ABA2-0BC069CD8E7F}" type="datetimeFigureOut">
               <a:rPr lang="en-US" smtClean="0"/>
-              <a:t>1/2/22</a:t>
+              <a:t>6/15/2026</a:t>
             </a:fld>
             <a:endParaRPr lang="en-US"/>
           </a:p>
@@ -354,7 +599,7 @@
           <a:p>
             <a:fld id="{C5EF2332-01BF-834F-8236-50238282D533}" type="slidenum">
               <a:rPr lang="en-US" smtClean="0"/>
-              <a:t>‹#›</a:t>
+              <a:t>‹Nº›</a:t>
             </a:fld>
             <a:endParaRPr lang="en-US"/>
           </a:p>
@@ -480,7 +725,7 @@
           <a:p>
             <a:fld id="{241EB5C9-1307-BA42-ABA2-0BC069CD8E7F}" type="datetimeFigureOut">
               <a:rPr lang="en-US" smtClean="0"/>
-              <a:t>1/2/22</a:t>
+              <a:t>6/15/2026</a:t>
             </a:fld>
             <a:endParaRPr lang="en-US"/>
           </a:p>
@@ -522,7 +767,7 @@
           <a:p>
             <a:fld id="{C5EF2332-01BF-834F-8236-50238282D533}" type="slidenum">
               <a:rPr lang="en-US" smtClean="0"/>
-              <a:t>‹#›</a:t>
+              <a:t>‹Nº›</a:t>
             </a:fld>
             <a:endParaRPr lang="en-US"/>
           </a:p>
@@ -658,7 +903,7 @@
           <a:p>
             <a:fld id="{241EB5C9-1307-BA42-ABA2-0BC069CD8E7F}" type="datetimeFigureOut">
               <a:rPr lang="en-US" smtClean="0"/>
-              <a:t>1/2/22</a:t>
+              <a:t>6/15/2026</a:t>
             </a:fld>
             <a:endParaRPr lang="en-US"/>
           </a:p>
@@ -700,7 +945,7 @@
           <a:p>
             <a:fld id="{C5EF2332-01BF-834F-8236-50238282D533}" type="slidenum">
               <a:rPr lang="en-US" smtClean="0"/>
-              <a:t>‹#›</a:t>
+              <a:t>‹Nº›</a:t>
             </a:fld>
             <a:endParaRPr lang="en-US"/>
           </a:p>
@@ -826,7 +1071,7 @@
           <a:p>
             <a:fld id="{241EB5C9-1307-BA42-ABA2-0BC069CD8E7F}" type="datetimeFigureOut">
               <a:rPr lang="en-US" smtClean="0"/>
-              <a:t>1/2/22</a:t>
+              <a:t>6/15/2026</a:t>
             </a:fld>
             <a:endParaRPr lang="en-US"/>
           </a:p>
@@ -868,7 +1113,7 @@
           <a:p>
             <a:fld id="{C5EF2332-01BF-834F-8236-50238282D533}" type="slidenum">
               <a:rPr lang="en-US" smtClean="0"/>
-              <a:t>‹#›</a:t>
+              <a:t>‹Nº›</a:t>
             </a:fld>
             <a:endParaRPr lang="en-US"/>
           </a:p>
@@ -1071,7 +1316,7 @@
           <a:p>
             <a:fld id="{241EB5C9-1307-BA42-ABA2-0BC069CD8E7F}" type="datetimeFigureOut">
               <a:rPr lang="en-US" smtClean="0"/>
-              <a:t>1/2/22</a:t>
+              <a:t>6/15/2026</a:t>
             </a:fld>
             <a:endParaRPr lang="en-US"/>
           </a:p>
@@ -1113,7 +1358,7 @@
           <a:p>
             <a:fld id="{C5EF2332-01BF-834F-8236-50238282D533}" type="slidenum">
               <a:rPr lang="en-US" smtClean="0"/>
-              <a:t>‹#›</a:t>
+              <a:t>‹Nº›</a:t>
             </a:fld>
             <a:endParaRPr lang="en-US"/>
           </a:p>
@@ -1356,7 +1601,7 @@
           <a:p>
             <a:fld id="{241EB5C9-1307-BA42-ABA2-0BC069CD8E7F}" type="datetimeFigureOut">
               <a:rPr lang="en-US" smtClean="0"/>
-              <a:t>1/2/22</a:t>
+              <a:t>6/15/2026</a:t>
             </a:fld>
             <a:endParaRPr lang="en-US"/>
           </a:p>
@@ -1398,7 +1643,7 @@
           <a:p>
             <a:fld id="{C5EF2332-01BF-834F-8236-50238282D533}" type="slidenum">
               <a:rPr lang="en-US" smtClean="0"/>
-              <a:t>‹#›</a:t>
+              <a:t>‹Nº›</a:t>
             </a:fld>
             <a:endParaRPr lang="en-US"/>
           </a:p>
@@ -1775,7 +2020,7 @@
           <a:p>
             <a:fld id="{241EB5C9-1307-BA42-ABA2-0BC069CD8E7F}" type="datetimeFigureOut">
               <a:rPr lang="en-US" smtClean="0"/>
-              <a:t>1/2/22</a:t>
+              <a:t>6/15/2026</a:t>
             </a:fld>
             <a:endParaRPr lang="en-US"/>
           </a:p>
@@ -1817,7 +2062,7 @@
           <a:p>
             <a:fld id="{C5EF2332-01BF-834F-8236-50238282D533}" type="slidenum">
               <a:rPr lang="en-US" smtClean="0"/>
-              <a:t>‹#›</a:t>
+              <a:t>‹Nº›</a:t>
             </a:fld>
             <a:endParaRPr lang="en-US"/>
           </a:p>
@@ -1892,7 +2137,7 @@
           <a:p>
             <a:fld id="{241EB5C9-1307-BA42-ABA2-0BC069CD8E7F}" type="datetimeFigureOut">
               <a:rPr lang="en-US" smtClean="0"/>
-              <a:t>1/2/22</a:t>
+              <a:t>6/15/2026</a:t>
             </a:fld>
             <a:endParaRPr lang="en-US"/>
           </a:p>
@@ -1934,7 +2179,7 @@
           <a:p>
             <a:fld id="{C5EF2332-01BF-834F-8236-50238282D533}" type="slidenum">
               <a:rPr lang="en-US" smtClean="0"/>
-              <a:t>‹#›</a:t>
+              <a:t>‹Nº›</a:t>
             </a:fld>
             <a:endParaRPr lang="en-US"/>
           </a:p>
@@ -1987,7 +2232,7 @@
           <a:p>
             <a:fld id="{241EB5C9-1307-BA42-ABA2-0BC069CD8E7F}" type="datetimeFigureOut">
               <a:rPr lang="en-US" smtClean="0"/>
-              <a:t>1/2/22</a:t>
+              <a:t>6/15/2026</a:t>
             </a:fld>
             <a:endParaRPr lang="en-US"/>
           </a:p>
@@ -2029,7 +2274,7 @@
           <a:p>
             <a:fld id="{C5EF2332-01BF-834F-8236-50238282D533}" type="slidenum">
               <a:rPr lang="en-US" smtClean="0"/>
-              <a:t>‹#›</a:t>
+              <a:t>‹Nº›</a:t>
             </a:fld>
             <a:endParaRPr lang="en-US"/>
           </a:p>
@@ -2262,7 +2507,7 @@
           <a:p>
             <a:fld id="{241EB5C9-1307-BA42-ABA2-0BC069CD8E7F}" type="datetimeFigureOut">
               <a:rPr lang="en-US" smtClean="0"/>
-              <a:t>1/2/22</a:t>
+              <a:t>6/15/2026</a:t>
             </a:fld>
             <a:endParaRPr lang="en-US"/>
           </a:p>
@@ -2304,7 +2549,7 @@
           <a:p>
             <a:fld id="{C5EF2332-01BF-834F-8236-50238282D533}" type="slidenum">
               <a:rPr lang="en-US" smtClean="0"/>
-              <a:t>‹#›</a:t>
+              <a:t>‹Nº›</a:t>
             </a:fld>
             <a:endParaRPr lang="en-US"/>
           </a:p>
@@ -2514,7 +2759,7 @@
           <a:p>
             <a:fld id="{241EB5C9-1307-BA42-ABA2-0BC069CD8E7F}" type="datetimeFigureOut">
               <a:rPr lang="en-US" smtClean="0"/>
-              <a:t>1/2/22</a:t>
+              <a:t>6/15/2026</a:t>
             </a:fld>
             <a:endParaRPr lang="en-US"/>
           </a:p>
@@ -2556,7 +2801,7 @@
           <a:p>
             <a:fld id="{C5EF2332-01BF-834F-8236-50238282D533}" type="slidenum">
               <a:rPr lang="en-US" smtClean="0"/>
-              <a:t>‹#›</a:t>
+              <a:t>‹Nº›</a:t>
             </a:fld>
             <a:endParaRPr lang="en-US"/>
           </a:p>
@@ -2576,7 +2821,7 @@
 </file>
 
 <file path=ppt/slideMasters/slideMaster1.xml><?xml version="1.0" encoding="utf-8"?>
-<p:sldMaster xmlns:a="http://schemas.openxmlformats.org/drawingml/2006/main" xmlns:p="http://schemas.openxmlformats.org/presentationml/2006/main" xmlns:r="http://schemas.openxmlformats.org/officeDocument/2006/relationships">
+<p:sldMaster xmlns:a="http://schemas.openxmlformats.org/drawingml/2006/main" xmlns:r="http://schemas.openxmlformats.org/officeDocument/2006/relationships" xmlns:p="http://schemas.openxmlformats.org/presentationml/2006/main">
   <p:cSld>
     <p:bg>
       <p:bgRef idx="1001">
@@ -2617,7 +2862,7 @@
           </a:prstGeom>
         </p:spPr>
         <p:txBody>
-          <a:bodyPr anchor="ctr" bIns="45720" lIns="91440" rIns="91440" rtlCol="0" tIns="45720" vert="horz">
+          <a:bodyPr vert="horz" lIns="91440" tIns="45720" rIns="91440" bIns="45720" rtlCol="0" anchor="ctr">
             <a:normAutofit/>
           </a:bodyPr>
           <a:lstStyle/>
@@ -2636,7 +2881,7 @@
             <a:spLocks noGrp="1"/>
           </p:cNvSpPr>
           <p:nvPr>
-            <p:ph idx="1" type="body"/>
+            <p:ph type="body" idx="1"/>
           </p:nvPr>
         </p:nvSpPr>
         <p:spPr>
@@ -2649,7 +2894,7 @@
           </a:prstGeom>
         </p:spPr>
         <p:txBody>
-          <a:bodyPr bIns="45720" lIns="91440" rIns="91440" rtlCol="0" tIns="45720" vert="horz">
+          <a:bodyPr vert="horz" lIns="91440" tIns="45720" rIns="91440" bIns="45720" rtlCol="0">
             <a:normAutofit/>
           </a:bodyPr>
           <a:lstStyle/>
@@ -2697,7 +2942,7 @@
             <a:spLocks noGrp="1"/>
           </p:cNvSpPr>
           <p:nvPr>
-            <p:ph idx="2" sz="half" type="dt"/>
+            <p:ph type="dt" sz="half" idx="2"/>
           </p:nvPr>
         </p:nvSpPr>
         <p:spPr>
@@ -2710,7 +2955,7 @@
           </a:prstGeom>
         </p:spPr>
         <p:txBody>
-          <a:bodyPr anchor="ctr" bIns="45720" lIns="91440" rIns="91440" rtlCol="0" tIns="45720" vert="horz"/>
+          <a:bodyPr vert="horz" lIns="91440" tIns="45720" rIns="91440" bIns="45720" rtlCol="0" anchor="ctr"/>
           <a:lstStyle>
             <a:lvl1pPr algn="l">
               <a:defRPr sz="900">
@@ -2725,7 +2970,7 @@
           <a:p>
             <a:fld id="{241EB5C9-1307-BA42-ABA2-0BC069CD8E7F}" type="datetimeFigureOut">
               <a:rPr lang="en-US" smtClean="0"/>
-              <a:t>1/2/22</a:t>
+              <a:t>6/15/2026</a:t>
             </a:fld>
             <a:endParaRPr lang="en-US"/>
           </a:p>
@@ -2738,7 +2983,7 @@
             <a:spLocks noGrp="1"/>
           </p:cNvSpPr>
           <p:nvPr>
-            <p:ph idx="3" sz="quarter" type="ftr"/>
+            <p:ph type="ftr" sz="quarter" idx="3"/>
           </p:nvPr>
         </p:nvSpPr>
         <p:spPr>
@@ -2751,7 +2996,7 @@
           </a:prstGeom>
         </p:spPr>
         <p:txBody>
-          <a:bodyPr anchor="ctr" bIns="45720" lIns="91440" rIns="91440" rtlCol="0" tIns="45720" vert="horz"/>
+          <a:bodyPr vert="horz" lIns="91440" tIns="45720" rIns="91440" bIns="45720" rtlCol="0" anchor="ctr"/>
           <a:lstStyle>
             <a:lvl1pPr algn="ctr">
               <a:defRPr sz="900">
@@ -2775,7 +3020,7 @@
             <a:spLocks noGrp="1"/>
           </p:cNvSpPr>
           <p:nvPr>
-            <p:ph idx="4" sz="quarter" type="sldNum"/>
+            <p:ph type="sldNum" sz="quarter" idx="4"/>
           </p:nvPr>
         </p:nvSpPr>
         <p:spPr>
@@ -2788,7 +3033,7 @@
           </a:prstGeom>
         </p:spPr>
         <p:txBody>
-          <a:bodyPr anchor="ctr" bIns="45720" lIns="91440" rIns="91440" rtlCol="0" tIns="45720" vert="horz"/>
+          <a:bodyPr vert="horz" lIns="91440" tIns="45720" rIns="91440" bIns="45720" rtlCol="0" anchor="ctr"/>
           <a:lstStyle>
             <a:lvl1pPr algn="r">
               <a:defRPr sz="900">
@@ -2803,7 +3048,7 @@
           <a:p>
             <a:fld id="{C5EF2332-01BF-834F-8236-50238282D533}" type="slidenum">
               <a:rPr lang="en-US" smtClean="0"/>
-              <a:t>‹#›</a:t>
+              <a:t>‹Nº›</a:t>
             </a:fld>
             <a:endParaRPr lang="en-US"/>
           </a:p>
@@ -2816,7 +3061,7 @@
       </p:ext>
     </p:extLst>
   </p:cSld>
-  <p:clrMap accent1="accent1" accent2="accent2" accent3="accent3" accent4="accent4" accent5="accent5" accent6="accent6" bg1="lt1" bg2="lt2" folHlink="folHlink" hlink="hlink" tx1="dk1" tx2="dk2"/>
+  <p:clrMap bg1="lt1" tx1="dk1" bg2="lt2" tx2="dk2" accent1="accent1" accent2="accent2" accent3="accent3" accent4="accent4" accent5="accent5" accent6="accent6" hlink="hlink" folHlink="folHlink"/>
   <p:sldLayoutIdLst>
     <p:sldLayoutId id="2147483649" r:id="rId1"/>
     <p:sldLayoutId id="2147483650" r:id="rId2"/>
@@ -2832,12 +3077,12 @@
   </p:sldLayoutIdLst>
   <p:txStyles>
     <p:titleStyle>
-      <a:lvl1pPr algn="ctr" defTabSz="342900" eaLnBrk="1" hangingPunct="1" latinLnBrk="0" rtl="0">
+      <a:lvl1pPr algn="ctr" defTabSz="342900" rtl="0" eaLnBrk="1" latinLnBrk="0" hangingPunct="1">
         <a:spcBef>
           <a:spcPct val="0"/>
         </a:spcBef>
         <a:buNone/>
-        <a:defRPr kern="1200" sz="3300">
+        <a:defRPr sz="3300" kern="1200">
           <a:solidFill>
             <a:schemeClr val="tx1"/>
           </a:solidFill>
@@ -2848,13 +3093,13 @@
       </a:lvl1pPr>
     </p:titleStyle>
     <p:bodyStyle>
-      <a:lvl1pPr algn="l" defTabSz="342900" eaLnBrk="1" hangingPunct="1" indent="-342900" latinLnBrk="0" marL="342900" rtl="0">
+      <a:lvl1pPr marL="342900" indent="-342900" algn="l" defTabSz="342900" rtl="0" eaLnBrk="1" latinLnBrk="0" hangingPunct="1">
         <a:spcBef>
           <a:spcPct val="20000"/>
         </a:spcBef>
         <a:buFont typeface="Arial"/>
         <a:buChar char="•"/>
-        <a:defRPr kern="1200" sz="2400">
+        <a:defRPr sz="2400" kern="1200">
           <a:solidFill>
             <a:schemeClr val="tx1"/>
           </a:solidFill>
@@ -2863,13 +3108,13 @@
           <a:cs typeface="+mn-cs"/>
         </a:defRPr>
       </a:lvl1pPr>
-      <a:lvl2pPr algn="l" defTabSz="342900" eaLnBrk="1" hangingPunct="1" indent="-342900" latinLnBrk="0" marL="685800" rtl="0">
+      <a:lvl2pPr marL="685800" indent="-342900" algn="l" defTabSz="342900" rtl="0" eaLnBrk="1" latinLnBrk="0" hangingPunct="1">
         <a:spcBef>
           <a:spcPct val="20000"/>
         </a:spcBef>
         <a:buFont typeface="Arial"/>
         <a:buChar char="–"/>
-        <a:defRPr kern="1200" sz="2100">
+        <a:defRPr sz="2100" kern="1200">
           <a:solidFill>
             <a:schemeClr val="tx1"/>
           </a:solidFill>
@@ -2878,13 +3123,13 @@
           <a:cs typeface="+mn-cs"/>
         </a:defRPr>
       </a:lvl2pPr>
-      <a:lvl3pPr algn="l" defTabSz="342900" eaLnBrk="1" hangingPunct="1" indent="-342900" latinLnBrk="0" marL="1028700" rtl="0">
+      <a:lvl3pPr marL="1028700" indent="-342900" algn="l" defTabSz="342900" rtl="0" eaLnBrk="1" latinLnBrk="0" hangingPunct="1">
         <a:spcBef>
           <a:spcPct val="20000"/>
         </a:spcBef>
         <a:buFont typeface="Arial"/>
         <a:buChar char="•"/>
-        <a:defRPr kern="1200" sz="1800">
+        <a:defRPr sz="1800" kern="1200">
           <a:solidFill>
             <a:schemeClr val="tx1"/>
           </a:solidFill>
@@ -2893,13 +3138,13 @@
           <a:cs typeface="+mn-cs"/>
         </a:defRPr>
       </a:lvl3pPr>
-      <a:lvl4pPr algn="l" defTabSz="342900" eaLnBrk="1" hangingPunct="1" indent="-342900" latinLnBrk="0" marL="1371600" rtl="0">
+      <a:lvl4pPr marL="1371600" indent="-342900" algn="l" defTabSz="342900" rtl="0" eaLnBrk="1" latinLnBrk="0" hangingPunct="1">
         <a:spcBef>
           <a:spcPct val="20000"/>
         </a:spcBef>
         <a:buFont typeface="Arial"/>
         <a:buChar char="–"/>
-        <a:defRPr kern="1200" sz="1500">
+        <a:defRPr sz="1500" kern="1200">
           <a:solidFill>
             <a:schemeClr val="tx1"/>
           </a:solidFill>
@@ -2908,13 +3153,13 @@
           <a:cs typeface="+mn-cs"/>
         </a:defRPr>
       </a:lvl4pPr>
-      <a:lvl5pPr algn="l" defTabSz="342900" eaLnBrk="1" hangingPunct="1" indent="-342900" latinLnBrk="0" marL="1714500" rtl="0">
+      <a:lvl5pPr marL="1714500" indent="-342900" algn="l" defTabSz="342900" rtl="0" eaLnBrk="1" latinLnBrk="0" hangingPunct="1">
         <a:spcBef>
           <a:spcPct val="20000"/>
         </a:spcBef>
         <a:buFont typeface="Arial"/>
         <a:buChar char="»"/>
-        <a:defRPr kern="1200" sz="1500">
+        <a:defRPr sz="1500" kern="1200">
           <a:solidFill>
             <a:schemeClr val="tx1"/>
           </a:solidFill>
@@ -2923,13 +3168,13 @@
           <a:cs typeface="+mn-cs"/>
         </a:defRPr>
       </a:lvl5pPr>
-      <a:lvl6pPr algn="l" defTabSz="342900" eaLnBrk="1" hangingPunct="1" indent="-342900" latinLnBrk="0" marL="2057400" rtl="0">
+      <a:lvl6pPr marL="2057400" indent="-342900" algn="l" defTabSz="342900" rtl="0" eaLnBrk="1" latinLnBrk="0" hangingPunct="1">
         <a:spcBef>
           <a:spcPct val="20000"/>
         </a:spcBef>
         <a:buFont typeface="Arial"/>
         <a:buChar char="•"/>
-        <a:defRPr kern="1200" sz="1500">
+        <a:defRPr sz="1500" kern="1200">
           <a:solidFill>
             <a:schemeClr val="tx1"/>
           </a:solidFill>
@@ -2938,13 +3183,13 @@
           <a:cs typeface="+mn-cs"/>
         </a:defRPr>
       </a:lvl6pPr>
-      <a:lvl7pPr algn="l" defTabSz="342900" eaLnBrk="1" hangingPunct="1" indent="-342900" latinLnBrk="0" marL="2400300" rtl="0">
+      <a:lvl7pPr marL="2400300" indent="-342900" algn="l" defTabSz="342900" rtl="0" eaLnBrk="1" latinLnBrk="0" hangingPunct="1">
         <a:spcBef>
           <a:spcPct val="20000"/>
         </a:spcBef>
         <a:buFont typeface="Arial"/>
         <a:buChar char="•"/>
-        <a:defRPr kern="1200" sz="1500">
+        <a:defRPr sz="1500" kern="1200">
           <a:solidFill>
             <a:schemeClr val="tx1"/>
           </a:solidFill>
@@ -2953,13 +3198,13 @@
           <a:cs typeface="+mn-cs"/>
         </a:defRPr>
       </a:lvl7pPr>
-      <a:lvl8pPr algn="l" defTabSz="342900" eaLnBrk="1" hangingPunct="1" indent="-342900" latinLnBrk="0" marL="2743200" rtl="0">
+      <a:lvl8pPr marL="2743200" indent="-342900" algn="l" defTabSz="342900" rtl="0" eaLnBrk="1" latinLnBrk="0" hangingPunct="1">
         <a:spcBef>
           <a:spcPct val="20000"/>
         </a:spcBef>
         <a:buFont typeface="Arial"/>
         <a:buChar char="•"/>
-        <a:defRPr kern="1200" sz="1500">
+        <a:defRPr sz="1500" kern="1200">
           <a:solidFill>
             <a:schemeClr val="tx1"/>
           </a:solidFill>
@@ -2968,13 +3213,13 @@
           <a:cs typeface="+mn-cs"/>
         </a:defRPr>
       </a:lvl8pPr>
-      <a:lvl9pPr algn="l" defTabSz="342900" eaLnBrk="1" hangingPunct="1" indent="-342900" latinLnBrk="0" marL="3086100" rtl="0">
+      <a:lvl9pPr marL="3086100" indent="-342900" algn="l" defTabSz="342900" rtl="0" eaLnBrk="1" latinLnBrk="0" hangingPunct="1">
         <a:spcBef>
           <a:spcPct val="20000"/>
         </a:spcBef>
         <a:buFont typeface="Arial"/>
         <a:buChar char="•"/>
-        <a:defRPr kern="1200" sz="1500">
+        <a:defRPr sz="1500" kern="1200">
           <a:solidFill>
             <a:schemeClr val="tx1"/>
           </a:solidFill>
@@ -2988,8 +3233,8 @@
       <a:defPPr>
         <a:defRPr lang="en-US"/>
       </a:defPPr>
-      <a:lvl1pPr algn="l" defTabSz="342900" eaLnBrk="1" hangingPunct="1" latinLnBrk="0" marL="0" rtl="0">
-        <a:defRPr kern="1200" sz="1350">
+      <a:lvl1pPr marL="0" algn="l" defTabSz="342900" rtl="0" eaLnBrk="1" latinLnBrk="0" hangingPunct="1">
+        <a:defRPr sz="1350" kern="1200">
           <a:solidFill>
             <a:schemeClr val="tx1"/>
           </a:solidFill>
@@ -2998,8 +3243,8 @@
           <a:cs typeface="+mn-cs"/>
         </a:defRPr>
       </a:lvl1pPr>
-      <a:lvl2pPr algn="l" defTabSz="342900" eaLnBrk="1" hangingPunct="1" latinLnBrk="0" marL="342900" rtl="0">
-        <a:defRPr kern="1200" sz="1350">
+      <a:lvl2pPr marL="342900" algn="l" defTabSz="342900" rtl="0" eaLnBrk="1" latinLnBrk="0" hangingPunct="1">
+        <a:defRPr sz="1350" kern="1200">
           <a:solidFill>
             <a:schemeClr val="tx1"/>
           </a:solidFill>
@@ -3008,8 +3253,8 @@
           <a:cs typeface="+mn-cs"/>
         </a:defRPr>
       </a:lvl2pPr>
-      <a:lvl3pPr algn="l" defTabSz="342900" eaLnBrk="1" hangingPunct="1" latinLnBrk="0" marL="685800" rtl="0">
-        <a:defRPr kern="1200" sz="1350">
+      <a:lvl3pPr marL="685800" algn="l" defTabSz="342900" rtl="0" eaLnBrk="1" latinLnBrk="0" hangingPunct="1">
+        <a:defRPr sz="1350" kern="1200">
           <a:solidFill>
             <a:schemeClr val="tx1"/>
           </a:solidFill>
@@ -3018,8 +3263,8 @@
           <a:cs typeface="+mn-cs"/>
         </a:defRPr>
       </a:lvl3pPr>
-      <a:lvl4pPr algn="l" defTabSz="342900" eaLnBrk="1" hangingPunct="1" latinLnBrk="0" marL="1028700" rtl="0">
-        <a:defRPr kern="1200" sz="1350">
+      <a:lvl4pPr marL="1028700" algn="l" defTabSz="342900" rtl="0" eaLnBrk="1" latinLnBrk="0" hangingPunct="1">
+        <a:defRPr sz="1350" kern="1200">
           <a:solidFill>
             <a:schemeClr val="tx1"/>
           </a:solidFill>
@@ -3028,8 +3273,8 @@
           <a:cs typeface="+mn-cs"/>
         </a:defRPr>
       </a:lvl4pPr>
-      <a:lvl5pPr algn="l" defTabSz="342900" eaLnBrk="1" hangingPunct="1" latinLnBrk="0" marL="1371600" rtl="0">
-        <a:defRPr kern="1200" sz="1350">
+      <a:lvl5pPr marL="1371600" algn="l" defTabSz="342900" rtl="0" eaLnBrk="1" latinLnBrk="0" hangingPunct="1">
+        <a:defRPr sz="1350" kern="1200">
           <a:solidFill>
             <a:schemeClr val="tx1"/>
           </a:solidFill>
@@ -3038,8 +3283,8 @@
           <a:cs typeface="+mn-cs"/>
         </a:defRPr>
       </a:lvl5pPr>
-      <a:lvl6pPr algn="l" defTabSz="342900" eaLnBrk="1" hangingPunct="1" latinLnBrk="0" marL="1714500" rtl="0">
-        <a:defRPr kern="1200" sz="1350">
+      <a:lvl6pPr marL="1714500" algn="l" defTabSz="342900" rtl="0" eaLnBrk="1" latinLnBrk="0" hangingPunct="1">
+        <a:defRPr sz="1350" kern="1200">
           <a:solidFill>
             <a:schemeClr val="tx1"/>
           </a:solidFill>
@@ -3048,8 +3293,8 @@
           <a:cs typeface="+mn-cs"/>
         </a:defRPr>
       </a:lvl6pPr>
-      <a:lvl7pPr algn="l" defTabSz="342900" eaLnBrk="1" hangingPunct="1" latinLnBrk="0" marL="2057400" rtl="0">
-        <a:defRPr kern="1200" sz="1350">
+      <a:lvl7pPr marL="2057400" algn="l" defTabSz="342900" rtl="0" eaLnBrk="1" latinLnBrk="0" hangingPunct="1">
+        <a:defRPr sz="1350" kern="1200">
           <a:solidFill>
             <a:schemeClr val="tx1"/>
           </a:solidFill>
@@ -3058,8 +3303,8 @@
           <a:cs typeface="+mn-cs"/>
         </a:defRPr>
       </a:lvl7pPr>
-      <a:lvl8pPr algn="l" defTabSz="342900" eaLnBrk="1" hangingPunct="1" latinLnBrk="0" marL="2400300" rtl="0">
-        <a:defRPr kern="1200" sz="1350">
+      <a:lvl8pPr marL="2400300" algn="l" defTabSz="342900" rtl="0" eaLnBrk="1" latinLnBrk="0" hangingPunct="1">
+        <a:defRPr sz="1350" kern="1200">
           <a:solidFill>
             <a:schemeClr val="tx1"/>
           </a:solidFill>
@@ -3068,8 +3313,8 @@
           <a:cs typeface="+mn-cs"/>
         </a:defRPr>
       </a:lvl8pPr>
-      <a:lvl9pPr algn="l" defTabSz="342900" eaLnBrk="1" hangingPunct="1" latinLnBrk="0" marL="2743200" rtl="0">
-        <a:defRPr kern="1200" sz="1350">
+      <a:lvl9pPr marL="2743200" algn="l" defTabSz="342900" rtl="0" eaLnBrk="1" latinLnBrk="0" hangingPunct="1">
+        <a:defRPr sz="1350" kern="1200">
           <a:solidFill>
             <a:schemeClr val="tx1"/>
           </a:solidFill>
@@ -3120,11 +3365,10 @@
           <a:bodyPr/>
           <a:lstStyle/>
           <a:p>
-            <a:pPr lvl="0" indent="0" marL="0">
+            <a:pPr marL="0" lvl="0" indent="0">
               <a:buNone/>
             </a:pPr>
             <a:r>
-              <a:rPr/>
               <a:t>Trabajo 2</a:t>
             </a:r>
           </a:p>
@@ -3137,7 +3381,7 @@
             <a:spLocks noGrp="1"/>
           </p:cNvSpPr>
           <p:nvPr>
-            <p:ph idx="1" type="subTitle"/>
+            <p:ph type="subTitle" idx="1"/>
           </p:nvPr>
         </p:nvSpPr>
         <p:spPr>
@@ -3150,16 +3394,20 @@
           <a:bodyPr/>
           <a:lstStyle/>
           <a:p>
-            <a:pPr lvl="0" indent="0" marL="0">
+            <a:pPr marL="0" lvl="0" indent="0">
               <a:buNone/>
             </a:pPr>
             <a:br/>
             <a:br/>
+            <a:endParaRPr/>
           </a:p>
         </p:txBody>
       </p:sp>
     </p:spTree>
   </p:cSld>
+  <p:clrMapOvr>
+    <a:masterClrMapping/>
+  </p:clrMapOvr>
 </p:sld>
 </file>
 
@@ -3187,365 +3435,420 @@
             <a:spLocks noGrp="1"/>
           </p:cNvSpPr>
           <p:nvPr>
-            <p:ph idx="2" sz="half" type="body"/>
+            <p:ph type="body" sz="half" idx="2"/>
           </p:nvPr>
         </p:nvSpPr>
-        <p:spPr/>
+        <p:spPr>
+          <a:xfrm>
+            <a:off x="241299" y="377171"/>
+            <a:ext cx="8584293" cy="3518297"/>
+          </a:xfrm>
+        </p:spPr>
         <p:txBody>
-          <a:bodyPr/>
+          <a:bodyPr>
+            <a:noAutofit/>
+          </a:bodyPr>
           <a:lstStyle/>
           <a:p>
             <a:pPr lvl="0" indent="0">
               <a:buNone/>
             </a:pPr>
             <a:r>
-              <a:rPr>
-                <a:latin typeface="Courier"/>
-              </a:rPr>
-              <a:t>
-    Kruskal-Wallis rank sum test
-data:  nivel_educativo by satisfaccion_democracia
-Kruskal-Wallis chi-squared = 6.5416, df = 3, p-value = 0.08804</a:t>
-            </a:r>
-          </a:p>
-          <a:p>
-            <a:pPr lvl="0" indent="0" marL="0">
+              <a:rPr sz="1400" b="1" dirty="0" err="1"/>
+              <a:t>Interpretación</a:t>
+            </a:r>
+            <a:r>
+              <a:rPr sz="1400" b="1" dirty="0"/>
+              <a:t> de </a:t>
+            </a:r>
+            <a:r>
+              <a:rPr sz="1400" b="1" dirty="0" err="1"/>
+              <a:t>pruebas</a:t>
+            </a:r>
+            <a:r>
+              <a:rPr sz="1400" b="1" dirty="0"/>
+              <a:t> </a:t>
+            </a:r>
+            <a:r>
+              <a:rPr sz="1400" b="1" dirty="0" err="1"/>
+              <a:t>asociación</a:t>
+            </a:r>
+            <a:r>
+              <a:rPr sz="1400" b="1" dirty="0"/>
+              <a:t> de </a:t>
+            </a:r>
+            <a:r>
+              <a:rPr sz="1400" b="1" dirty="0" err="1"/>
+              <a:t>sexo</a:t>
+            </a:r>
+            <a:r>
+              <a:rPr sz="1400" b="1" dirty="0"/>
+              <a:t> con la </a:t>
+            </a:r>
+            <a:r>
+              <a:rPr sz="1400" b="1" dirty="0" err="1"/>
+              <a:t>democracia</a:t>
+            </a:r>
+            <a:endParaRPr sz="1400" b="1" dirty="0"/>
+          </a:p>
+          <a:p>
+            <a:pPr marL="0" lvl="0" indent="0">
               <a:buNone/>
             </a:pPr>
             <a:r>
-              <a:rPr/>
-              <a:t>El gráfico de cajas muestra distribuciones muy similares del nivel educativo entre las distintas categorías de satisfacción con la democracia. Las medianas presentan valores prácticamente equivalentes y existe un amplio solapamiento entre los rangos intercuartílicos de los grupos analizados, lo que sugiere diferencias reducidas en los niveles educativos según el grado de satisfacción democrática.</a:t>
-            </a:r>
-          </a:p>
-          <a:p>
-            <a:pPr lvl="0" indent="0" marL="0">
-              <a:buNone/>
-            </a:pPr>
-            <a:r>
-              <a:rPr/>
-              <a:t>Para evaluar formalmente estas diferencias se aplicó una prueba no paramétrica de Kruskal-Wallis. Los resultados indican que las diferencias observadas no son estadísticamente significativas (χ² = 6,54; gl = 3; p = 0,088). En consecuencia, no existe evidencia suficiente para afirmar que el nivel educativo se asocie con la satisfacción con la democracia en Argentina durante 2023.</a:t>
-            </a:r>
-          </a:p>
-          <a:p>
-            <a:pPr lvl="0" indent="0" marL="0">
-              <a:buNone/>
-            </a:pPr>
-            <a:r>
-              <a:rPr/>
-              <a:t>Si bien el valor p obtenido se aproxima al umbral convencional de significancia estadística, los resultados no permiten rechazar la hipótesis nula de igualdad entre los grupos.</a:t>
-            </a:r>
-          </a:p>
-          <a:p>
-            <a:pPr lvl="0" indent="0" marL="0">
-              <a:buNone/>
-            </a:pPr>
-            <a:r>
-              <a:rPr/>
-              <a:t>Dado que las variables sociodemográficas consideradas no mostraron asociaciones estadísticamente significativas con la satisfacción democrática, se incorporó adicionalmente la variable aprobación presidencial con fines exploratorios. El objetivo fue evaluar si variables de carácter político permiten explicar en mayor medida las diferencias observadas en los niveles de satisfacción con la democracia.</a:t>
-            </a:r>
-          </a:p>
-          <a:p>
-            <a:pPr lvl="0" indent="0" marL="0">
-              <a:buNone/>
-            </a:pPr>
-            <a:r>
-              <a:rPr/>
-              <a:t>Con el objetivo de profundizar el análisis, se estimaron dos modelos de regresión logística ordinal utilizando como variable dependiente la satisfacción con la democracia. El primer modelo incorporó únicamente variables sociodemográficas (sexo, edad y nivel educativo), mientras que el segundo agregó la variable de aprobación presidencial.</a:t>
-            </a:r>
-          </a:p>
-          <a:p>
-            <a:pPr lvl="0" indent="0" marL="0">
-              <a:spcBef>
-                <a:spcPts val="3000"/>
-              </a:spcBef>
-              <a:buNone/>
-            </a:pPr>
-            <a:r>
-              <a:rPr b="1"/>
-              <a:t>Modelo de regresión logística ordinal</a:t>
-            </a:r>
-          </a:p>
-          <a:p>
-            <a:pPr lvl="0" indent="0">
-              <a:buNone/>
-            </a:pPr>
-            <a:r>
-              <a:rPr>
-                <a:latin typeface="Courier"/>
-              </a:rPr>
-              <a:t>Rows: 1,118
-Columns: 10
-$ EDAD                    &lt;dbl&gt; 67, 29, 71, 31, 28, 51, 77, 35, 26, 25, 73, 41…
-$ SEXO                    &lt;dbl&gt; 2, 2, 1, 1, 1, 2, 2, 1, 1, 1, 2, 2, 1, 1, 2, 2…
-$ S11                     &lt;dbl&gt; 13, 11, 12, 13, 13, 13, 15, 13, 13, 15, 12, 12…
-$ P11STGBS.A              &lt;dbl&gt; 4, 4, 3, 3, 2, 2, 4, 3, 4, 3, 4, 4, 4, 1, 1, 4…
-$ P15STGBS                &lt;dbl&gt; 2, 2, 2, 2, 1, 2, 1, 2, 2, 1, 2, 2, 2, 1, 2, 2…
-$ edad                    &lt;dbl&gt; 67, 29, 71, 31, 28, 51, 77, 35, 26, 25, 73, 41…
-$ sexo                    &lt;fct&gt; Mujer, Mujer, Hombre, Hombre, Hombre, Mujer, M…
-$ nivel_educativo         &lt;dbl&gt; 13, 11, 12, 13, 13, 13, 15, 13, 13, 15, 12, 12…
-$ satisfaccion_democracia &lt;ord&gt; Nada satisfecho, Nada satisfecho, No muy satis…
-$ aprobacion_presidencial &lt;fct&gt; Desaprueba, Desaprueba, Desaprueba, Desaprueba…</a:t>
-            </a:r>
-          </a:p>
-          <a:p>
-            <a:pPr lvl="0" indent="0">
-              <a:buNone/>
-            </a:pPr>
-            <a:r>
-              <a:rPr>
-                <a:latin typeface="Courier"/>
-              </a:rPr>
-              <a:t>Call:
-polr(formula = satisfaccion_democracia ~ sexo + edad + nivel_educativo, 
-    data = datos_regresion, Hess = TRUE)
-Coefficients:
-                    Value Std. Error t value
-sexoMujer       -0.175102   0.110674  -1.582
-edad             0.004439   0.003396   1.307
-nivel_educativo -0.023043   0.017551  -1.313
-Intercepts:
-                                      Value   Std. Error t value
-Muy satisfecho|Más bien satisfecho    -2.7013  0.3179    -8.4969
-Más bien satisfecho|No muy satisfecho -0.7238  0.3023    -2.3943
-No muy satisfecho|Nada satisfecho      1.2017  0.3037     3.9569
-Residual Deviance: 2766.882 
-AIC: 2778.882 </a:t>
-            </a:r>
-          </a:p>
-          <a:p>
-            <a:pPr lvl="0" indent="0" marL="0">
-              <a:spcBef>
-                <a:spcPts val="3000"/>
-              </a:spcBef>
-              <a:buNone/>
-            </a:pPr>
-            <a:r>
-              <a:rPr b="1"/>
-              <a:t>MODELO 1</a:t>
-            </a:r>
-          </a:p>
-          <a:p>
-            <a:pPr lvl="0" indent="0" marL="0">
-              <a:buNone/>
-            </a:pPr>
-            <a:r>
-              <a:rPr/>
-              <a:t>Los resultados del primer modelo muestran que ninguna de las variables sociodemográficas presenta una asociación estadísticamente relevante con la satisfacción democrática. Este hallazgo es consistente con los análisis bivariados realizados previamente.</a:t>
-            </a:r>
-          </a:p>
-          <a:p>
-            <a:pPr lvl="0" indent="0">
-              <a:buNone/>
-            </a:pPr>
-            <a:r>
-              <a:rPr>
-                <a:latin typeface="Courier"/>
-              </a:rPr>
-              <a:t>Call:
-polr(formula = satisfaccion_democracia ~ sexo + edad + nivel_educativo + 
-    aprobacion_presidencial, data = datos_regresion, Hess = TRUE)
-Coefficients:
-                                      Value Std. Error t value
-sexoMujer                         -0.131351   0.111996  -1.173
-edad                               0.005825   0.003423   1.702
-nivel_educativo                   -0.023443   0.017751  -1.321
-aprobacion_presidencialDesaprueba  1.596968   0.143629  11.119
-Intercepts:
-                                      Value   Std. Error t value
-Muy satisfecho|Más bien satisfecho    -1.5890  0.3343    -4.7524
-Más bien satisfecho|No muy satisfecho  0.5775  0.3274     1.7638
-No muy satisfecho|Nada satisfecho      2.6573  0.3354     7.9234
-Residual Deviance: 2636.541 
-AIC: 2650.541 </a:t>
-            </a:r>
-          </a:p>
-          <a:p>
-            <a:pPr lvl="0" indent="0" marL="0">
-              <a:spcBef>
-                <a:spcPts val="3000"/>
-              </a:spcBef>
-              <a:buNone/>
-            </a:pPr>
-            <a:r>
-              <a:rPr b="1"/>
-              <a:t>MODELO 2</a:t>
-            </a:r>
-          </a:p>
-          <a:p>
-            <a:pPr lvl="0" indent="0" marL="0">
-              <a:buNone/>
-            </a:pPr>
-            <a:r>
-              <a:rPr/>
-              <a:t>En contraste, al incorporar la aprobación presidencial en el segundo modelo, esta variable emerge como un predictor altamente relevante de la satisfacción con la democracia (t = 11,12). Además, el ajuste global del modelo mejora sustancialmente, reduciendo el AIC desde 2778,88 hasta 2650,54. Estos resultados indican que la evaluación que los ciudadanos realizan del desempeño del gobierno posee una capacidad explicativa considerablemente mayor que las características sociodemográficas analizadas.</a:t>
-            </a:r>
-          </a:p>
-          <a:p>
-            <a:pPr lvl="0" indent="0" marL="0">
-              <a:spcBef>
-                <a:spcPts val="3000"/>
-              </a:spcBef>
-              <a:buNone/>
-            </a:pPr>
-            <a:r>
-              <a:rPr b="1"/>
-              <a:t>Entrega 4</a:t>
-            </a:r>
-          </a:p>
-          <a:p>
-            <a:pPr lvl="0" indent="0" marL="0">
-              <a:buNone/>
-            </a:pPr>
-            <a:r>
-              <a:rPr/>
-              <a:t>Siguiendo las directrices para este ultima entrega,  se estimó un modelo de regresión logística binaria. esta técnica permite evaluar simultáneamente el efecto de múltiples variables independientes sobre la probabilidad de que un individuo pertenezca a una determinada categoría de la variable dependiente.</a:t>
-            </a:r>
-          </a:p>
-          <a:p>
-            <a:pPr lvl="0" indent="0" marL="0">
-              <a:buNone/>
-            </a:pPr>
-            <a:r>
-              <a:rPr/>
-              <a:t>Para ello, la variable satisfacción con la democracia fue recodificada en una variable dicotómica. Se agruparon las categorías </a:t>
-            </a:r>
-            <a:r>
-              <a:rPr i="1"/>
-              <a:t>muy satisfecho</a:t>
-            </a:r>
-            <a:r>
-              <a:rPr/>
+              <a:rPr sz="1400" dirty="0"/>
+              <a:t>La </a:t>
+            </a:r>
+            <a:r>
+              <a:rPr sz="1400" dirty="0" err="1"/>
+              <a:t>distribución</a:t>
+            </a:r>
+            <a:r>
+              <a:rPr sz="1400" dirty="0"/>
+              <a:t> de la </a:t>
+            </a:r>
+            <a:r>
+              <a:rPr sz="1400" dirty="0" err="1"/>
+              <a:t>satisfacción</a:t>
+            </a:r>
+            <a:r>
+              <a:rPr sz="1400" dirty="0"/>
+              <a:t> con la </a:t>
+            </a:r>
+            <a:r>
+              <a:rPr sz="1400" dirty="0" err="1"/>
+              <a:t>democracia</a:t>
+            </a:r>
+            <a:r>
+              <a:rPr sz="1400" dirty="0"/>
+              <a:t> </a:t>
+            </a:r>
+            <a:r>
+              <a:rPr sz="1400" dirty="0" err="1"/>
+              <a:t>presenta</a:t>
+            </a:r>
+            <a:r>
+              <a:rPr sz="1400" dirty="0"/>
+              <a:t> </a:t>
+            </a:r>
+            <a:r>
+              <a:rPr sz="1400" dirty="0" err="1"/>
+              <a:t>patrones</a:t>
+            </a:r>
+            <a:r>
+              <a:rPr sz="1400" dirty="0"/>
+              <a:t> </a:t>
+            </a:r>
+            <a:r>
+              <a:rPr sz="1400" dirty="0" err="1"/>
+              <a:t>similares</a:t>
+            </a:r>
+            <a:r>
+              <a:rPr sz="1400" dirty="0"/>
+              <a:t> entre hombres y </a:t>
+            </a:r>
+            <a:r>
+              <a:rPr sz="1400" dirty="0" err="1"/>
+              <a:t>mujeres</a:t>
+            </a:r>
+            <a:r>
+              <a:rPr sz="1400" dirty="0"/>
+              <a:t>. En ambos </a:t>
+            </a:r>
+            <a:r>
+              <a:rPr sz="1400" dirty="0" err="1"/>
+              <a:t>grupos</a:t>
+            </a:r>
+            <a:r>
+              <a:rPr sz="1400" dirty="0"/>
+              <a:t>, la </a:t>
+            </a:r>
+            <a:r>
+              <a:rPr sz="1400" dirty="0" err="1"/>
+              <a:t>categoría</a:t>
+            </a:r>
+            <a:r>
+              <a:rPr sz="1400" dirty="0"/>
+              <a:t> </a:t>
+            </a:r>
+            <a:r>
+              <a:rPr sz="1400" dirty="0" err="1"/>
+              <a:t>más</a:t>
+            </a:r>
+            <a:r>
+              <a:rPr sz="1400" dirty="0"/>
+              <a:t> </a:t>
+            </a:r>
+            <a:r>
+              <a:rPr sz="1400" dirty="0" err="1"/>
+              <a:t>frecuente</a:t>
+            </a:r>
+            <a:r>
+              <a:rPr sz="1400" dirty="0"/>
+              <a:t> </a:t>
+            </a:r>
+            <a:r>
+              <a:rPr sz="1400" dirty="0" err="1"/>
+              <a:t>corresponde</a:t>
+            </a:r>
+            <a:r>
+              <a:rPr sz="1400" dirty="0"/>
+              <a:t> a </a:t>
+            </a:r>
+            <a:r>
+              <a:rPr sz="1400" dirty="0" err="1"/>
+              <a:t>los</a:t>
+            </a:r>
+            <a:r>
+              <a:rPr sz="1400" dirty="0"/>
+              <a:t> </a:t>
+            </a:r>
+            <a:r>
+              <a:rPr sz="1400" dirty="0" err="1"/>
+              <a:t>encuestados</a:t>
+            </a:r>
+            <a:r>
+              <a:rPr sz="1400" dirty="0"/>
+              <a:t> </a:t>
+            </a:r>
+            <a:r>
+              <a:rPr sz="1400" i="1" dirty="0"/>
+              <a:t>no </a:t>
+            </a:r>
+            <a:r>
+              <a:rPr sz="1400" i="1" dirty="0" err="1"/>
+              <a:t>muy</a:t>
+            </a:r>
+            <a:r>
+              <a:rPr sz="1400" i="1" dirty="0"/>
+              <a:t> </a:t>
+            </a:r>
+            <a:r>
+              <a:rPr sz="1400" i="1" dirty="0" err="1"/>
+              <a:t>satisfechos</a:t>
+            </a:r>
+            <a:r>
+              <a:rPr sz="1400" dirty="0"/>
+              <a:t> con la </a:t>
+            </a:r>
+            <a:r>
+              <a:rPr sz="1400" dirty="0" err="1"/>
+              <a:t>democracia</a:t>
+            </a:r>
+            <a:r>
+              <a:rPr sz="1400" dirty="0"/>
+              <a:t>, </a:t>
+            </a:r>
+            <a:r>
+              <a:rPr sz="1400" dirty="0" err="1"/>
+              <a:t>alcanzando</a:t>
+            </a:r>
+            <a:r>
+              <a:rPr sz="1400" dirty="0"/>
+              <a:t> un 45,1% entre </a:t>
+            </a:r>
+            <a:r>
+              <a:rPr sz="1400" dirty="0" err="1"/>
+              <a:t>los</a:t>
+            </a:r>
+            <a:r>
+              <a:rPr sz="1400" dirty="0"/>
+              <a:t> hombres y un 39,8% entre las </a:t>
+            </a:r>
+            <a:r>
+              <a:rPr sz="1400" dirty="0" err="1"/>
+              <a:t>mujeres</a:t>
+            </a:r>
+            <a:r>
+              <a:rPr sz="1400" dirty="0"/>
+              <a:t>. </a:t>
+            </a:r>
+            <a:r>
+              <a:rPr sz="1400" dirty="0" err="1"/>
+              <a:t>Asimismo</a:t>
+            </a:r>
+            <a:r>
+              <a:rPr sz="1400" dirty="0"/>
+              <a:t>, las </a:t>
+            </a:r>
+            <a:r>
+              <a:rPr sz="1400" dirty="0" err="1"/>
+              <a:t>mujeres</a:t>
+            </a:r>
+            <a:r>
+              <a:rPr sz="1400" dirty="0"/>
+              <a:t> </a:t>
+            </a:r>
+            <a:r>
+              <a:rPr sz="1400" dirty="0" err="1"/>
+              <a:t>presentan</a:t>
+            </a:r>
+            <a:r>
+              <a:rPr sz="1400" dirty="0"/>
+              <a:t> </a:t>
+            </a:r>
+            <a:r>
+              <a:rPr sz="1400" dirty="0" err="1"/>
+              <a:t>una</a:t>
+            </a:r>
+            <a:r>
+              <a:rPr sz="1400" dirty="0"/>
+              <a:t> </a:t>
+            </a:r>
+            <a:r>
+              <a:rPr sz="1400" dirty="0" err="1"/>
+              <a:t>proporción</a:t>
+            </a:r>
+            <a:r>
+              <a:rPr sz="1400" dirty="0"/>
+              <a:t> </a:t>
+            </a:r>
+            <a:r>
+              <a:rPr sz="1400" dirty="0" err="1"/>
+              <a:t>ligeramente</a:t>
+            </a:r>
+            <a:r>
+              <a:rPr sz="1400" dirty="0"/>
+              <a:t> mayor de personas </a:t>
+            </a:r>
+            <a:r>
+              <a:rPr sz="1400" i="1" dirty="0" err="1"/>
+              <a:t>más</a:t>
+            </a:r>
+            <a:r>
+              <a:rPr sz="1400" i="1" dirty="0"/>
+              <a:t> bien </a:t>
+            </a:r>
+            <a:r>
+              <a:rPr sz="1400" i="1" dirty="0" err="1"/>
+              <a:t>satisfechas</a:t>
+            </a:r>
+            <a:r>
+              <a:rPr sz="1400" dirty="0"/>
+              <a:t> (32,1%) </a:t>
+            </a:r>
+            <a:r>
+              <a:rPr sz="1400" dirty="0" err="1"/>
+              <a:t>en</a:t>
+            </a:r>
+            <a:r>
+              <a:rPr sz="1400" dirty="0"/>
+              <a:t> </a:t>
+            </a:r>
+            <a:r>
+              <a:rPr sz="1400" dirty="0" err="1"/>
+              <a:t>comparación</a:t>
+            </a:r>
+            <a:r>
+              <a:rPr sz="1400" dirty="0"/>
+              <a:t> con </a:t>
+            </a:r>
+            <a:r>
+              <a:rPr sz="1400" dirty="0" err="1"/>
+              <a:t>los</a:t>
+            </a:r>
+            <a:r>
+              <a:rPr sz="1400" dirty="0"/>
+              <a:t> hombres (27,9%). Por </a:t>
+            </a:r>
+            <a:r>
+              <a:rPr sz="1400" dirty="0" err="1"/>
+              <a:t>su</a:t>
+            </a:r>
+            <a:r>
+              <a:rPr sz="1400" dirty="0"/>
+              <a:t> </a:t>
+            </a:r>
+            <a:r>
+              <a:rPr sz="1400" dirty="0" err="1"/>
+              <a:t>parte</a:t>
+            </a:r>
+            <a:r>
+              <a:rPr sz="1400" dirty="0"/>
+              <a:t>, las </a:t>
+            </a:r>
+            <a:r>
+              <a:rPr sz="1400" dirty="0" err="1"/>
+              <a:t>categorías</a:t>
+            </a:r>
+            <a:r>
+              <a:rPr sz="1400" dirty="0"/>
+              <a:t> </a:t>
+            </a:r>
+            <a:r>
+              <a:rPr sz="1400" i="1" dirty="0" err="1"/>
+              <a:t>muy</a:t>
+            </a:r>
+            <a:r>
+              <a:rPr sz="1400" i="1" dirty="0"/>
+              <a:t> </a:t>
+            </a:r>
+            <a:r>
+              <a:rPr sz="1400" i="1" dirty="0" err="1"/>
+              <a:t>satisfecho</a:t>
+            </a:r>
+            <a:r>
+              <a:rPr sz="1400" dirty="0"/>
               <a:t> y </a:t>
             </a:r>
             <a:r>
-              <a:rPr i="1"/>
-              <a:t>más bien satisfecho</a:t>
-            </a:r>
-            <a:r>
-              <a:rPr/>
-              <a:t> como personas satisfechas con la democracia, mientras que las categorías </a:t>
-            </a:r>
-            <a:r>
-              <a:rPr i="1"/>
-              <a:t>no muy satisfecho</a:t>
-            </a:r>
-            <a:r>
-              <a:rPr/>
-              <a:t> y </a:t>
-            </a:r>
-            <a:r>
-              <a:rPr i="1"/>
-              <a:t>nada satisfecho</a:t>
-            </a:r>
-            <a:r>
-              <a:rPr/>
-              <a:t> fueron agrupadas como personas insatisfechas. Posteriormente, se estimó un modelo que incorpora las variables sexo, edad, nivel educativo y aprobación presidencial, con el objetivo de identificar cuáles de estos factores se asocian con la probabilidad de manifestar satisfacción con el funcionamiento de la democracia en Argentina durante 2023.</a:t>
-            </a:r>
-          </a:p>
-          <a:p>
-            <a:pPr lvl="0" indent="0" marL="0">
-              <a:spcBef>
-                <a:spcPts val="3000"/>
-              </a:spcBef>
-              <a:buNone/>
-            </a:pPr>
-            <a:r>
-              <a:rPr b="1"/>
-              <a:t>Regresión logística binaria</a:t>
-            </a:r>
-          </a:p>
-          <a:p>
-            <a:pPr lvl="0" indent="0">
-              <a:buNone/>
-            </a:pPr>
-            <a:r>
-              <a:rPr>
-                <a:latin typeface="Courier"/>
-              </a:rPr>
-              <a:t>
-Call:
-glm(formula = satisfaccion_binaria ~ sexo + edad + nivel_educativo + 
-    aprobacion_presidencial, family = binomial(link = "logit"), 
-    data = datos_logit)
-Coefficients:
-                                   Estimate Std. Error z value Pr(&gt;|z|)    
-(Intercept)                        0.413035   0.386004   1.070   0.2846    
-sexoMujer                          0.187194   0.133104   1.406   0.1596    
-edad                              -0.003430   0.004058  -0.845   0.3980    
-nivel_educativo                    0.036041   0.021622   1.667   0.0955 .  
-aprobacion_presidencialDesaprueba -1.751667   0.160798 -10.894   &lt;2e-16 ***
----
-Signif. codes:  0 '***' 0.001 '**' 0.01 '*' 0.05 '.' 0.1 ' ' 1
-(Dispersion parameter for binomial family taken to be 1)
-    Null deviance: 1474.8  on 1117  degrees of freedom
-Residual deviance: 1337.3  on 1113  degrees of freedom
-AIC: 1347.3
-Number of Fisher Scoring iterations: 4</a:t>
-            </a:r>
-          </a:p>
-          <a:p>
-            <a:pPr lvl="0" indent="0">
-              <a:buNone/>
-            </a:pPr>
-            <a:r>
-              <a:rPr>
-                <a:latin typeface="Courier"/>
-              </a:rPr>
-              <a:t>                      (Intercept)                         sexoMujer 
-                        1.5113973                         1.2058615 
-                             edad                   nivel_educativo 
-                        0.9965755                         1.0366986 
-aprobacion_presidencialDesaprueba 
-                        0.1734845 </a:t>
-            </a:r>
-          </a:p>
-          <a:p>
-            <a:pPr lvl="0" indent="0" marL="0">
-              <a:spcBef>
-                <a:spcPts val="3000"/>
-              </a:spcBef>
-              <a:buNone/>
-            </a:pPr>
-            <a:r>
-              <a:rPr b="1"/>
-              <a:t>Hallazgos</a:t>
-            </a:r>
-          </a:p>
-          <a:p>
-            <a:pPr lvl="0" indent="0" marL="0">
-              <a:buNone/>
-            </a:pPr>
-            <a:r>
-              <a:rPr/>
-              <a:t>Los resultados de la regresión logística binaria muestran que la aprobación presidencial es la única variable que presenta una asociación estadísticamente significativa con la satisfacción con la democracia. En particular, los individuos que desaprueban la gestión presidencial tienen una probabilidad considerablemente menor de declararse satisfechos con la democracia en comparación con quienes aprueban al presidente (OR = 0,173; p &lt; 0,001). Esto equivale a una reducción aproximada del 83% en las probabilidades de manifestar satisfacción democrática.</a:t>
-            </a:r>
-          </a:p>
-          <a:p>
-            <a:pPr lvl="0" indent="0" marL="0">
-              <a:buNone/>
-            </a:pPr>
-            <a:r>
-              <a:rPr/>
-              <a:t>Por el contrario, las variables sexo, edad y nivel educativo no alcanzan niveles convencionales de significancia estadística, lo que sugiere que estas características sociodemográficas poseen una capacidad explicativa limitada respecto de la satisfacción con la democracia. En conjunto, los resultados indican que las percepciones políticas vinculadas a la evaluación del gobierno desempeñan un papel mucho más relevante que los atributos sociodemográficos en la explicación de la satisfacción democrática en Argentina durante 2023.</a:t>
-            </a:r>
-          </a:p>
-          <a:p>
-            <a:pPr lvl="0" indent="0" marL="0">
-              <a:spcBef>
-                <a:spcPts val="3000"/>
-              </a:spcBef>
-              <a:buNone/>
-            </a:pPr>
-            <a:r>
-              <a:rPr b="1"/>
-              <a:t>Probabilidades predichas de satisfacción con la democracia</a:t>
+              <a:rPr sz="1400" i="1" dirty="0"/>
+              <a:t>nada </a:t>
+            </a:r>
+            <a:r>
+              <a:rPr sz="1400" i="1" dirty="0" err="1"/>
+              <a:t>satisfecho</a:t>
+            </a:r>
+            <a:r>
+              <a:rPr sz="1400" dirty="0"/>
+              <a:t> </a:t>
+            </a:r>
+            <a:r>
+              <a:rPr sz="1400" dirty="0" err="1"/>
+              <a:t>registran</a:t>
+            </a:r>
+            <a:r>
+              <a:rPr sz="1400" dirty="0"/>
+              <a:t> </a:t>
+            </a:r>
+            <a:r>
+              <a:rPr sz="1400" dirty="0" err="1"/>
+              <a:t>porcentajes</a:t>
+            </a:r>
+            <a:r>
+              <a:rPr sz="1400" dirty="0"/>
+              <a:t> </a:t>
+            </a:r>
+            <a:r>
+              <a:rPr sz="1400" dirty="0" err="1"/>
+              <a:t>relativamente</a:t>
+            </a:r>
+            <a:r>
+              <a:rPr sz="1400" dirty="0"/>
+              <a:t> </a:t>
+            </a:r>
+            <a:r>
+              <a:rPr sz="1400" dirty="0" err="1"/>
+              <a:t>similares</a:t>
+            </a:r>
+            <a:r>
+              <a:rPr sz="1400" dirty="0"/>
+              <a:t> entre ambos </a:t>
+            </a:r>
+            <a:r>
+              <a:rPr sz="1400" dirty="0" err="1"/>
+              <a:t>sexos</a:t>
+            </a:r>
+            <a:r>
+              <a:rPr sz="1400" dirty="0"/>
+              <a:t>.</a:t>
             </a:r>
           </a:p>
         </p:txBody>
       </p:sp>
       <p:pic>
         <p:nvPicPr>
-          <p:cNvPr descr="trabajo2_files/figure-pptx/grafico-probabilidades-predichas-1.png" id="0" name="Picture 1"/>
+          <p:cNvPr id="2" name="Picture 1" descr="trabajo2_files/figure-pptx/grafico-edad-satisfaccion-1.png"/>
           <p:cNvPicPr>
             <a:picLocks noGrp="1" noChangeAspect="1"/>
           </p:cNvPicPr>
@@ -3559,7 +3862,1552 @@
         </p:blipFill>
         <p:spPr bwMode="auto">
           <a:xfrm>
-            <a:off x="3568700" y="1117600"/>
+            <a:off x="1420586" y="2136320"/>
+            <a:ext cx="5576207" cy="2788104"/>
+          </a:xfrm>
+          <a:prstGeom prst="rect">
+            <a:avLst/>
+          </a:prstGeom>
+          <a:noFill/>
+          <a:ln w="9525">
+            <a:noFill/>
+            <a:headEnd/>
+            <a:tailEnd/>
+          </a:ln>
+        </p:spPr>
+      </p:pic>
+    </p:spTree>
+  </p:cSld>
+  <p:clrMapOvr>
+    <a:masterClrMapping/>
+  </p:clrMapOvr>
+</p:sld>
+</file>
+
+<file path=ppt/slides/slide11.xml><?xml version="1.0" encoding="utf-8"?>
+<p:sld xmlns:a="http://schemas.openxmlformats.org/drawingml/2006/main" xmlns:r="http://schemas.openxmlformats.org/officeDocument/2006/relationships" xmlns:p="http://schemas.openxmlformats.org/presentationml/2006/main">
+  <p:cSld>
+    <p:spTree>
+      <p:nvGrpSpPr>
+        <p:cNvPr id="1" name=""/>
+        <p:cNvGrpSpPr/>
+        <p:nvPr/>
+      </p:nvGrpSpPr>
+      <p:grpSpPr>
+        <a:xfrm>
+          <a:off x="0" y="0"/>
+          <a:ext cx="0" cy="0"/>
+          <a:chOff x="0" y="0"/>
+          <a:chExt cx="0" cy="0"/>
+        </a:xfrm>
+      </p:grpSpPr>
+      <p:sp>
+        <p:nvSpPr>
+          <p:cNvPr id="4" name="Text Placeholder 3"/>
+          <p:cNvSpPr>
+            <a:spLocks noGrp="1"/>
+          </p:cNvSpPr>
+          <p:nvPr>
+            <p:ph type="body" sz="half" idx="2"/>
+          </p:nvPr>
+        </p:nvSpPr>
+        <p:spPr>
+          <a:xfrm>
+            <a:off x="383723" y="308883"/>
+            <a:ext cx="8703127" cy="3518297"/>
+          </a:xfrm>
+        </p:spPr>
+        <p:txBody>
+          <a:bodyPr>
+            <a:noAutofit/>
+          </a:bodyPr>
+          <a:lstStyle/>
+          <a:p>
+            <a:r>
+              <a:rPr lang="es-ES" sz="1200" b="1" dirty="0"/>
+              <a:t>Asociación entre nivel educativo y satisfacción con la democracia</a:t>
+            </a:r>
+          </a:p>
+          <a:p>
+            <a:pPr lvl="0" indent="0">
+              <a:buNone/>
+            </a:pPr>
+            <a:r>
+              <a:rPr sz="1200" dirty="0">
+                <a:latin typeface="Courier"/>
+              </a:rPr>
+              <a:t>
+</a:t>
+            </a:r>
+            <a:r>
+              <a:rPr sz="1200" dirty="0"/>
+              <a:t>El </a:t>
+            </a:r>
+            <a:r>
+              <a:rPr sz="1200" dirty="0" err="1"/>
+              <a:t>gráfico</a:t>
+            </a:r>
+            <a:r>
+              <a:rPr sz="1200" dirty="0"/>
+              <a:t> de </a:t>
+            </a:r>
+            <a:r>
+              <a:rPr sz="1200" dirty="0" err="1"/>
+              <a:t>cajas</a:t>
+            </a:r>
+            <a:r>
+              <a:rPr sz="1200" dirty="0"/>
+              <a:t> </a:t>
+            </a:r>
+            <a:r>
+              <a:rPr sz="1200" dirty="0" err="1"/>
+              <a:t>sugiere</a:t>
+            </a:r>
+            <a:r>
+              <a:rPr sz="1200" dirty="0"/>
+              <a:t> </a:t>
+            </a:r>
+            <a:r>
+              <a:rPr sz="1200" dirty="0" err="1"/>
+              <a:t>algunas</a:t>
+            </a:r>
+            <a:r>
+              <a:rPr sz="1200" dirty="0"/>
+              <a:t> </a:t>
+            </a:r>
+            <a:r>
+              <a:rPr sz="1200" dirty="0" err="1"/>
+              <a:t>diferencias</a:t>
+            </a:r>
+            <a:r>
+              <a:rPr sz="1200" dirty="0"/>
+              <a:t> </a:t>
+            </a:r>
+            <a:r>
+              <a:rPr sz="1200" dirty="0" err="1"/>
+              <a:t>en</a:t>
+            </a:r>
+            <a:r>
+              <a:rPr sz="1200" dirty="0"/>
+              <a:t> la </a:t>
+            </a:r>
+            <a:r>
+              <a:rPr sz="1200" dirty="0" err="1"/>
+              <a:t>distribución</a:t>
+            </a:r>
+            <a:r>
+              <a:rPr sz="1200" dirty="0"/>
+              <a:t> de la </a:t>
+            </a:r>
+            <a:r>
+              <a:rPr sz="1200" dirty="0" err="1"/>
+              <a:t>edad</a:t>
+            </a:r>
+            <a:r>
+              <a:rPr sz="1200" dirty="0"/>
+              <a:t> </a:t>
+            </a:r>
+            <a:r>
+              <a:rPr sz="1200" dirty="0" err="1"/>
+              <a:t>según</a:t>
+            </a:r>
+            <a:r>
+              <a:rPr sz="1200" dirty="0"/>
+              <a:t> </a:t>
+            </a:r>
+            <a:r>
+              <a:rPr sz="1200" dirty="0" err="1"/>
+              <a:t>el</a:t>
+            </a:r>
+            <a:r>
+              <a:rPr sz="1200" dirty="0"/>
+              <a:t> </a:t>
+            </a:r>
+            <a:r>
+              <a:rPr sz="1200" dirty="0" err="1"/>
+              <a:t>nivel</a:t>
+            </a:r>
+            <a:r>
+              <a:rPr sz="1200" dirty="0"/>
+              <a:t> de </a:t>
+            </a:r>
+            <a:r>
+              <a:rPr sz="1200" dirty="0" err="1"/>
+              <a:t>satisfacción</a:t>
+            </a:r>
+            <a:r>
+              <a:rPr sz="1200" dirty="0"/>
+              <a:t> con la </a:t>
+            </a:r>
+            <a:r>
+              <a:rPr sz="1200" dirty="0" err="1"/>
+              <a:t>democracia</a:t>
+            </a:r>
+            <a:r>
+              <a:rPr sz="1200" dirty="0"/>
+              <a:t>. En particular, </a:t>
+            </a:r>
+            <a:r>
+              <a:rPr sz="1200" dirty="0" err="1"/>
+              <a:t>los</a:t>
+            </a:r>
+            <a:r>
+              <a:rPr sz="1200" dirty="0"/>
+              <a:t> </a:t>
+            </a:r>
+            <a:r>
+              <a:rPr sz="1200" dirty="0" err="1"/>
+              <a:t>encuestados</a:t>
+            </a:r>
+            <a:r>
+              <a:rPr sz="1200" dirty="0"/>
+              <a:t> </a:t>
+            </a:r>
+            <a:r>
+              <a:rPr sz="1200" dirty="0" err="1"/>
+              <a:t>que</a:t>
+            </a:r>
+            <a:r>
+              <a:rPr sz="1200" dirty="0"/>
+              <a:t> se </a:t>
+            </a:r>
+            <a:r>
+              <a:rPr sz="1200" dirty="0" err="1"/>
+              <a:t>declaran</a:t>
+            </a:r>
+            <a:r>
+              <a:rPr sz="1200" dirty="0"/>
+              <a:t> </a:t>
+            </a:r>
+            <a:r>
+              <a:rPr sz="1200" dirty="0" err="1"/>
+              <a:t>muy</a:t>
+            </a:r>
+            <a:r>
+              <a:rPr sz="1200" dirty="0"/>
+              <a:t> </a:t>
+            </a:r>
+            <a:r>
+              <a:rPr sz="1200" dirty="0" err="1"/>
+              <a:t>satisfechos</a:t>
+            </a:r>
+            <a:r>
+              <a:rPr sz="1200" dirty="0"/>
+              <a:t> </a:t>
+            </a:r>
+            <a:r>
+              <a:rPr sz="1200" dirty="0" err="1"/>
+              <a:t>presentan</a:t>
+            </a:r>
+            <a:r>
+              <a:rPr sz="1200" dirty="0"/>
+              <a:t> </a:t>
+            </a:r>
+            <a:r>
+              <a:rPr sz="1200" dirty="0" err="1"/>
+              <a:t>una</a:t>
+            </a:r>
+            <a:r>
+              <a:rPr sz="1200" dirty="0"/>
+              <a:t> </a:t>
+            </a:r>
+            <a:r>
+              <a:rPr sz="1200" dirty="0" err="1"/>
+              <a:t>mediana</a:t>
+            </a:r>
+            <a:r>
+              <a:rPr sz="1200" dirty="0"/>
+              <a:t> de </a:t>
+            </a:r>
+            <a:r>
+              <a:rPr sz="1200" dirty="0" err="1"/>
+              <a:t>edad</a:t>
+            </a:r>
+            <a:r>
+              <a:rPr sz="1200" dirty="0"/>
+              <a:t> </a:t>
+            </a:r>
+            <a:r>
+              <a:rPr sz="1200" dirty="0" err="1"/>
+              <a:t>ligeramente</a:t>
+            </a:r>
+            <a:r>
+              <a:rPr sz="1200" dirty="0"/>
+              <a:t> inferior al resto de </a:t>
+            </a:r>
+            <a:r>
+              <a:rPr sz="1200" dirty="0" err="1"/>
+              <a:t>los</a:t>
+            </a:r>
+            <a:r>
+              <a:rPr sz="1200" dirty="0"/>
+              <a:t> </a:t>
+            </a:r>
+            <a:r>
+              <a:rPr sz="1200" dirty="0" err="1"/>
+              <a:t>grupos</a:t>
+            </a:r>
+            <a:r>
+              <a:rPr sz="1200" dirty="0"/>
+              <a:t>. Sin embargo, las </a:t>
+            </a:r>
+            <a:r>
+              <a:rPr sz="1200" dirty="0" err="1"/>
+              <a:t>distribuciones</a:t>
+            </a:r>
+            <a:r>
+              <a:rPr sz="1200" dirty="0"/>
+              <a:t> </a:t>
+            </a:r>
+            <a:r>
+              <a:rPr sz="1200" dirty="0" err="1"/>
+              <a:t>muestran</a:t>
+            </a:r>
+            <a:r>
+              <a:rPr sz="1200" dirty="0"/>
+              <a:t> un </a:t>
+            </a:r>
+            <a:r>
+              <a:rPr sz="1200" dirty="0" err="1"/>
+              <a:t>amplio</a:t>
+            </a:r>
+            <a:r>
+              <a:rPr sz="1200" dirty="0"/>
+              <a:t> </a:t>
+            </a:r>
+            <a:r>
+              <a:rPr sz="1200" dirty="0" err="1"/>
+              <a:t>grado</a:t>
+            </a:r>
+            <a:r>
+              <a:rPr sz="1200" dirty="0"/>
+              <a:t> de </a:t>
+            </a:r>
+            <a:r>
+              <a:rPr sz="1200" dirty="0" err="1"/>
+              <a:t>superposición</a:t>
+            </a:r>
+            <a:r>
+              <a:rPr sz="1200" dirty="0"/>
+              <a:t> entre </a:t>
+            </a:r>
+            <a:r>
+              <a:rPr sz="1200" dirty="0" err="1"/>
+              <a:t>categorías</a:t>
+            </a:r>
+            <a:r>
+              <a:rPr sz="1200" dirty="0"/>
+              <a:t>.</a:t>
+            </a:r>
+            <a:endParaRPr lang="es-CL" sz="1200" dirty="0"/>
+          </a:p>
+          <a:p>
+            <a:pPr lvl="0" indent="0">
+              <a:buNone/>
+            </a:pPr>
+            <a:r>
+              <a:rPr sz="1200" dirty="0"/>
+              <a:t>no </a:t>
+            </a:r>
+            <a:r>
+              <a:rPr sz="1200" dirty="0" err="1"/>
+              <a:t>existe</a:t>
+            </a:r>
+            <a:r>
+              <a:rPr sz="1200" dirty="0"/>
+              <a:t> </a:t>
+            </a:r>
+            <a:r>
+              <a:rPr sz="1200" dirty="0" err="1"/>
+              <a:t>evidencia</a:t>
+            </a:r>
+            <a:r>
+              <a:rPr sz="1200" dirty="0"/>
+              <a:t> </a:t>
+            </a:r>
+            <a:r>
+              <a:rPr sz="1200" dirty="0" err="1"/>
+              <a:t>suficiente</a:t>
+            </a:r>
+            <a:r>
+              <a:rPr sz="1200" dirty="0"/>
+              <a:t> para </a:t>
+            </a:r>
+            <a:r>
+              <a:rPr sz="1200" dirty="0" err="1"/>
+              <a:t>afirmar</a:t>
+            </a:r>
+            <a:r>
+              <a:rPr sz="1200" dirty="0"/>
+              <a:t> </a:t>
+            </a:r>
+            <a:r>
+              <a:rPr sz="1200" dirty="0" err="1"/>
+              <a:t>que</a:t>
+            </a:r>
+            <a:r>
+              <a:rPr sz="1200" dirty="0"/>
+              <a:t> la </a:t>
+            </a:r>
+            <a:r>
+              <a:rPr sz="1200" dirty="0" err="1"/>
+              <a:t>edad</a:t>
+            </a:r>
+            <a:r>
+              <a:rPr sz="1200" dirty="0"/>
+              <a:t> se </a:t>
+            </a:r>
+            <a:r>
+              <a:rPr sz="1200" dirty="0" err="1"/>
+              <a:t>asocie</a:t>
+            </a:r>
+            <a:r>
+              <a:rPr sz="1200" dirty="0"/>
+              <a:t> con </a:t>
+            </a:r>
+            <a:r>
+              <a:rPr sz="1200" dirty="0" err="1"/>
+              <a:t>el</a:t>
+            </a:r>
+            <a:r>
+              <a:rPr sz="1200" dirty="0"/>
+              <a:t> </a:t>
+            </a:r>
+            <a:r>
+              <a:rPr sz="1200" dirty="0" err="1"/>
+              <a:t>nivel</a:t>
+            </a:r>
+            <a:r>
+              <a:rPr sz="1200" dirty="0"/>
+              <a:t> de </a:t>
+            </a:r>
+            <a:r>
+              <a:rPr sz="1200" dirty="0" err="1"/>
+              <a:t>satisfacción</a:t>
+            </a:r>
+            <a:r>
+              <a:rPr sz="1200" dirty="0"/>
+              <a:t> con la </a:t>
+            </a:r>
+            <a:r>
+              <a:rPr sz="1200" dirty="0" err="1"/>
+              <a:t>democracia</a:t>
+            </a:r>
+            <a:r>
+              <a:rPr sz="1200" dirty="0"/>
+              <a:t> </a:t>
+            </a:r>
+            <a:r>
+              <a:rPr sz="1200" dirty="0" err="1"/>
+              <a:t>en</a:t>
+            </a:r>
+            <a:r>
+              <a:rPr sz="1200" dirty="0"/>
+              <a:t> Argentina </a:t>
+            </a:r>
+            <a:r>
+              <a:rPr sz="1200" dirty="0" err="1"/>
+              <a:t>durante</a:t>
+            </a:r>
+            <a:r>
+              <a:rPr sz="1200" dirty="0"/>
+              <a:t> 2023.No obstante, </a:t>
+            </a:r>
+            <a:r>
+              <a:rPr sz="1200" dirty="0" err="1"/>
+              <a:t>el</a:t>
+            </a:r>
+            <a:r>
+              <a:rPr sz="1200" dirty="0"/>
+              <a:t> valor p </a:t>
+            </a:r>
+            <a:r>
+              <a:rPr sz="1200" dirty="0" err="1"/>
+              <a:t>obtenido</a:t>
+            </a:r>
+            <a:r>
+              <a:rPr sz="1200" dirty="0"/>
+              <a:t> se </a:t>
+            </a:r>
+            <a:r>
+              <a:rPr sz="1200" dirty="0" err="1"/>
+              <a:t>aproxima</a:t>
+            </a:r>
+            <a:r>
+              <a:rPr sz="1200" dirty="0"/>
+              <a:t> al umbral de </a:t>
+            </a:r>
+            <a:r>
+              <a:rPr sz="1200" dirty="0" err="1"/>
+              <a:t>significancia</a:t>
+            </a:r>
+            <a:r>
+              <a:rPr sz="1200" dirty="0"/>
+              <a:t> </a:t>
+            </a:r>
+            <a:r>
+              <a:rPr sz="1200" dirty="0" err="1"/>
+              <a:t>estadística</a:t>
+            </a:r>
+            <a:r>
+              <a:rPr sz="1200" dirty="0"/>
+              <a:t>, </a:t>
+            </a:r>
+            <a:r>
+              <a:rPr sz="1200" dirty="0" err="1"/>
+              <a:t>por</a:t>
+            </a:r>
+            <a:r>
+              <a:rPr sz="1200" dirty="0"/>
+              <a:t> lo </a:t>
+            </a:r>
+            <a:r>
+              <a:rPr sz="1200" dirty="0" err="1"/>
+              <a:t>que</a:t>
+            </a:r>
+            <a:r>
+              <a:rPr sz="1200" dirty="0"/>
+              <a:t> </a:t>
+            </a:r>
+            <a:r>
+              <a:rPr sz="1200" dirty="0" err="1"/>
+              <a:t>los</a:t>
+            </a:r>
+            <a:r>
+              <a:rPr sz="1200" dirty="0"/>
+              <a:t> </a:t>
+            </a:r>
+            <a:r>
+              <a:rPr sz="1200" dirty="0" err="1"/>
+              <a:t>resultados</a:t>
+            </a:r>
+            <a:r>
+              <a:rPr sz="1200" dirty="0"/>
+              <a:t> </a:t>
+            </a:r>
+            <a:r>
+              <a:rPr sz="1200" dirty="0" err="1"/>
+              <a:t>sugieren</a:t>
+            </a:r>
+            <a:r>
+              <a:rPr sz="1200" dirty="0"/>
+              <a:t> </a:t>
+            </a:r>
+            <a:r>
+              <a:rPr sz="1200" dirty="0" err="1"/>
+              <a:t>una</a:t>
+            </a:r>
+            <a:r>
+              <a:rPr sz="1200" dirty="0"/>
+              <a:t> </a:t>
+            </a:r>
+            <a:r>
+              <a:rPr sz="1200" dirty="0" err="1"/>
+              <a:t>posible</a:t>
+            </a:r>
+            <a:r>
+              <a:rPr sz="1200" dirty="0"/>
+              <a:t> </a:t>
+            </a:r>
+            <a:r>
+              <a:rPr sz="1200" dirty="0" err="1"/>
+              <a:t>tendencia</a:t>
+            </a:r>
+            <a:r>
+              <a:rPr sz="1200" dirty="0"/>
+              <a:t> </a:t>
+            </a:r>
+            <a:r>
+              <a:rPr sz="1200" dirty="0" err="1"/>
+              <a:t>que</a:t>
+            </a:r>
+            <a:r>
+              <a:rPr sz="1200" dirty="0"/>
+              <a:t> </a:t>
+            </a:r>
+            <a:r>
+              <a:rPr sz="1200" dirty="0" err="1"/>
+              <a:t>podría</a:t>
+            </a:r>
+            <a:r>
+              <a:rPr sz="1200" dirty="0"/>
+              <a:t> </a:t>
+            </a:r>
+            <a:r>
+              <a:rPr sz="1200" dirty="0" err="1"/>
+              <a:t>explorarse</a:t>
+            </a:r>
+            <a:r>
+              <a:rPr sz="1200" dirty="0"/>
+              <a:t> con mayor </a:t>
+            </a:r>
+            <a:r>
+              <a:rPr sz="1200" dirty="0" err="1"/>
+              <a:t>profundidad</a:t>
+            </a:r>
+            <a:r>
+              <a:rPr sz="1200" dirty="0"/>
+              <a:t> </a:t>
+            </a:r>
+            <a:r>
+              <a:rPr sz="1200" dirty="0" err="1"/>
+              <a:t>en</a:t>
+            </a:r>
+            <a:r>
+              <a:rPr sz="1200" dirty="0"/>
+              <a:t> </a:t>
+            </a:r>
+            <a:r>
+              <a:rPr sz="1200" dirty="0" err="1"/>
+              <a:t>futuras</a:t>
+            </a:r>
+            <a:r>
+              <a:rPr sz="1200" dirty="0"/>
+              <a:t> </a:t>
+            </a:r>
+            <a:r>
+              <a:rPr sz="1200" dirty="0" err="1"/>
+              <a:t>investigaciones</a:t>
+            </a:r>
+            <a:r>
+              <a:rPr sz="1200" dirty="0"/>
+              <a:t>.</a:t>
+            </a:r>
+          </a:p>
+        </p:txBody>
+      </p:sp>
+      <p:pic>
+        <p:nvPicPr>
+          <p:cNvPr id="2" name="Picture 1" descr="trabajo2_files/figure-pptx/grafico-educacion-satisfaccion-1.png"/>
+          <p:cNvPicPr>
+            <a:picLocks noGrp="1" noChangeAspect="1"/>
+          </p:cNvPicPr>
+          <p:nvPr/>
+        </p:nvPicPr>
+        <p:blipFill>
+          <a:blip r:embed="rId2"/>
+          <a:stretch>
+            <a:fillRect/>
+          </a:stretch>
+        </p:blipFill>
+        <p:spPr bwMode="auto">
+          <a:xfrm>
+            <a:off x="1515835" y="2171700"/>
+            <a:ext cx="5332186" cy="2666093"/>
+          </a:xfrm>
+          <a:prstGeom prst="rect">
+            <a:avLst/>
+          </a:prstGeom>
+          <a:noFill/>
+          <a:ln w="9525">
+            <a:noFill/>
+            <a:headEnd/>
+            <a:tailEnd/>
+          </a:ln>
+        </p:spPr>
+      </p:pic>
+    </p:spTree>
+  </p:cSld>
+  <p:clrMapOvr>
+    <a:masterClrMapping/>
+  </p:clrMapOvr>
+</p:sld>
+</file>
+
+<file path=ppt/slides/slide12.xml><?xml version="1.0" encoding="utf-8"?>
+<p:sld xmlns:a="http://schemas.openxmlformats.org/drawingml/2006/main" xmlns:r="http://schemas.openxmlformats.org/officeDocument/2006/relationships" xmlns:p="http://schemas.openxmlformats.org/presentationml/2006/main">
+  <p:cSld>
+    <p:spTree>
+      <p:nvGrpSpPr>
+        <p:cNvPr id="1" name=""/>
+        <p:cNvGrpSpPr/>
+        <p:nvPr/>
+      </p:nvGrpSpPr>
+      <p:grpSpPr>
+        <a:xfrm>
+          <a:off x="0" y="0"/>
+          <a:ext cx="0" cy="0"/>
+          <a:chOff x="0" y="0"/>
+          <a:chExt cx="0" cy="0"/>
+        </a:xfrm>
+      </p:grpSpPr>
+      <p:sp>
+        <p:nvSpPr>
+          <p:cNvPr id="4" name="Text Placeholder 3"/>
+          <p:cNvSpPr>
+            <a:spLocks noGrp="1"/>
+          </p:cNvSpPr>
+          <p:nvPr>
+            <p:ph type="body" sz="half" idx="2"/>
+          </p:nvPr>
+        </p:nvSpPr>
+        <p:spPr>
+          <a:xfrm>
+            <a:off x="400051" y="107044"/>
+            <a:ext cx="7927520" cy="3998630"/>
+          </a:xfrm>
+        </p:spPr>
+        <p:txBody>
+          <a:bodyPr>
+            <a:noAutofit/>
+          </a:bodyPr>
+          <a:lstStyle/>
+          <a:p>
+            <a:pPr lvl="0" indent="0">
+              <a:buNone/>
+            </a:pPr>
+            <a:r>
+              <a:rPr sz="1000" dirty="0">
+                <a:latin typeface="Courier"/>
+              </a:rPr>
+              <a:t>
+</a:t>
+            </a:r>
+            <a:r>
+              <a:rPr sz="1200" dirty="0"/>
+              <a:t>El </a:t>
+            </a:r>
+            <a:r>
+              <a:rPr sz="1200" dirty="0" err="1"/>
+              <a:t>gráfico</a:t>
+            </a:r>
+            <a:r>
+              <a:rPr sz="1200" dirty="0"/>
+              <a:t> de </a:t>
+            </a:r>
+            <a:r>
+              <a:rPr sz="1200" dirty="0" err="1"/>
+              <a:t>cajas</a:t>
+            </a:r>
+            <a:r>
+              <a:rPr sz="1200" dirty="0"/>
+              <a:t> </a:t>
+            </a:r>
+            <a:r>
+              <a:rPr sz="1200" dirty="0" err="1"/>
+              <a:t>muestra</a:t>
+            </a:r>
+            <a:r>
+              <a:rPr sz="1200" dirty="0"/>
+              <a:t> </a:t>
+            </a:r>
+            <a:r>
+              <a:rPr sz="1200" dirty="0" err="1"/>
+              <a:t>distribuciones</a:t>
+            </a:r>
+            <a:r>
+              <a:rPr sz="1200" dirty="0"/>
+              <a:t> </a:t>
+            </a:r>
+            <a:r>
+              <a:rPr sz="1200" dirty="0" err="1"/>
+              <a:t>muy</a:t>
+            </a:r>
+            <a:r>
+              <a:rPr sz="1200" dirty="0"/>
+              <a:t> </a:t>
+            </a:r>
+            <a:r>
+              <a:rPr sz="1200" dirty="0" err="1"/>
+              <a:t>similares</a:t>
+            </a:r>
+            <a:r>
+              <a:rPr sz="1200" dirty="0"/>
+              <a:t> del </a:t>
+            </a:r>
+            <a:r>
+              <a:rPr sz="1200" dirty="0" err="1"/>
+              <a:t>nivel</a:t>
+            </a:r>
+            <a:r>
+              <a:rPr sz="1200" dirty="0"/>
+              <a:t> </a:t>
+            </a:r>
+            <a:r>
+              <a:rPr sz="1200" dirty="0" err="1"/>
+              <a:t>educativo</a:t>
+            </a:r>
+            <a:r>
+              <a:rPr sz="1200" dirty="0"/>
+              <a:t> entre las </a:t>
+            </a:r>
+            <a:r>
+              <a:rPr sz="1200" dirty="0" err="1"/>
+              <a:t>distintas</a:t>
+            </a:r>
+            <a:r>
+              <a:rPr sz="1200" dirty="0"/>
+              <a:t> </a:t>
+            </a:r>
+            <a:r>
+              <a:rPr sz="1200" dirty="0" err="1"/>
+              <a:t>categorías</a:t>
+            </a:r>
+            <a:r>
+              <a:rPr sz="1200" dirty="0"/>
+              <a:t> de </a:t>
+            </a:r>
+            <a:r>
+              <a:rPr sz="1200" dirty="0" err="1"/>
+              <a:t>satisfacción</a:t>
+            </a:r>
+            <a:r>
+              <a:rPr sz="1200" dirty="0"/>
+              <a:t> con la </a:t>
+            </a:r>
+            <a:r>
+              <a:rPr sz="1200" dirty="0" err="1"/>
+              <a:t>democracia</a:t>
+            </a:r>
+            <a:r>
+              <a:rPr sz="1200" dirty="0"/>
+              <a:t>. Las </a:t>
+            </a:r>
+            <a:r>
+              <a:rPr sz="1200" dirty="0" err="1"/>
+              <a:t>medianas</a:t>
+            </a:r>
+            <a:r>
+              <a:rPr sz="1200" dirty="0"/>
+              <a:t> </a:t>
+            </a:r>
+            <a:r>
+              <a:rPr sz="1200" dirty="0" err="1"/>
+              <a:t>presentan</a:t>
+            </a:r>
+            <a:r>
+              <a:rPr sz="1200" dirty="0"/>
+              <a:t> </a:t>
+            </a:r>
+            <a:r>
+              <a:rPr sz="1200" dirty="0" err="1"/>
+              <a:t>valores</a:t>
+            </a:r>
+            <a:r>
+              <a:rPr sz="1200" dirty="0"/>
+              <a:t> </a:t>
+            </a:r>
+            <a:r>
+              <a:rPr sz="1200" dirty="0" err="1"/>
+              <a:t>prácticamente</a:t>
+            </a:r>
+            <a:r>
+              <a:rPr sz="1200" dirty="0"/>
+              <a:t> </a:t>
+            </a:r>
+            <a:r>
+              <a:rPr sz="1200" dirty="0" err="1"/>
+              <a:t>equivalentes</a:t>
+            </a:r>
+            <a:r>
+              <a:rPr sz="1200" dirty="0"/>
+              <a:t> y </a:t>
+            </a:r>
+            <a:r>
+              <a:rPr sz="1200" dirty="0" err="1"/>
+              <a:t>existe</a:t>
+            </a:r>
+            <a:r>
+              <a:rPr sz="1200" dirty="0"/>
+              <a:t> un </a:t>
+            </a:r>
+            <a:r>
+              <a:rPr sz="1200" dirty="0" err="1"/>
+              <a:t>amplio</a:t>
+            </a:r>
+            <a:r>
+              <a:rPr sz="1200" dirty="0"/>
+              <a:t> </a:t>
+            </a:r>
+            <a:r>
+              <a:rPr sz="1200" dirty="0" err="1"/>
+              <a:t>solapamiento</a:t>
+            </a:r>
+            <a:r>
+              <a:rPr sz="1200" dirty="0"/>
+              <a:t> entre </a:t>
+            </a:r>
+            <a:r>
+              <a:rPr sz="1200" dirty="0" err="1"/>
+              <a:t>los</a:t>
+            </a:r>
+            <a:r>
+              <a:rPr sz="1200" dirty="0"/>
+              <a:t> </a:t>
+            </a:r>
+            <a:r>
+              <a:rPr sz="1200" dirty="0" err="1"/>
+              <a:t>rangos</a:t>
+            </a:r>
+            <a:r>
+              <a:rPr sz="1200" dirty="0"/>
+              <a:t> </a:t>
+            </a:r>
+            <a:r>
+              <a:rPr sz="1200" dirty="0" err="1"/>
+              <a:t>intercuartílicos</a:t>
+            </a:r>
+            <a:r>
+              <a:rPr sz="1200" dirty="0"/>
+              <a:t> de </a:t>
+            </a:r>
+            <a:r>
+              <a:rPr sz="1200" dirty="0" err="1"/>
+              <a:t>los</a:t>
+            </a:r>
+            <a:r>
+              <a:rPr sz="1200" dirty="0"/>
+              <a:t> </a:t>
+            </a:r>
+            <a:r>
+              <a:rPr sz="1200" dirty="0" err="1"/>
+              <a:t>grupos</a:t>
+            </a:r>
+            <a:r>
+              <a:rPr sz="1200" dirty="0"/>
+              <a:t> </a:t>
+            </a:r>
+            <a:r>
+              <a:rPr sz="1200" dirty="0" err="1"/>
+              <a:t>analizados</a:t>
+            </a:r>
+            <a:r>
+              <a:rPr sz="1200" dirty="0"/>
+              <a:t>, lo </a:t>
+            </a:r>
+            <a:r>
+              <a:rPr sz="1200" dirty="0" err="1"/>
+              <a:t>que</a:t>
+            </a:r>
+            <a:r>
+              <a:rPr sz="1200" dirty="0"/>
+              <a:t> </a:t>
+            </a:r>
+            <a:r>
+              <a:rPr sz="1200" dirty="0" err="1"/>
+              <a:t>sugiere</a:t>
+            </a:r>
+            <a:r>
+              <a:rPr sz="1200" dirty="0"/>
+              <a:t> </a:t>
+            </a:r>
+            <a:r>
+              <a:rPr sz="1200" dirty="0" err="1"/>
+              <a:t>diferencias</a:t>
+            </a:r>
+            <a:r>
+              <a:rPr sz="1200" dirty="0"/>
+              <a:t> </a:t>
+            </a:r>
+            <a:r>
+              <a:rPr sz="1200" dirty="0" err="1"/>
+              <a:t>reducidas</a:t>
+            </a:r>
+            <a:r>
+              <a:rPr sz="1200" dirty="0"/>
+              <a:t> </a:t>
+            </a:r>
+            <a:r>
+              <a:rPr sz="1200" dirty="0" err="1"/>
+              <a:t>en</a:t>
+            </a:r>
+            <a:r>
+              <a:rPr sz="1200" dirty="0"/>
+              <a:t> </a:t>
+            </a:r>
+            <a:r>
+              <a:rPr sz="1200" dirty="0" err="1"/>
+              <a:t>los</a:t>
+            </a:r>
+            <a:r>
+              <a:rPr sz="1200" dirty="0"/>
+              <a:t> </a:t>
+            </a:r>
+            <a:r>
+              <a:rPr sz="1200" dirty="0" err="1"/>
+              <a:t>niveles</a:t>
+            </a:r>
+            <a:r>
+              <a:rPr sz="1200" dirty="0"/>
+              <a:t> </a:t>
+            </a:r>
+            <a:r>
+              <a:rPr sz="1200" dirty="0" err="1"/>
+              <a:t>educativos</a:t>
+            </a:r>
+            <a:r>
+              <a:rPr sz="1200" dirty="0"/>
+              <a:t> </a:t>
+            </a:r>
+            <a:r>
+              <a:rPr sz="1200" dirty="0" err="1"/>
+              <a:t>según</a:t>
+            </a:r>
+            <a:r>
+              <a:rPr sz="1200" dirty="0"/>
+              <a:t> </a:t>
+            </a:r>
+            <a:r>
+              <a:rPr sz="1200" dirty="0" err="1"/>
+              <a:t>el</a:t>
+            </a:r>
+            <a:r>
+              <a:rPr sz="1200" dirty="0"/>
+              <a:t> </a:t>
+            </a:r>
+            <a:r>
+              <a:rPr sz="1200" dirty="0" err="1"/>
+              <a:t>grado</a:t>
+            </a:r>
+            <a:r>
+              <a:rPr sz="1200" dirty="0"/>
+              <a:t> de </a:t>
+            </a:r>
+            <a:r>
+              <a:rPr sz="1200" dirty="0" err="1"/>
+              <a:t>satisfacción</a:t>
+            </a:r>
+            <a:r>
+              <a:rPr sz="1200" dirty="0"/>
+              <a:t> </a:t>
+            </a:r>
+            <a:r>
+              <a:rPr sz="1200" dirty="0" err="1"/>
+              <a:t>democrática</a:t>
+            </a:r>
+            <a:r>
+              <a:rPr sz="1200" dirty="0"/>
+              <a:t>.</a:t>
+            </a:r>
+          </a:p>
+          <a:p>
+            <a:pPr marL="0" lvl="0" indent="0">
+              <a:buNone/>
+            </a:pPr>
+            <a:r>
+              <a:rPr sz="1200" dirty="0"/>
+              <a:t>Dado </a:t>
+            </a:r>
+            <a:r>
+              <a:rPr sz="1200" dirty="0" err="1"/>
+              <a:t>que</a:t>
+            </a:r>
+            <a:r>
+              <a:rPr sz="1200" dirty="0"/>
+              <a:t> las variables </a:t>
+            </a:r>
+            <a:r>
+              <a:rPr sz="1200" dirty="0" err="1"/>
+              <a:t>sociodemográficas</a:t>
+            </a:r>
+            <a:r>
+              <a:rPr sz="1200" dirty="0"/>
+              <a:t> </a:t>
+            </a:r>
+            <a:r>
+              <a:rPr sz="1200" dirty="0" err="1"/>
+              <a:t>consideradas</a:t>
+            </a:r>
+            <a:r>
+              <a:rPr sz="1200" dirty="0"/>
+              <a:t> no </a:t>
+            </a:r>
+            <a:r>
+              <a:rPr sz="1200" dirty="0" err="1"/>
+              <a:t>mostraron</a:t>
+            </a:r>
+            <a:r>
+              <a:rPr sz="1200" dirty="0"/>
+              <a:t> </a:t>
+            </a:r>
+            <a:r>
+              <a:rPr sz="1200" dirty="0" err="1"/>
+              <a:t>asociaciones</a:t>
+            </a:r>
+            <a:r>
+              <a:rPr sz="1200" dirty="0"/>
+              <a:t> </a:t>
+            </a:r>
+            <a:r>
+              <a:rPr sz="1200" dirty="0" err="1"/>
+              <a:t>estadísticamente</a:t>
+            </a:r>
+            <a:r>
+              <a:rPr sz="1200" dirty="0"/>
+              <a:t> </a:t>
+            </a:r>
+            <a:r>
+              <a:rPr sz="1200" dirty="0" err="1"/>
+              <a:t>significativas</a:t>
+            </a:r>
+            <a:r>
+              <a:rPr sz="1200" dirty="0"/>
+              <a:t> con la </a:t>
+            </a:r>
+            <a:r>
+              <a:rPr sz="1200" dirty="0" err="1"/>
+              <a:t>satisfacción</a:t>
+            </a:r>
+            <a:r>
+              <a:rPr sz="1200" dirty="0"/>
+              <a:t> </a:t>
+            </a:r>
+            <a:r>
+              <a:rPr sz="1200" dirty="0" err="1"/>
+              <a:t>democrática</a:t>
+            </a:r>
+            <a:r>
+              <a:rPr sz="1200" dirty="0"/>
+              <a:t>, se </a:t>
+            </a:r>
+            <a:r>
+              <a:rPr sz="1200" dirty="0" err="1"/>
+              <a:t>incorporó</a:t>
+            </a:r>
+            <a:r>
+              <a:rPr sz="1200" dirty="0"/>
+              <a:t> </a:t>
+            </a:r>
+            <a:r>
+              <a:rPr sz="1200" dirty="0" err="1"/>
+              <a:t>adicionalmente</a:t>
+            </a:r>
+            <a:r>
+              <a:rPr sz="1200" dirty="0"/>
+              <a:t> la variable </a:t>
+            </a:r>
+            <a:r>
+              <a:rPr sz="1200" dirty="0" err="1"/>
+              <a:t>aprobación</a:t>
+            </a:r>
+            <a:r>
+              <a:rPr sz="1200" dirty="0"/>
+              <a:t> </a:t>
+            </a:r>
+            <a:r>
+              <a:rPr sz="1200" dirty="0" err="1"/>
+              <a:t>presidencial</a:t>
+            </a:r>
+            <a:r>
+              <a:rPr sz="1200" dirty="0"/>
+              <a:t> con fines </a:t>
+            </a:r>
+            <a:r>
+              <a:rPr sz="1200" dirty="0" err="1"/>
+              <a:t>exploratorios</a:t>
+            </a:r>
+            <a:r>
+              <a:rPr sz="1200" dirty="0"/>
+              <a:t>. El </a:t>
+            </a:r>
+            <a:r>
+              <a:rPr sz="1200" dirty="0" err="1"/>
+              <a:t>objetivo</a:t>
+            </a:r>
+            <a:r>
+              <a:rPr sz="1200" dirty="0"/>
+              <a:t> </a:t>
+            </a:r>
+            <a:r>
+              <a:rPr sz="1200" dirty="0" err="1"/>
+              <a:t>fue</a:t>
+            </a:r>
+            <a:r>
+              <a:rPr sz="1200" dirty="0"/>
+              <a:t> </a:t>
+            </a:r>
+            <a:r>
+              <a:rPr sz="1200" dirty="0" err="1"/>
+              <a:t>evaluar</a:t>
+            </a:r>
+            <a:r>
+              <a:rPr sz="1200" dirty="0"/>
+              <a:t> </a:t>
+            </a:r>
+            <a:r>
+              <a:rPr sz="1200" dirty="0" err="1"/>
+              <a:t>si</a:t>
+            </a:r>
+            <a:r>
+              <a:rPr sz="1200" dirty="0"/>
+              <a:t> variables de </a:t>
+            </a:r>
+            <a:r>
+              <a:rPr sz="1200" dirty="0" err="1"/>
+              <a:t>carácter</a:t>
+            </a:r>
+            <a:r>
+              <a:rPr sz="1200" dirty="0"/>
+              <a:t> </a:t>
+            </a:r>
+            <a:r>
+              <a:rPr sz="1200" dirty="0" err="1"/>
+              <a:t>político</a:t>
+            </a:r>
+            <a:r>
+              <a:rPr sz="1200" dirty="0"/>
+              <a:t> </a:t>
+            </a:r>
+            <a:r>
+              <a:rPr sz="1200" dirty="0" err="1"/>
+              <a:t>permiten</a:t>
+            </a:r>
+            <a:r>
+              <a:rPr sz="1200" dirty="0"/>
+              <a:t> </a:t>
+            </a:r>
+            <a:r>
+              <a:rPr sz="1200" dirty="0" err="1"/>
+              <a:t>explicar</a:t>
+            </a:r>
+            <a:r>
+              <a:rPr sz="1200" dirty="0"/>
+              <a:t> </a:t>
+            </a:r>
+            <a:r>
+              <a:rPr sz="1200" dirty="0" err="1"/>
+              <a:t>en</a:t>
+            </a:r>
+            <a:r>
+              <a:rPr sz="1200" dirty="0"/>
+              <a:t> mayor </a:t>
+            </a:r>
+            <a:r>
+              <a:rPr sz="1200" dirty="0" err="1"/>
+              <a:t>medida</a:t>
+            </a:r>
+            <a:r>
+              <a:rPr sz="1200" dirty="0"/>
+              <a:t> las </a:t>
+            </a:r>
+            <a:r>
+              <a:rPr sz="1200" dirty="0" err="1"/>
+              <a:t>diferencias</a:t>
+            </a:r>
+            <a:r>
+              <a:rPr sz="1200" dirty="0"/>
+              <a:t> </a:t>
+            </a:r>
+            <a:r>
+              <a:rPr sz="1200" dirty="0" err="1"/>
+              <a:t>observadas</a:t>
+            </a:r>
+            <a:r>
+              <a:rPr sz="1200" dirty="0"/>
+              <a:t> </a:t>
+            </a:r>
+            <a:r>
+              <a:rPr sz="1200" dirty="0" err="1"/>
+              <a:t>en</a:t>
+            </a:r>
+            <a:r>
+              <a:rPr sz="1200" dirty="0"/>
+              <a:t> </a:t>
+            </a:r>
+            <a:r>
+              <a:rPr sz="1200" dirty="0" err="1"/>
+              <a:t>los</a:t>
+            </a:r>
+            <a:r>
+              <a:rPr sz="1200" dirty="0"/>
+              <a:t> </a:t>
+            </a:r>
+            <a:r>
+              <a:rPr sz="1200" dirty="0" err="1"/>
+              <a:t>niveles</a:t>
+            </a:r>
+            <a:r>
+              <a:rPr sz="1200" dirty="0"/>
+              <a:t> de </a:t>
+            </a:r>
+            <a:r>
+              <a:rPr sz="1200" dirty="0" err="1"/>
+              <a:t>satisfacción</a:t>
+            </a:r>
+            <a:r>
+              <a:rPr sz="1200" dirty="0"/>
+              <a:t> con la </a:t>
+            </a:r>
+            <a:r>
+              <a:rPr sz="1200" dirty="0" err="1"/>
+              <a:t>democracia</a:t>
+            </a:r>
+            <a:r>
+              <a:rPr sz="1200" dirty="0"/>
+              <a:t>.</a:t>
+            </a:r>
+          </a:p>
+          <a:p>
+            <a:pPr marL="0" lvl="0" indent="0">
+              <a:buNone/>
+            </a:pPr>
+            <a:r>
+              <a:rPr sz="1200" dirty="0"/>
+              <a:t>Con </a:t>
+            </a:r>
+            <a:r>
+              <a:rPr sz="1200" dirty="0" err="1"/>
+              <a:t>el</a:t>
+            </a:r>
+            <a:r>
+              <a:rPr sz="1200" dirty="0"/>
+              <a:t> </a:t>
+            </a:r>
+            <a:r>
+              <a:rPr sz="1200" dirty="0" err="1"/>
+              <a:t>objetivo</a:t>
+            </a:r>
+            <a:r>
+              <a:rPr sz="1200" dirty="0"/>
+              <a:t> de </a:t>
+            </a:r>
+            <a:r>
+              <a:rPr sz="1200" dirty="0" err="1"/>
+              <a:t>profundizar</a:t>
+            </a:r>
+            <a:r>
+              <a:rPr sz="1200" dirty="0"/>
+              <a:t> </a:t>
+            </a:r>
+            <a:r>
+              <a:rPr sz="1200" dirty="0" err="1"/>
+              <a:t>el</a:t>
+            </a:r>
+            <a:r>
+              <a:rPr sz="1200" dirty="0"/>
+              <a:t> </a:t>
+            </a:r>
+            <a:r>
+              <a:rPr sz="1200" dirty="0" err="1"/>
+              <a:t>análisis</a:t>
+            </a:r>
+            <a:r>
+              <a:rPr sz="1200" dirty="0"/>
+              <a:t>, se </a:t>
+            </a:r>
+            <a:r>
+              <a:rPr sz="1200" dirty="0" err="1"/>
+              <a:t>estimaron</a:t>
+            </a:r>
+            <a:r>
+              <a:rPr sz="1200" dirty="0"/>
+              <a:t> dos </a:t>
+            </a:r>
+            <a:r>
+              <a:rPr sz="1200" dirty="0" err="1"/>
+              <a:t>modelos</a:t>
+            </a:r>
+            <a:r>
+              <a:rPr sz="1200" dirty="0"/>
+              <a:t> de </a:t>
+            </a:r>
+            <a:r>
+              <a:rPr sz="1200" dirty="0" err="1"/>
+              <a:t>regresión</a:t>
+            </a:r>
+            <a:r>
+              <a:rPr sz="1200" dirty="0"/>
+              <a:t> </a:t>
+            </a:r>
+            <a:r>
+              <a:rPr sz="1200" dirty="0" err="1"/>
+              <a:t>logística</a:t>
+            </a:r>
+            <a:r>
+              <a:rPr sz="1200" dirty="0"/>
+              <a:t> ordinal </a:t>
+            </a:r>
+            <a:r>
+              <a:rPr sz="1200" dirty="0" err="1"/>
+              <a:t>utilizando</a:t>
+            </a:r>
+            <a:r>
+              <a:rPr sz="1200" dirty="0"/>
+              <a:t> </a:t>
+            </a:r>
+            <a:r>
+              <a:rPr sz="1200" dirty="0" err="1"/>
+              <a:t>como</a:t>
+            </a:r>
+            <a:r>
+              <a:rPr sz="1200" dirty="0"/>
+              <a:t> variable </a:t>
+            </a:r>
+            <a:r>
+              <a:rPr sz="1200" dirty="0" err="1"/>
+              <a:t>dependiente</a:t>
+            </a:r>
+            <a:r>
+              <a:rPr sz="1200" dirty="0"/>
+              <a:t> la </a:t>
+            </a:r>
+            <a:r>
+              <a:rPr sz="1200" dirty="0" err="1"/>
+              <a:t>satisfacción</a:t>
+            </a:r>
+            <a:r>
+              <a:rPr sz="1200" dirty="0"/>
+              <a:t> con la </a:t>
+            </a:r>
+            <a:r>
+              <a:rPr sz="1200" dirty="0" err="1"/>
+              <a:t>democracia</a:t>
+            </a:r>
+            <a:r>
+              <a:rPr sz="1200" dirty="0"/>
+              <a:t>. El primer </a:t>
+            </a:r>
+            <a:r>
+              <a:rPr sz="1200" dirty="0" err="1"/>
+              <a:t>modelo</a:t>
+            </a:r>
+            <a:r>
+              <a:rPr sz="1200" dirty="0"/>
+              <a:t> </a:t>
+            </a:r>
+            <a:r>
+              <a:rPr sz="1200" dirty="0" err="1"/>
+              <a:t>incorporó</a:t>
+            </a:r>
+            <a:r>
+              <a:rPr sz="1200" dirty="0"/>
+              <a:t> </a:t>
+            </a:r>
+            <a:r>
+              <a:rPr sz="1200" dirty="0" err="1"/>
+              <a:t>únicamente</a:t>
+            </a:r>
+            <a:r>
+              <a:rPr sz="1200" dirty="0"/>
+              <a:t> variables </a:t>
+            </a:r>
+            <a:r>
+              <a:rPr sz="1200" dirty="0" err="1"/>
+              <a:t>sociodemográficas</a:t>
+            </a:r>
+            <a:r>
+              <a:rPr sz="1200" dirty="0"/>
+              <a:t> (</a:t>
+            </a:r>
+            <a:r>
+              <a:rPr sz="1200" dirty="0" err="1"/>
+              <a:t>sexo</a:t>
+            </a:r>
+            <a:r>
+              <a:rPr sz="1200" dirty="0"/>
+              <a:t>, </a:t>
+            </a:r>
+            <a:r>
+              <a:rPr sz="1200" dirty="0" err="1"/>
+              <a:t>edad</a:t>
+            </a:r>
+            <a:r>
+              <a:rPr sz="1200" dirty="0"/>
+              <a:t> y </a:t>
+            </a:r>
+            <a:r>
+              <a:rPr sz="1200" dirty="0" err="1"/>
+              <a:t>nivel</a:t>
+            </a:r>
+            <a:r>
+              <a:rPr sz="1200" dirty="0"/>
+              <a:t> </a:t>
+            </a:r>
+            <a:r>
+              <a:rPr sz="1200" dirty="0" err="1"/>
+              <a:t>educativo</a:t>
+            </a:r>
+            <a:r>
+              <a:rPr sz="1200" dirty="0"/>
+              <a:t>), </a:t>
+            </a:r>
+            <a:r>
+              <a:rPr sz="1200" dirty="0" err="1"/>
+              <a:t>mientras</a:t>
+            </a:r>
+            <a:r>
+              <a:rPr sz="1200" dirty="0"/>
+              <a:t> </a:t>
+            </a:r>
+            <a:r>
+              <a:rPr sz="1200" dirty="0" err="1"/>
+              <a:t>que</a:t>
+            </a:r>
+            <a:r>
+              <a:rPr sz="1200" dirty="0"/>
+              <a:t> </a:t>
+            </a:r>
+            <a:r>
+              <a:rPr sz="1200" dirty="0" err="1"/>
+              <a:t>el</a:t>
+            </a:r>
+            <a:r>
+              <a:rPr sz="1200" dirty="0"/>
+              <a:t> </a:t>
+            </a:r>
+            <a:r>
+              <a:rPr sz="1200" dirty="0" err="1"/>
+              <a:t>segundo</a:t>
+            </a:r>
+            <a:r>
+              <a:rPr sz="1200" dirty="0"/>
+              <a:t> </a:t>
+            </a:r>
+            <a:r>
+              <a:rPr sz="1200" dirty="0" err="1"/>
+              <a:t>agregó</a:t>
+            </a:r>
+            <a:r>
+              <a:rPr sz="1200" dirty="0"/>
+              <a:t> la variable de </a:t>
+            </a:r>
+            <a:r>
+              <a:rPr sz="1200" dirty="0" err="1"/>
+              <a:t>aprobación</a:t>
+            </a:r>
+            <a:r>
+              <a:rPr sz="1200" dirty="0"/>
+              <a:t> </a:t>
+            </a:r>
+            <a:r>
+              <a:rPr sz="1200" dirty="0" err="1"/>
+              <a:t>presidencial</a:t>
+            </a:r>
+            <a:r>
+              <a:rPr sz="1200" dirty="0">
+                <a:latin typeface="Courier"/>
+              </a:rPr>
+              <a:t>
+</a:t>
+            </a:r>
+            <a:r>
+              <a:rPr sz="1000" dirty="0">
+                <a:latin typeface="Courier"/>
+              </a:rPr>
+              <a:t>
+</a:t>
+            </a:r>
+            <a:endParaRPr sz="1000" b="1" dirty="0"/>
+          </a:p>
+        </p:txBody>
+      </p:sp>
+      <p:pic>
+        <p:nvPicPr>
+          <p:cNvPr id="2" name="Picture 1" descr="trabajo2_files/figure-pptx/grafico-probabilidades-predichas-1.png"/>
+          <p:cNvPicPr>
+            <a:picLocks noGrp="1" noChangeAspect="1"/>
+          </p:cNvPicPr>
+          <p:nvPr/>
+        </p:nvPicPr>
+        <p:blipFill>
+          <a:blip r:embed="rId2"/>
+          <a:stretch>
+            <a:fillRect/>
+          </a:stretch>
+        </p:blipFill>
+        <p:spPr bwMode="auto">
+          <a:xfrm>
+            <a:off x="1641929" y="2571750"/>
             <a:ext cx="5105400" cy="2552700"/>
           </a:xfrm>
           <a:prstGeom prst="rect">
@@ -3575,10 +5423,13 @@
       </p:pic>
     </p:spTree>
   </p:cSld>
+  <p:clrMapOvr>
+    <a:masterClrMapping/>
+  </p:clrMapOvr>
 </p:sld>
 </file>
 
-<file path=ppt/slides/slide11.xml><?xml version="1.0" encoding="utf-8"?>
+<file path=ppt/slides/slide13.xml><?xml version="1.0" encoding="utf-8"?>
 <p:sld xmlns:a="http://schemas.openxmlformats.org/drawingml/2006/main" xmlns:r="http://schemas.openxmlformats.org/officeDocument/2006/relationships" xmlns:p="http://schemas.openxmlformats.org/presentationml/2006/main">
   <p:cSld>
     <p:spTree>
@@ -3607,42 +5458,769 @@
         </p:nvSpPr>
         <p:spPr/>
         <p:txBody>
-          <a:bodyPr/>
+          <a:bodyPr>
+            <a:normAutofit/>
+          </a:bodyPr>
           <a:lstStyle/>
           <a:p>
-            <a:pPr lvl="0" indent="0" marL="0">
+            <a:pPr marL="0" lvl="0" indent="0">
               <a:buNone/>
             </a:pPr>
             <a:r>
-              <a:rPr/>
-              <a:t>El gráfico presenta las probabilidades predichas de manifestar satisfacción con la democracia a partir del modelo de regresión logística binaria, manteniendo constantes la edad y el nivel educativo en sus valores promedio. Los resultados muestran diferencias sustantivas según la evaluación del desempeño presidencial. Entre quienes aprueban al presidente, la probabilidad estimada de encontrarse satisfechos con la democracia supera el 65% tanto en hombres como en mujeres. En contraste, entre quienes desaprueban la gestión presidencial, dicha probabilidad desciende a valores cercanos al 30%.</a:t>
-            </a:r>
-          </a:p>
-          <a:p>
-            <a:pPr lvl="0" indent="0" marL="0">
+              <a:rPr sz="1600" dirty="0"/>
+              <a:t>El </a:t>
+            </a:r>
+            <a:r>
+              <a:rPr sz="1600" dirty="0" err="1"/>
+              <a:t>gráfico</a:t>
+            </a:r>
+            <a:r>
+              <a:rPr sz="1600" dirty="0"/>
+              <a:t> </a:t>
+            </a:r>
+            <a:r>
+              <a:rPr sz="1600" dirty="0" err="1"/>
+              <a:t>presenta</a:t>
+            </a:r>
+            <a:r>
+              <a:rPr sz="1600" dirty="0"/>
+              <a:t> las </a:t>
+            </a:r>
+            <a:r>
+              <a:rPr sz="1600" dirty="0" err="1"/>
+              <a:t>probabilidades</a:t>
+            </a:r>
+            <a:r>
+              <a:rPr sz="1600" dirty="0"/>
+              <a:t> </a:t>
+            </a:r>
+            <a:r>
+              <a:rPr sz="1600" dirty="0" err="1"/>
+              <a:t>predichas</a:t>
+            </a:r>
+            <a:r>
+              <a:rPr sz="1600" dirty="0"/>
+              <a:t> de </a:t>
+            </a:r>
+            <a:r>
+              <a:rPr sz="1600" dirty="0" err="1"/>
+              <a:t>manifestar</a:t>
+            </a:r>
+            <a:r>
+              <a:rPr sz="1600" dirty="0"/>
+              <a:t> </a:t>
+            </a:r>
+            <a:r>
+              <a:rPr sz="1600" dirty="0" err="1"/>
+              <a:t>satisfacción</a:t>
+            </a:r>
+            <a:r>
+              <a:rPr sz="1600" dirty="0"/>
+              <a:t> con la </a:t>
+            </a:r>
+            <a:r>
+              <a:rPr sz="1600" dirty="0" err="1"/>
+              <a:t>democracia</a:t>
+            </a:r>
+            <a:r>
+              <a:rPr sz="1600" dirty="0"/>
+              <a:t> a </a:t>
+            </a:r>
+            <a:r>
+              <a:rPr sz="1600" dirty="0" err="1"/>
+              <a:t>partir</a:t>
+            </a:r>
+            <a:r>
+              <a:rPr sz="1600" dirty="0"/>
+              <a:t> del </a:t>
+            </a:r>
+            <a:r>
+              <a:rPr sz="1600" dirty="0" err="1"/>
+              <a:t>modelo</a:t>
+            </a:r>
+            <a:r>
+              <a:rPr sz="1600" dirty="0"/>
+              <a:t> de </a:t>
+            </a:r>
+            <a:r>
+              <a:rPr sz="1600" dirty="0" err="1"/>
+              <a:t>regresión</a:t>
+            </a:r>
+            <a:r>
+              <a:rPr sz="1600" dirty="0"/>
+              <a:t> </a:t>
+            </a:r>
+            <a:r>
+              <a:rPr sz="1600" dirty="0" err="1"/>
+              <a:t>logística</a:t>
+            </a:r>
+            <a:r>
+              <a:rPr sz="1600" dirty="0"/>
+              <a:t> </a:t>
+            </a:r>
+            <a:r>
+              <a:rPr sz="1600" dirty="0" err="1"/>
+              <a:t>binaria</a:t>
+            </a:r>
+            <a:r>
+              <a:rPr sz="1600" dirty="0"/>
+              <a:t>, </a:t>
+            </a:r>
+            <a:r>
+              <a:rPr sz="1600" dirty="0" err="1"/>
+              <a:t>manteniendo</a:t>
+            </a:r>
+            <a:r>
+              <a:rPr sz="1600" dirty="0"/>
+              <a:t> </a:t>
+            </a:r>
+            <a:r>
+              <a:rPr sz="1600" dirty="0" err="1"/>
+              <a:t>constantes</a:t>
+            </a:r>
+            <a:r>
+              <a:rPr sz="1600" dirty="0"/>
+              <a:t> la </a:t>
+            </a:r>
+            <a:r>
+              <a:rPr sz="1600" dirty="0" err="1"/>
+              <a:t>edad</a:t>
+            </a:r>
+            <a:r>
+              <a:rPr sz="1600" dirty="0"/>
+              <a:t> y </a:t>
+            </a:r>
+            <a:r>
+              <a:rPr sz="1600" dirty="0" err="1"/>
+              <a:t>el</a:t>
+            </a:r>
+            <a:r>
+              <a:rPr sz="1600" dirty="0"/>
+              <a:t> </a:t>
+            </a:r>
+            <a:r>
+              <a:rPr sz="1600" dirty="0" err="1"/>
+              <a:t>nivel</a:t>
+            </a:r>
+            <a:r>
+              <a:rPr sz="1600" dirty="0"/>
+              <a:t> </a:t>
+            </a:r>
+            <a:r>
+              <a:rPr sz="1600" dirty="0" err="1"/>
+              <a:t>educativo</a:t>
+            </a:r>
+            <a:r>
+              <a:rPr sz="1600" dirty="0"/>
+              <a:t> </a:t>
+            </a:r>
+            <a:r>
+              <a:rPr sz="1600" dirty="0" err="1"/>
+              <a:t>en</a:t>
+            </a:r>
+            <a:r>
+              <a:rPr sz="1600" dirty="0"/>
+              <a:t> sus </a:t>
+            </a:r>
+            <a:r>
+              <a:rPr sz="1600" dirty="0" err="1"/>
+              <a:t>valores</a:t>
+            </a:r>
+            <a:r>
+              <a:rPr sz="1600" dirty="0"/>
+              <a:t> </a:t>
+            </a:r>
+            <a:r>
+              <a:rPr sz="1600" dirty="0" err="1"/>
+              <a:t>promedio</a:t>
+            </a:r>
+            <a:r>
+              <a:rPr sz="1600" dirty="0"/>
+              <a:t>. Los </a:t>
+            </a:r>
+            <a:r>
+              <a:rPr sz="1600" dirty="0" err="1"/>
+              <a:t>resultados</a:t>
+            </a:r>
+            <a:r>
+              <a:rPr sz="1600" dirty="0"/>
+              <a:t> </a:t>
+            </a:r>
+            <a:r>
+              <a:rPr sz="1600" dirty="0" err="1"/>
+              <a:t>muestran</a:t>
+            </a:r>
+            <a:r>
+              <a:rPr sz="1600" dirty="0"/>
+              <a:t> </a:t>
+            </a:r>
+            <a:r>
+              <a:rPr sz="1600" dirty="0" err="1"/>
+              <a:t>diferencias</a:t>
+            </a:r>
+            <a:r>
+              <a:rPr sz="1600" dirty="0"/>
+              <a:t> </a:t>
+            </a:r>
+            <a:r>
+              <a:rPr sz="1600" dirty="0" err="1"/>
+              <a:t>sustantivas</a:t>
+            </a:r>
+            <a:r>
+              <a:rPr sz="1600" dirty="0"/>
+              <a:t> </a:t>
+            </a:r>
+            <a:r>
+              <a:rPr sz="1600" dirty="0" err="1"/>
+              <a:t>según</a:t>
+            </a:r>
+            <a:r>
+              <a:rPr sz="1600" dirty="0"/>
+              <a:t> la </a:t>
+            </a:r>
+            <a:r>
+              <a:rPr sz="1600" dirty="0" err="1"/>
+              <a:t>evaluación</a:t>
+            </a:r>
+            <a:r>
+              <a:rPr sz="1600" dirty="0"/>
+              <a:t> del </a:t>
+            </a:r>
+            <a:r>
+              <a:rPr sz="1600" dirty="0" err="1"/>
+              <a:t>desempeño</a:t>
+            </a:r>
+            <a:r>
+              <a:rPr sz="1600" dirty="0"/>
+              <a:t> </a:t>
+            </a:r>
+            <a:r>
+              <a:rPr sz="1600" dirty="0" err="1"/>
+              <a:t>presidencial</a:t>
+            </a:r>
+            <a:r>
+              <a:rPr sz="1600" dirty="0"/>
+              <a:t>. Entre </a:t>
+            </a:r>
+            <a:r>
+              <a:rPr sz="1600" dirty="0" err="1"/>
+              <a:t>quienes</a:t>
+            </a:r>
+            <a:r>
+              <a:rPr sz="1600" dirty="0"/>
+              <a:t> </a:t>
+            </a:r>
+            <a:r>
+              <a:rPr sz="1600" dirty="0" err="1"/>
+              <a:t>aprueban</a:t>
+            </a:r>
+            <a:r>
+              <a:rPr sz="1600" dirty="0"/>
+              <a:t> al </a:t>
+            </a:r>
+            <a:r>
+              <a:rPr sz="1600" dirty="0" err="1"/>
+              <a:t>presidente</a:t>
+            </a:r>
+            <a:r>
+              <a:rPr sz="1600" dirty="0"/>
+              <a:t>, la </a:t>
+            </a:r>
+            <a:r>
+              <a:rPr sz="1600" dirty="0" err="1"/>
+              <a:t>probabilidad</a:t>
+            </a:r>
+            <a:r>
+              <a:rPr sz="1600" dirty="0"/>
+              <a:t> </a:t>
+            </a:r>
+            <a:r>
+              <a:rPr sz="1600" dirty="0" err="1"/>
+              <a:t>estimada</a:t>
+            </a:r>
+            <a:r>
+              <a:rPr sz="1600" dirty="0"/>
+              <a:t> de </a:t>
+            </a:r>
+            <a:r>
+              <a:rPr sz="1600" dirty="0" err="1"/>
+              <a:t>encontrarse</a:t>
+            </a:r>
+            <a:r>
+              <a:rPr sz="1600" dirty="0"/>
+              <a:t> </a:t>
+            </a:r>
+            <a:r>
+              <a:rPr sz="1600" dirty="0" err="1"/>
+              <a:t>satisfechos</a:t>
+            </a:r>
+            <a:r>
+              <a:rPr sz="1600" dirty="0"/>
+              <a:t> con la </a:t>
+            </a:r>
+            <a:r>
+              <a:rPr sz="1600" dirty="0" err="1"/>
+              <a:t>democracia</a:t>
+            </a:r>
+            <a:r>
+              <a:rPr sz="1600" dirty="0"/>
+              <a:t> </a:t>
+            </a:r>
+            <a:r>
+              <a:rPr sz="1600" dirty="0" err="1"/>
+              <a:t>supera</a:t>
+            </a:r>
+            <a:r>
+              <a:rPr sz="1600" dirty="0"/>
+              <a:t> </a:t>
+            </a:r>
+            <a:r>
+              <a:rPr sz="1600" dirty="0" err="1"/>
+              <a:t>el</a:t>
+            </a:r>
+            <a:r>
+              <a:rPr sz="1600" dirty="0"/>
+              <a:t> 65% tanto </a:t>
+            </a:r>
+            <a:r>
+              <a:rPr sz="1600" dirty="0" err="1"/>
+              <a:t>en</a:t>
+            </a:r>
+            <a:r>
+              <a:rPr sz="1600" dirty="0"/>
+              <a:t> hombres </a:t>
+            </a:r>
+            <a:r>
+              <a:rPr sz="1600" dirty="0" err="1"/>
+              <a:t>como</a:t>
+            </a:r>
+            <a:r>
+              <a:rPr sz="1600" dirty="0"/>
+              <a:t> </a:t>
+            </a:r>
+            <a:r>
+              <a:rPr sz="1600" dirty="0" err="1"/>
+              <a:t>en</a:t>
+            </a:r>
+            <a:r>
+              <a:rPr sz="1600" dirty="0"/>
+              <a:t> </a:t>
+            </a:r>
+            <a:r>
+              <a:rPr sz="1600" dirty="0" err="1"/>
+              <a:t>mujeres</a:t>
+            </a:r>
+            <a:r>
+              <a:rPr sz="1600" dirty="0"/>
+              <a:t>. En </a:t>
+            </a:r>
+            <a:r>
+              <a:rPr sz="1600" dirty="0" err="1"/>
+              <a:t>contraste</a:t>
+            </a:r>
+            <a:r>
+              <a:rPr sz="1600" dirty="0"/>
+              <a:t>, entre </a:t>
+            </a:r>
+            <a:r>
+              <a:rPr sz="1600" dirty="0" err="1"/>
+              <a:t>quienes</a:t>
+            </a:r>
+            <a:r>
+              <a:rPr sz="1600" dirty="0"/>
+              <a:t> </a:t>
+            </a:r>
+            <a:r>
+              <a:rPr sz="1600" dirty="0" err="1"/>
+              <a:t>desaprueban</a:t>
+            </a:r>
+            <a:r>
+              <a:rPr sz="1600" dirty="0"/>
+              <a:t> la </a:t>
+            </a:r>
+            <a:r>
+              <a:rPr sz="1600" dirty="0" err="1"/>
+              <a:t>gestión</a:t>
+            </a:r>
+            <a:r>
+              <a:rPr sz="1600" dirty="0"/>
+              <a:t> </a:t>
+            </a:r>
+            <a:r>
+              <a:rPr sz="1600" dirty="0" err="1"/>
+              <a:t>presidencial</a:t>
+            </a:r>
+            <a:r>
+              <a:rPr sz="1600" dirty="0"/>
+              <a:t>, </a:t>
+            </a:r>
+            <a:r>
+              <a:rPr sz="1600" dirty="0" err="1"/>
+              <a:t>dicha</a:t>
+            </a:r>
+            <a:r>
+              <a:rPr sz="1600" dirty="0"/>
+              <a:t> </a:t>
+            </a:r>
+            <a:r>
+              <a:rPr sz="1600" dirty="0" err="1"/>
+              <a:t>probabilidad</a:t>
+            </a:r>
+            <a:r>
+              <a:rPr sz="1600" dirty="0"/>
+              <a:t> </a:t>
+            </a:r>
+            <a:r>
+              <a:rPr sz="1600" dirty="0" err="1"/>
+              <a:t>desciende</a:t>
+            </a:r>
+            <a:r>
+              <a:rPr sz="1600" dirty="0"/>
+              <a:t> a </a:t>
+            </a:r>
+            <a:r>
+              <a:rPr sz="1600" dirty="0" err="1"/>
+              <a:t>valores</a:t>
+            </a:r>
+            <a:r>
+              <a:rPr sz="1600" dirty="0"/>
+              <a:t> </a:t>
+            </a:r>
+            <a:r>
+              <a:rPr sz="1600" dirty="0" err="1"/>
+              <a:t>cercanos</a:t>
+            </a:r>
+            <a:r>
+              <a:rPr sz="1600" dirty="0"/>
+              <a:t> al 30%.</a:t>
+            </a:r>
+          </a:p>
+          <a:p>
+            <a:pPr marL="0" lvl="0" indent="0">
               <a:buNone/>
             </a:pPr>
             <a:r>
-              <a:rPr/>
-              <a:t>Por otra parte, las diferencias entre hombres y mujeres son relativamente reducidas en ambos grupos, lo que resulta consistente con los resultados obtenidos previamente en los análisis bivariados y en la regresión logística. En conjunto, la evidencia sugiere que la aprobación presidencial constituye un factor considerablemente más relevante para explicar la satisfacción con la democracia que las variables sociodemográficas consideradas en este estudio.</a:t>
-            </a:r>
-          </a:p>
-          <a:p>
-            <a:pPr lvl="0" indent="0" marL="0">
-              <a:buNone/>
-            </a:pPr>
-            <a:r>
-              <a:rPr/>
-              <a:t>“El ascenso de Milei en Argentina y las nuevas extremas derechas de América Latina*.” n.d. </a:t>
-            </a:r>
-            <a:r>
-              <a:rPr>
-                <a:hlinkClick r:id="rId2"/>
-              </a:rPr>
-              <a:t>https://revistas.javeriana.edu.co/files-articulos/PaPo/29(2024)/6812641001/index.html</a:t>
-            </a:r>
-            <a:r>
-              <a:rPr/>
+              <a:rPr sz="1600" dirty="0"/>
+              <a:t>Por </a:t>
+            </a:r>
+            <a:r>
+              <a:rPr sz="1600" dirty="0" err="1"/>
+              <a:t>otra</a:t>
+            </a:r>
+            <a:r>
+              <a:rPr sz="1600" dirty="0"/>
+              <a:t> </a:t>
+            </a:r>
+            <a:r>
+              <a:rPr sz="1600" dirty="0" err="1"/>
+              <a:t>parte</a:t>
+            </a:r>
+            <a:r>
+              <a:rPr sz="1600" dirty="0"/>
+              <a:t>, las </a:t>
+            </a:r>
+            <a:r>
+              <a:rPr sz="1600" dirty="0" err="1"/>
+              <a:t>diferencias</a:t>
+            </a:r>
+            <a:r>
+              <a:rPr sz="1600" dirty="0"/>
+              <a:t> entre hombres y </a:t>
+            </a:r>
+            <a:r>
+              <a:rPr sz="1600" dirty="0" err="1"/>
+              <a:t>mujeres</a:t>
+            </a:r>
+            <a:r>
+              <a:rPr sz="1600" dirty="0"/>
+              <a:t> son </a:t>
+            </a:r>
+            <a:r>
+              <a:rPr sz="1600" dirty="0" err="1"/>
+              <a:t>relativamente</a:t>
+            </a:r>
+            <a:r>
+              <a:rPr sz="1600" dirty="0"/>
+              <a:t> </a:t>
+            </a:r>
+            <a:r>
+              <a:rPr sz="1600" dirty="0" err="1"/>
+              <a:t>reducidas</a:t>
+            </a:r>
+            <a:r>
+              <a:rPr sz="1600" dirty="0"/>
+              <a:t> </a:t>
+            </a:r>
+            <a:r>
+              <a:rPr sz="1600" dirty="0" err="1"/>
+              <a:t>en</a:t>
+            </a:r>
+            <a:r>
+              <a:rPr sz="1600" dirty="0"/>
+              <a:t> ambos </a:t>
+            </a:r>
+            <a:r>
+              <a:rPr sz="1600" dirty="0" err="1"/>
+              <a:t>grupos</a:t>
+            </a:r>
+            <a:r>
+              <a:rPr sz="1600" dirty="0"/>
+              <a:t>, lo </a:t>
+            </a:r>
+            <a:r>
+              <a:rPr sz="1600" dirty="0" err="1"/>
+              <a:t>que</a:t>
+            </a:r>
+            <a:r>
+              <a:rPr sz="1600" dirty="0"/>
+              <a:t> </a:t>
+            </a:r>
+            <a:r>
+              <a:rPr sz="1600" dirty="0" err="1"/>
+              <a:t>resulta</a:t>
+            </a:r>
+            <a:r>
+              <a:rPr sz="1600" dirty="0"/>
+              <a:t> </a:t>
+            </a:r>
+            <a:r>
+              <a:rPr sz="1600" dirty="0" err="1"/>
+              <a:t>consistente</a:t>
+            </a:r>
+            <a:r>
+              <a:rPr sz="1600" dirty="0"/>
+              <a:t> con </a:t>
+            </a:r>
+            <a:r>
+              <a:rPr sz="1600" dirty="0" err="1"/>
+              <a:t>los</a:t>
+            </a:r>
+            <a:r>
+              <a:rPr sz="1600" dirty="0"/>
+              <a:t> </a:t>
+            </a:r>
+            <a:r>
+              <a:rPr sz="1600" dirty="0" err="1"/>
+              <a:t>resultados</a:t>
+            </a:r>
+            <a:r>
+              <a:rPr sz="1600" dirty="0"/>
+              <a:t> </a:t>
+            </a:r>
+            <a:r>
+              <a:rPr sz="1600" dirty="0" err="1"/>
+              <a:t>obtenidos</a:t>
+            </a:r>
+            <a:r>
+              <a:rPr sz="1600" dirty="0"/>
+              <a:t> </a:t>
+            </a:r>
+            <a:r>
+              <a:rPr sz="1600" dirty="0" err="1"/>
+              <a:t>previamente</a:t>
+            </a:r>
+            <a:r>
+              <a:rPr sz="1600" dirty="0"/>
+              <a:t> </a:t>
+            </a:r>
+            <a:r>
+              <a:rPr sz="1600" dirty="0" err="1"/>
+              <a:t>en</a:t>
+            </a:r>
+            <a:r>
+              <a:rPr sz="1600" dirty="0"/>
+              <a:t> </a:t>
+            </a:r>
+            <a:r>
+              <a:rPr sz="1600" dirty="0" err="1"/>
+              <a:t>los</a:t>
+            </a:r>
+            <a:r>
+              <a:rPr sz="1600" dirty="0"/>
+              <a:t> </a:t>
+            </a:r>
+            <a:r>
+              <a:rPr sz="1600" dirty="0" err="1"/>
+              <a:t>análisis</a:t>
+            </a:r>
+            <a:r>
+              <a:rPr sz="1600" dirty="0"/>
+              <a:t> </a:t>
+            </a:r>
+            <a:r>
+              <a:rPr sz="1600" dirty="0" err="1"/>
+              <a:t>bivariados</a:t>
+            </a:r>
+            <a:r>
+              <a:rPr sz="1600" dirty="0"/>
+              <a:t> y </a:t>
+            </a:r>
+            <a:r>
+              <a:rPr sz="1600" dirty="0" err="1"/>
+              <a:t>en</a:t>
+            </a:r>
+            <a:r>
+              <a:rPr sz="1600" dirty="0"/>
+              <a:t> la </a:t>
+            </a:r>
+            <a:r>
+              <a:rPr sz="1600" dirty="0" err="1"/>
+              <a:t>regresión</a:t>
+            </a:r>
+            <a:r>
+              <a:rPr sz="1600" dirty="0"/>
+              <a:t> </a:t>
+            </a:r>
+            <a:r>
+              <a:rPr sz="1600" dirty="0" err="1"/>
+              <a:t>logística</a:t>
+            </a:r>
+            <a:r>
+              <a:rPr sz="1600" dirty="0"/>
+              <a:t>. En conjunto, la </a:t>
+            </a:r>
+            <a:r>
+              <a:rPr sz="1600" dirty="0" err="1"/>
+              <a:t>evidencia</a:t>
+            </a:r>
+            <a:r>
+              <a:rPr sz="1600" dirty="0"/>
+              <a:t> </a:t>
+            </a:r>
+            <a:r>
+              <a:rPr sz="1600" dirty="0" err="1"/>
+              <a:t>sugiere</a:t>
+            </a:r>
+            <a:r>
+              <a:rPr sz="1600" dirty="0"/>
+              <a:t> </a:t>
+            </a:r>
+            <a:r>
+              <a:rPr sz="1600" dirty="0" err="1"/>
+              <a:t>que</a:t>
+            </a:r>
+            <a:r>
+              <a:rPr sz="1600" dirty="0"/>
+              <a:t> la </a:t>
+            </a:r>
+            <a:r>
+              <a:rPr sz="1600" dirty="0" err="1"/>
+              <a:t>aprobación</a:t>
+            </a:r>
+            <a:r>
+              <a:rPr sz="1600" dirty="0"/>
+              <a:t> </a:t>
+            </a:r>
+            <a:r>
+              <a:rPr sz="1600" dirty="0" err="1"/>
+              <a:t>presidencial</a:t>
+            </a:r>
+            <a:r>
+              <a:rPr sz="1600" dirty="0"/>
+              <a:t> </a:t>
+            </a:r>
+            <a:r>
+              <a:rPr sz="1600" dirty="0" err="1"/>
+              <a:t>constituye</a:t>
+            </a:r>
+            <a:r>
+              <a:rPr sz="1600" dirty="0"/>
+              <a:t> un factor </a:t>
+            </a:r>
+            <a:r>
+              <a:rPr sz="1600" dirty="0" err="1"/>
+              <a:t>considerablemente</a:t>
+            </a:r>
+            <a:r>
+              <a:rPr sz="1600" dirty="0"/>
+              <a:t> </a:t>
+            </a:r>
+            <a:r>
+              <a:rPr sz="1600" dirty="0" err="1"/>
+              <a:t>más</a:t>
+            </a:r>
+            <a:r>
+              <a:rPr sz="1600" dirty="0"/>
+              <a:t> </a:t>
+            </a:r>
+            <a:r>
+              <a:rPr sz="1600" dirty="0" err="1"/>
+              <a:t>relevante</a:t>
+            </a:r>
+            <a:r>
+              <a:rPr sz="1600" dirty="0"/>
+              <a:t> para </a:t>
+            </a:r>
+            <a:r>
+              <a:rPr sz="1600" dirty="0" err="1"/>
+              <a:t>explicar</a:t>
+            </a:r>
+            <a:r>
+              <a:rPr sz="1600" dirty="0"/>
+              <a:t> la </a:t>
+            </a:r>
+            <a:r>
+              <a:rPr sz="1600" dirty="0" err="1"/>
+              <a:t>satisfacción</a:t>
+            </a:r>
+            <a:r>
+              <a:rPr sz="1600" dirty="0"/>
+              <a:t> con la </a:t>
+            </a:r>
+            <a:r>
+              <a:rPr sz="1600" dirty="0" err="1"/>
+              <a:t>democracia</a:t>
+            </a:r>
+            <a:r>
+              <a:rPr sz="1600" dirty="0"/>
+              <a:t> </a:t>
+            </a:r>
+            <a:r>
+              <a:rPr sz="1600" dirty="0" err="1"/>
+              <a:t>que</a:t>
+            </a:r>
+            <a:r>
+              <a:rPr sz="1600" dirty="0"/>
+              <a:t> las variables </a:t>
+            </a:r>
+            <a:r>
+              <a:rPr sz="1600" dirty="0" err="1"/>
+              <a:t>sociodemográficas</a:t>
+            </a:r>
+            <a:r>
+              <a:rPr sz="1600" dirty="0"/>
+              <a:t> </a:t>
+            </a:r>
+            <a:r>
+              <a:rPr sz="1600" dirty="0" err="1"/>
+              <a:t>consideradas</a:t>
+            </a:r>
+            <a:r>
+              <a:rPr sz="1600" dirty="0"/>
+              <a:t> </a:t>
+            </a:r>
+            <a:r>
+              <a:rPr sz="1600" dirty="0" err="1"/>
+              <a:t>en</a:t>
+            </a:r>
+            <a:r>
+              <a:rPr sz="1600" dirty="0"/>
+              <a:t> </a:t>
+            </a:r>
+            <a:r>
+              <a:rPr sz="1600" dirty="0" err="1"/>
+              <a:t>este</a:t>
+            </a:r>
+            <a:r>
+              <a:rPr sz="1600" dirty="0"/>
+              <a:t> </a:t>
+            </a:r>
+            <a:r>
+              <a:rPr sz="1600" dirty="0" err="1"/>
+              <a:t>estudio</a:t>
+            </a:r>
+            <a:r>
+              <a:rPr sz="1600" dirty="0"/>
               <a:t>.</a:t>
             </a:r>
           </a:p>
@@ -3650,6 +6228,9 @@
       </p:sp>
     </p:spTree>
   </p:cSld>
+  <p:clrMapOvr>
+    <a:masterClrMapping/>
+  </p:clrMapOvr>
 </p:sld>
 </file>
 
@@ -3685,11 +6266,10 @@
           <a:bodyPr/>
           <a:lstStyle/>
           <a:p>
-            <a:pPr lvl="0" indent="0" marL="0">
+            <a:pPr marL="0" lvl="0" indent="0">
               <a:buNone/>
             </a:pPr>
             <a:r>
-              <a:rPr/>
               <a:t>Satisfaccion democratica en Argentina 2023</a:t>
             </a:r>
           </a:p>
@@ -3697,7 +6277,7 @@
       </p:sp>
       <p:pic>
         <p:nvPicPr>
-          <p:cNvPr descr="images/64f9c8b5b08a8_transicion-democraticaalta.png" id="0" name="Picture 1"/>
+          <p:cNvPr id="3" name="Picture 1" descr="images/64f9c8b5b08a8_transicion-democraticaalta.png"/>
           <p:cNvPicPr>
             <a:picLocks noGrp="1" noChangeAspect="1"/>
           </p:cNvPicPr>
@@ -3727,6 +6307,9 @@
       </p:pic>
     </p:spTree>
   </p:cSld>
+  <p:clrMapOvr>
+    <a:masterClrMapping/>
+  </p:clrMapOvr>
 </p:sld>
 </file>
 
@@ -3754,7 +6337,943 @@
             <a:spLocks noGrp="1"/>
           </p:cNvSpPr>
           <p:nvPr>
-            <p:ph idx="2" sz="half" type="body"/>
+            <p:ph type="body" sz="half" idx="2"/>
+          </p:nvPr>
+        </p:nvSpPr>
+        <p:spPr>
+          <a:xfrm>
+            <a:off x="571500" y="644980"/>
+            <a:ext cx="7649935" cy="3788228"/>
+          </a:xfrm>
+        </p:spPr>
+        <p:txBody>
+          <a:bodyPr>
+            <a:noAutofit/>
+          </a:bodyPr>
+          <a:lstStyle/>
+          <a:p>
+            <a:pPr marL="0" lvl="0" indent="0">
+              <a:spcBef>
+                <a:spcPts val="3000"/>
+              </a:spcBef>
+              <a:buNone/>
+            </a:pPr>
+            <a:r>
+              <a:rPr sz="1400" b="1" dirty="0" err="1"/>
+              <a:t>problema</a:t>
+            </a:r>
+            <a:r>
+              <a:rPr sz="1400" b="1" dirty="0"/>
+              <a:t> de </a:t>
+            </a:r>
+            <a:r>
+              <a:rPr sz="1400" b="1" dirty="0" err="1"/>
+              <a:t>investigacion</a:t>
+            </a:r>
+            <a:endParaRPr sz="1400" b="1" dirty="0"/>
+          </a:p>
+          <a:p>
+            <a:pPr marL="0" lvl="0" indent="0">
+              <a:buNone/>
+            </a:pPr>
+            <a:r>
+              <a:rPr sz="1400" dirty="0" err="1"/>
+              <a:t>Diversos</a:t>
+            </a:r>
+            <a:r>
+              <a:rPr sz="1400" dirty="0"/>
+              <a:t> </a:t>
+            </a:r>
+            <a:r>
+              <a:rPr sz="1400" dirty="0" err="1"/>
+              <a:t>estudios</a:t>
+            </a:r>
+            <a:r>
+              <a:rPr sz="1400" dirty="0"/>
+              <a:t> </a:t>
+            </a:r>
+            <a:r>
+              <a:rPr sz="1400" dirty="0" err="1"/>
+              <a:t>han</a:t>
+            </a:r>
+            <a:r>
+              <a:rPr sz="1400" dirty="0"/>
+              <a:t> </a:t>
+            </a:r>
+            <a:r>
+              <a:rPr sz="1400" dirty="0" err="1"/>
+              <a:t>evidenciado</a:t>
+            </a:r>
+            <a:r>
+              <a:rPr sz="1400" dirty="0"/>
+              <a:t> un </a:t>
+            </a:r>
+            <a:r>
+              <a:rPr sz="1400" dirty="0" err="1"/>
+              <a:t>deterioro</a:t>
+            </a:r>
+            <a:r>
+              <a:rPr sz="1400" dirty="0"/>
+              <a:t> </a:t>
+            </a:r>
+            <a:r>
+              <a:rPr sz="1400" dirty="0" err="1"/>
+              <a:t>en</a:t>
+            </a:r>
+            <a:r>
+              <a:rPr sz="1400" dirty="0"/>
+              <a:t> la </a:t>
+            </a:r>
+            <a:r>
+              <a:rPr sz="1400" dirty="0" err="1"/>
+              <a:t>legitimidad</a:t>
+            </a:r>
+            <a:r>
+              <a:rPr sz="1400" dirty="0"/>
+              <a:t> de la </a:t>
+            </a:r>
+            <a:r>
+              <a:rPr sz="1400" dirty="0" err="1"/>
+              <a:t>democracia</a:t>
+            </a:r>
+            <a:r>
+              <a:rPr sz="1400" dirty="0"/>
+              <a:t> y </a:t>
+            </a:r>
+            <a:r>
+              <a:rPr sz="1400" dirty="0" err="1"/>
+              <a:t>una</a:t>
+            </a:r>
+            <a:r>
+              <a:rPr sz="1400" dirty="0"/>
+              <a:t> </a:t>
+            </a:r>
+            <a:r>
+              <a:rPr sz="1400" dirty="0" err="1"/>
+              <a:t>creciente</a:t>
+            </a:r>
+            <a:r>
+              <a:rPr sz="1400" dirty="0"/>
+              <a:t> </a:t>
+            </a:r>
+            <a:r>
+              <a:rPr sz="1400" dirty="0" err="1"/>
+              <a:t>insatisfacción</a:t>
+            </a:r>
+            <a:r>
+              <a:rPr sz="1400" dirty="0"/>
+              <a:t> </a:t>
+            </a:r>
+            <a:r>
+              <a:rPr sz="1400" dirty="0" err="1"/>
+              <a:t>ciudadana</a:t>
+            </a:r>
+            <a:r>
+              <a:rPr sz="1400" dirty="0"/>
+              <a:t> con </a:t>
+            </a:r>
+            <a:r>
+              <a:rPr sz="1400" dirty="0" err="1"/>
+              <a:t>su</a:t>
+            </a:r>
+            <a:r>
+              <a:rPr sz="1400" dirty="0"/>
+              <a:t> </a:t>
+            </a:r>
+            <a:r>
+              <a:rPr sz="1400" dirty="0" err="1"/>
+              <a:t>funcionamiento</a:t>
+            </a:r>
+            <a:r>
+              <a:rPr sz="1400" dirty="0"/>
+              <a:t>. En </a:t>
+            </a:r>
+            <a:r>
+              <a:rPr sz="1400" dirty="0" err="1"/>
+              <a:t>este</a:t>
+            </a:r>
+            <a:r>
+              <a:rPr sz="1400" dirty="0"/>
+              <a:t> </a:t>
+            </a:r>
+            <a:r>
+              <a:rPr sz="1400" dirty="0" err="1"/>
+              <a:t>contexto</a:t>
+            </a:r>
+            <a:r>
+              <a:rPr sz="1400" dirty="0"/>
+              <a:t>, </a:t>
+            </a:r>
+            <a:r>
+              <a:rPr sz="1400" dirty="0" err="1"/>
+              <a:t>resulta</a:t>
+            </a:r>
+            <a:r>
+              <a:rPr sz="1400" dirty="0"/>
+              <a:t> </a:t>
+            </a:r>
+            <a:r>
+              <a:rPr sz="1400" dirty="0" err="1"/>
+              <a:t>relevante</a:t>
+            </a:r>
+            <a:r>
+              <a:rPr sz="1400" dirty="0"/>
+              <a:t> </a:t>
+            </a:r>
+            <a:r>
+              <a:rPr sz="1400" dirty="0" err="1"/>
+              <a:t>analizar</a:t>
+            </a:r>
+            <a:r>
+              <a:rPr sz="1400" dirty="0"/>
+              <a:t> </a:t>
+            </a:r>
+            <a:r>
+              <a:rPr sz="1400" dirty="0" err="1"/>
+              <a:t>cómo</a:t>
+            </a:r>
+            <a:r>
+              <a:rPr sz="1400" dirty="0"/>
+              <a:t> se </a:t>
+            </a:r>
+            <a:r>
+              <a:rPr sz="1400" dirty="0" err="1"/>
+              <a:t>distribuye</a:t>
+            </a:r>
+            <a:r>
+              <a:rPr sz="1400" dirty="0"/>
+              <a:t> la </a:t>
+            </a:r>
+            <a:r>
+              <a:rPr sz="1400" dirty="0" err="1"/>
+              <a:t>satisfacción</a:t>
+            </a:r>
+            <a:r>
+              <a:rPr sz="1400" dirty="0"/>
+              <a:t> con la </a:t>
+            </a:r>
+            <a:r>
+              <a:rPr sz="1400" dirty="0" err="1"/>
+              <a:t>democracia</a:t>
+            </a:r>
+            <a:r>
+              <a:rPr sz="1400" dirty="0"/>
+              <a:t> </a:t>
+            </a:r>
+            <a:r>
+              <a:rPr sz="1400" dirty="0" err="1"/>
+              <a:t>en</a:t>
+            </a:r>
+            <a:r>
+              <a:rPr sz="1400" dirty="0"/>
+              <a:t> Argentina </a:t>
+            </a:r>
+            <a:r>
+              <a:rPr sz="1400" dirty="0" err="1"/>
+              <a:t>durante</a:t>
+            </a:r>
+            <a:r>
+              <a:rPr sz="1400" dirty="0"/>
+              <a:t> 2023 y de </a:t>
+            </a:r>
+            <a:r>
+              <a:rPr sz="1400" dirty="0" err="1"/>
+              <a:t>qué</a:t>
+            </a:r>
+            <a:r>
+              <a:rPr sz="1400" dirty="0"/>
+              <a:t> </a:t>
+            </a:r>
+            <a:r>
+              <a:rPr sz="1400" dirty="0" err="1"/>
+              <a:t>manera</a:t>
+            </a:r>
+            <a:r>
+              <a:rPr sz="1400" dirty="0"/>
+              <a:t> </a:t>
+            </a:r>
+            <a:r>
+              <a:rPr sz="1400" dirty="0" err="1"/>
+              <a:t>esta</a:t>
+            </a:r>
+            <a:r>
+              <a:rPr sz="1400" dirty="0"/>
+              <a:t> </a:t>
+            </a:r>
+            <a:r>
+              <a:rPr sz="1400" dirty="0" err="1"/>
+              <a:t>varía</a:t>
+            </a:r>
+            <a:r>
+              <a:rPr sz="1400" dirty="0"/>
+              <a:t> </a:t>
+            </a:r>
+            <a:r>
+              <a:rPr sz="1400" dirty="0" err="1"/>
+              <a:t>según</a:t>
+            </a:r>
+            <a:r>
+              <a:rPr sz="1400" dirty="0"/>
+              <a:t> </a:t>
+            </a:r>
+            <a:r>
+              <a:rPr sz="1400" dirty="0" err="1"/>
+              <a:t>características</a:t>
+            </a:r>
+            <a:r>
+              <a:rPr sz="1400" dirty="0"/>
+              <a:t> </a:t>
+            </a:r>
+            <a:r>
+              <a:rPr sz="1400" dirty="0" err="1"/>
+              <a:t>sociodemográficas</a:t>
+            </a:r>
+            <a:r>
+              <a:rPr sz="1400" dirty="0"/>
+              <a:t> de la población.</a:t>
+            </a:r>
+          </a:p>
+          <a:p>
+            <a:pPr marL="0" lvl="0" indent="0">
+              <a:buNone/>
+            </a:pPr>
+            <a:r>
+              <a:rPr sz="1400" dirty="0"/>
+              <a:t>La </a:t>
+            </a:r>
+            <a:r>
+              <a:rPr sz="1400" dirty="0" err="1"/>
+              <a:t>satisfacción</a:t>
+            </a:r>
+            <a:r>
+              <a:rPr sz="1400" dirty="0"/>
+              <a:t> con la </a:t>
+            </a:r>
+            <a:r>
+              <a:rPr sz="1400" dirty="0" err="1"/>
+              <a:t>democracia</a:t>
+            </a:r>
+            <a:r>
+              <a:rPr sz="1400" dirty="0"/>
+              <a:t> </a:t>
+            </a:r>
+            <a:r>
+              <a:rPr sz="1400" dirty="0" err="1"/>
+              <a:t>constituye</a:t>
+            </a:r>
+            <a:r>
+              <a:rPr sz="1400" dirty="0"/>
+              <a:t> un </a:t>
+            </a:r>
+            <a:r>
+              <a:rPr sz="1400" dirty="0" err="1"/>
+              <a:t>indicador</a:t>
+            </a:r>
+            <a:r>
+              <a:rPr sz="1400" dirty="0"/>
+              <a:t> </a:t>
+            </a:r>
+            <a:r>
+              <a:rPr sz="1400" dirty="0" err="1"/>
+              <a:t>relevante</a:t>
+            </a:r>
+            <a:r>
+              <a:rPr sz="1400" dirty="0"/>
+              <a:t> para </a:t>
+            </a:r>
+            <a:r>
+              <a:rPr sz="1400" dirty="0" err="1"/>
+              <a:t>comprender</a:t>
+            </a:r>
+            <a:r>
+              <a:rPr sz="1400" dirty="0"/>
+              <a:t> </a:t>
+            </a:r>
+            <a:r>
+              <a:rPr sz="1400" dirty="0" err="1"/>
+              <a:t>el</a:t>
+            </a:r>
+            <a:r>
+              <a:rPr sz="1400" dirty="0"/>
+              <a:t> </a:t>
+            </a:r>
+            <a:r>
+              <a:rPr sz="1400" dirty="0" err="1"/>
+              <a:t>contexto</a:t>
+            </a:r>
+            <a:r>
+              <a:rPr sz="1400" dirty="0"/>
+              <a:t> </a:t>
+            </a:r>
+            <a:r>
+              <a:rPr sz="1400" dirty="0" err="1"/>
+              <a:t>sociopolítico</a:t>
+            </a:r>
+            <a:r>
+              <a:rPr sz="1400" dirty="0"/>
+              <a:t> </a:t>
+            </a:r>
+            <a:r>
+              <a:rPr sz="1400" dirty="0" err="1"/>
+              <a:t>en</a:t>
+            </a:r>
+            <a:r>
+              <a:rPr sz="1400" dirty="0"/>
+              <a:t> </a:t>
+            </a:r>
+            <a:r>
+              <a:rPr sz="1400" dirty="0" err="1"/>
+              <a:t>el</a:t>
+            </a:r>
+            <a:r>
+              <a:rPr sz="1400" dirty="0"/>
+              <a:t> </a:t>
+            </a:r>
+            <a:r>
+              <a:rPr sz="1400" dirty="0" err="1"/>
+              <a:t>que</a:t>
+            </a:r>
+            <a:r>
+              <a:rPr sz="1400" dirty="0"/>
+              <a:t> </a:t>
+            </a:r>
+            <a:r>
+              <a:rPr sz="1400" dirty="0" err="1"/>
+              <a:t>emergen</a:t>
+            </a:r>
+            <a:r>
+              <a:rPr sz="1400" dirty="0"/>
+              <a:t> </a:t>
+            </a:r>
+            <a:r>
+              <a:rPr sz="1400" dirty="0" err="1"/>
+              <a:t>discursos</a:t>
+            </a:r>
+            <a:r>
+              <a:rPr sz="1400" dirty="0"/>
+              <a:t> </a:t>
+            </a:r>
+            <a:r>
+              <a:rPr sz="1400" dirty="0" err="1"/>
+              <a:t>antisistema</a:t>
+            </a:r>
+            <a:r>
+              <a:rPr sz="1400" dirty="0"/>
+              <a:t> y </a:t>
+            </a:r>
+            <a:r>
+              <a:rPr sz="1400" dirty="0" err="1"/>
+              <a:t>liderazgos</a:t>
+            </a:r>
+            <a:r>
+              <a:rPr sz="1400" dirty="0"/>
+              <a:t> </a:t>
+            </a:r>
+            <a:r>
+              <a:rPr sz="1400" dirty="0" err="1"/>
+              <a:t>críticos</a:t>
+            </a:r>
+            <a:r>
+              <a:rPr sz="1400" dirty="0"/>
+              <a:t> de las </a:t>
+            </a:r>
+            <a:r>
+              <a:rPr sz="1400" dirty="0" err="1"/>
+              <a:t>instituciones</a:t>
+            </a:r>
+            <a:r>
+              <a:rPr sz="1400" dirty="0"/>
+              <a:t> </a:t>
+            </a:r>
+            <a:r>
+              <a:rPr sz="1400" dirty="0" err="1"/>
+              <a:t>democráticas</a:t>
+            </a:r>
+            <a:r>
+              <a:rPr sz="1400" dirty="0"/>
+              <a:t> </a:t>
+            </a:r>
+            <a:r>
+              <a:rPr sz="1400" dirty="0" err="1"/>
+              <a:t>tradicionales</a:t>
+            </a:r>
+            <a:r>
+              <a:rPr sz="1400" dirty="0"/>
+              <a:t>, </a:t>
+            </a:r>
+            <a:r>
+              <a:rPr sz="1400" dirty="0" err="1"/>
+              <a:t>como</a:t>
+            </a:r>
+            <a:r>
+              <a:rPr sz="1400" dirty="0"/>
+              <a:t> </a:t>
+            </a:r>
+            <a:r>
+              <a:rPr sz="1400" dirty="0" err="1"/>
+              <a:t>el</a:t>
+            </a:r>
+            <a:r>
+              <a:rPr sz="1400" dirty="0"/>
+              <a:t> de Javier Milei.</a:t>
+            </a:r>
+          </a:p>
+          <a:p>
+            <a:pPr marL="0" lvl="0" indent="0">
+              <a:spcBef>
+                <a:spcPts val="3000"/>
+              </a:spcBef>
+              <a:buNone/>
+            </a:pPr>
+            <a:r>
+              <a:rPr sz="1400" b="1" dirty="0" err="1"/>
+              <a:t>Justificación</a:t>
+            </a:r>
+            <a:endParaRPr sz="1400" b="1" dirty="0"/>
+          </a:p>
+          <a:p>
+            <a:pPr marL="0" lvl="0" indent="0">
+              <a:buNone/>
+            </a:pPr>
+            <a:r>
+              <a:rPr sz="1400" dirty="0"/>
+              <a:t>La </a:t>
+            </a:r>
+            <a:r>
+              <a:rPr sz="1400" dirty="0" err="1"/>
+              <a:t>relevancia</a:t>
+            </a:r>
+            <a:r>
+              <a:rPr sz="1400" dirty="0"/>
+              <a:t> de </a:t>
+            </a:r>
+            <a:r>
+              <a:rPr sz="1400" dirty="0" err="1"/>
+              <a:t>esta</a:t>
+            </a:r>
+            <a:r>
+              <a:rPr sz="1400" dirty="0"/>
+              <a:t> </a:t>
+            </a:r>
+            <a:r>
+              <a:rPr sz="1400" dirty="0" err="1"/>
+              <a:t>investigación</a:t>
+            </a:r>
+            <a:r>
+              <a:rPr sz="1400" dirty="0"/>
+              <a:t> </a:t>
+            </a:r>
+            <a:r>
+              <a:rPr sz="1400" dirty="0" err="1"/>
+              <a:t>radica</a:t>
+            </a:r>
+            <a:r>
+              <a:rPr sz="1400" dirty="0"/>
+              <a:t> </a:t>
+            </a:r>
+            <a:r>
+              <a:rPr sz="1400" dirty="0" err="1"/>
+              <a:t>en</a:t>
+            </a:r>
+            <a:r>
+              <a:rPr sz="1400" dirty="0"/>
+              <a:t> </a:t>
+            </a:r>
+            <a:r>
+              <a:rPr sz="1400" dirty="0" err="1"/>
+              <a:t>comprender</a:t>
+            </a:r>
+            <a:r>
+              <a:rPr sz="1400" dirty="0"/>
+              <a:t> </a:t>
+            </a:r>
+            <a:r>
+              <a:rPr sz="1400" dirty="0" err="1"/>
+              <a:t>cómo</a:t>
+            </a:r>
+            <a:r>
+              <a:rPr sz="1400" dirty="0"/>
+              <a:t> </a:t>
+            </a:r>
+            <a:r>
+              <a:rPr sz="1400" dirty="0" err="1"/>
+              <a:t>distintos</a:t>
+            </a:r>
+            <a:r>
+              <a:rPr sz="1400" dirty="0"/>
+              <a:t> </a:t>
+            </a:r>
+            <a:r>
+              <a:rPr sz="1400" dirty="0" err="1"/>
+              <a:t>sectores</a:t>
+            </a:r>
+            <a:r>
+              <a:rPr sz="1400" dirty="0"/>
+              <a:t> de la población </a:t>
+            </a:r>
+            <a:r>
+              <a:rPr sz="1400" dirty="0" err="1"/>
+              <a:t>argentina</a:t>
+            </a:r>
+            <a:r>
+              <a:rPr sz="1400" dirty="0"/>
+              <a:t> </a:t>
+            </a:r>
+            <a:r>
+              <a:rPr sz="1400" dirty="0" err="1"/>
+              <a:t>evalúan</a:t>
+            </a:r>
+            <a:r>
+              <a:rPr sz="1400" dirty="0"/>
+              <a:t> </a:t>
+            </a:r>
+            <a:r>
+              <a:rPr sz="1400" dirty="0" err="1"/>
+              <a:t>el</a:t>
+            </a:r>
+            <a:r>
+              <a:rPr sz="1400" dirty="0"/>
+              <a:t> </a:t>
+            </a:r>
+            <a:r>
+              <a:rPr sz="1400" dirty="0" err="1"/>
+              <a:t>funcionamiento</a:t>
+            </a:r>
+            <a:r>
+              <a:rPr sz="1400" dirty="0"/>
+              <a:t> de la </a:t>
+            </a:r>
+            <a:r>
+              <a:rPr sz="1400" dirty="0" err="1"/>
+              <a:t>democracia</a:t>
+            </a:r>
+            <a:r>
+              <a:rPr sz="1400" dirty="0"/>
+              <a:t> </a:t>
+            </a:r>
+            <a:r>
+              <a:rPr sz="1400" dirty="0" err="1"/>
+              <a:t>en</a:t>
+            </a:r>
+            <a:r>
+              <a:rPr sz="1400" dirty="0"/>
+              <a:t> un </a:t>
+            </a:r>
+            <a:r>
+              <a:rPr sz="1400" dirty="0" err="1"/>
+              <a:t>contexto</a:t>
+            </a:r>
+            <a:r>
+              <a:rPr sz="1400" dirty="0"/>
+              <a:t> </a:t>
+            </a:r>
+            <a:r>
+              <a:rPr sz="1400" dirty="0" err="1"/>
+              <a:t>marcado</a:t>
+            </a:r>
+            <a:r>
+              <a:rPr sz="1400" dirty="0"/>
+              <a:t> </a:t>
+            </a:r>
+            <a:r>
+              <a:rPr sz="1400" dirty="0" err="1"/>
+              <a:t>por</a:t>
+            </a:r>
+            <a:r>
+              <a:rPr sz="1400" dirty="0"/>
+              <a:t> crisis </a:t>
+            </a:r>
+            <a:r>
+              <a:rPr sz="1400" dirty="0" err="1"/>
+              <a:t>económicas</a:t>
+            </a:r>
+            <a:r>
+              <a:rPr sz="1400" dirty="0"/>
+              <a:t> </a:t>
+            </a:r>
+            <a:r>
+              <a:rPr sz="1400" dirty="0" err="1"/>
+              <a:t>recurrentes</a:t>
+            </a:r>
+            <a:r>
+              <a:rPr sz="1400" dirty="0"/>
+              <a:t>, </a:t>
+            </a:r>
+            <a:r>
+              <a:rPr sz="1400" dirty="0" err="1"/>
+              <a:t>inflación</a:t>
+            </a:r>
+            <a:r>
+              <a:rPr sz="1400" dirty="0"/>
+              <a:t> </a:t>
+            </a:r>
+            <a:r>
+              <a:rPr sz="1400" dirty="0" err="1"/>
+              <a:t>sostenida</a:t>
+            </a:r>
+            <a:r>
+              <a:rPr sz="1400" dirty="0"/>
+              <a:t>, </a:t>
+            </a:r>
+            <a:r>
+              <a:rPr sz="1400" dirty="0" err="1"/>
+              <a:t>incertidumbre</a:t>
+            </a:r>
+            <a:r>
+              <a:rPr sz="1400" dirty="0"/>
+              <a:t> social y </a:t>
+            </a:r>
+            <a:r>
+              <a:rPr sz="1400" dirty="0" err="1"/>
+              <a:t>creciente</a:t>
+            </a:r>
+            <a:r>
+              <a:rPr sz="1400" dirty="0"/>
+              <a:t> </a:t>
+            </a:r>
+            <a:r>
+              <a:rPr sz="1400" dirty="0" err="1"/>
+              <a:t>desafección</a:t>
+            </a:r>
+            <a:r>
+              <a:rPr sz="1400" dirty="0"/>
+              <a:t> </a:t>
+            </a:r>
+            <a:r>
+              <a:rPr sz="1400" dirty="0" err="1"/>
+              <a:t>política</a:t>
+            </a:r>
+            <a:r>
+              <a:rPr sz="1400" dirty="0"/>
+              <a:t>.</a:t>
+            </a:r>
+          </a:p>
+          <a:p>
+            <a:pPr marL="0" lvl="0" indent="0">
+              <a:buNone/>
+            </a:pPr>
+            <a:r>
+              <a:rPr sz="1400" dirty="0"/>
+              <a:t>Para </a:t>
+            </a:r>
+            <a:r>
+              <a:rPr sz="1400" dirty="0" err="1"/>
+              <a:t>ello</a:t>
+            </a:r>
+            <a:r>
+              <a:rPr sz="1400" dirty="0"/>
+              <a:t>, se </a:t>
+            </a:r>
+            <a:r>
+              <a:rPr sz="1400" dirty="0" err="1"/>
+              <a:t>analizarán</a:t>
+            </a:r>
+            <a:r>
+              <a:rPr sz="1400" dirty="0"/>
+              <a:t> </a:t>
+            </a:r>
+            <a:r>
+              <a:rPr sz="1400" dirty="0" err="1"/>
+              <a:t>datos</a:t>
+            </a:r>
+            <a:r>
+              <a:rPr sz="1400" dirty="0"/>
+              <a:t> del </a:t>
+            </a:r>
+            <a:r>
+              <a:rPr sz="1400" dirty="0" err="1"/>
+              <a:t>Latinobarómetro</a:t>
+            </a:r>
+            <a:r>
+              <a:rPr sz="1400" dirty="0"/>
+              <a:t> 2023, </a:t>
+            </a:r>
+            <a:r>
+              <a:rPr sz="1400" dirty="0" err="1"/>
+              <a:t>debido</a:t>
+            </a:r>
+            <a:r>
+              <a:rPr sz="1400" dirty="0"/>
+              <a:t> a </a:t>
+            </a:r>
+            <a:r>
+              <a:rPr sz="1400" dirty="0" err="1"/>
+              <a:t>que</a:t>
+            </a:r>
+            <a:r>
+              <a:rPr sz="1400" dirty="0"/>
+              <a:t> </a:t>
+            </a:r>
+            <a:r>
+              <a:rPr sz="1400" dirty="0" err="1"/>
+              <a:t>este</a:t>
+            </a:r>
+            <a:r>
+              <a:rPr sz="1400" dirty="0"/>
+              <a:t> </a:t>
+            </a:r>
+            <a:r>
+              <a:rPr sz="1400" dirty="0" err="1"/>
+              <a:t>periodo</a:t>
+            </a:r>
+            <a:r>
+              <a:rPr sz="1400" dirty="0"/>
+              <a:t> </a:t>
+            </a:r>
+            <a:r>
+              <a:rPr sz="1400" dirty="0" err="1"/>
+              <a:t>concentra</a:t>
+            </a:r>
+            <a:r>
+              <a:rPr sz="1400" dirty="0"/>
+              <a:t> </a:t>
+            </a:r>
+            <a:r>
+              <a:rPr sz="1400" dirty="0" err="1"/>
+              <a:t>transformaciones</a:t>
+            </a:r>
+            <a:r>
+              <a:rPr sz="1400" dirty="0"/>
+              <a:t> </a:t>
+            </a:r>
+            <a:r>
+              <a:rPr sz="1400" dirty="0" err="1"/>
+              <a:t>políticas</a:t>
+            </a:r>
+            <a:r>
+              <a:rPr sz="1400" dirty="0"/>
+              <a:t> y </a:t>
+            </a:r>
+            <a:r>
+              <a:rPr sz="1400" dirty="0" err="1"/>
+              <a:t>sociales</a:t>
+            </a:r>
+            <a:r>
+              <a:rPr sz="1400" dirty="0"/>
+              <a:t> </a:t>
+            </a:r>
+            <a:r>
+              <a:rPr sz="1400" dirty="0" err="1"/>
+              <a:t>relevantes</a:t>
+            </a:r>
+            <a:r>
+              <a:rPr sz="1400" dirty="0"/>
+              <a:t> para </a:t>
+            </a:r>
+            <a:r>
+              <a:rPr sz="1400" dirty="0" err="1"/>
+              <a:t>observar</a:t>
+            </a:r>
+            <a:r>
+              <a:rPr sz="1400" dirty="0"/>
+              <a:t> las </a:t>
+            </a:r>
+            <a:r>
+              <a:rPr sz="1400" dirty="0" err="1"/>
+              <a:t>percepciones</a:t>
+            </a:r>
+            <a:r>
+              <a:rPr sz="1400" dirty="0"/>
+              <a:t> </a:t>
+            </a:r>
+            <a:r>
+              <a:rPr sz="1400" dirty="0" err="1"/>
+              <a:t>ciudadanas</a:t>
+            </a:r>
+            <a:r>
+              <a:rPr sz="1400" dirty="0"/>
+              <a:t> </a:t>
+            </a:r>
+            <a:r>
+              <a:rPr sz="1400" dirty="0" err="1"/>
+              <a:t>sobre</a:t>
+            </a:r>
+            <a:r>
+              <a:rPr sz="1400" dirty="0"/>
+              <a:t> la </a:t>
+            </a:r>
+            <a:r>
+              <a:rPr sz="1400" dirty="0" err="1"/>
+              <a:t>democracia</a:t>
+            </a:r>
+            <a:r>
+              <a:rPr sz="1400" dirty="0"/>
+              <a:t> </a:t>
+            </a:r>
+            <a:r>
+              <a:rPr sz="1400" dirty="0" err="1"/>
+              <a:t>en</a:t>
+            </a:r>
+            <a:r>
+              <a:rPr sz="1400" dirty="0"/>
+              <a:t> Argentina.(“El </a:t>
+            </a:r>
+            <a:r>
+              <a:rPr sz="1400" dirty="0" err="1"/>
+              <a:t>ascenso</a:t>
+            </a:r>
+            <a:r>
+              <a:rPr sz="1400" dirty="0"/>
+              <a:t> de Milei </a:t>
+            </a:r>
+            <a:r>
+              <a:rPr sz="1400" dirty="0" err="1"/>
+              <a:t>en</a:t>
+            </a:r>
+            <a:r>
+              <a:rPr sz="1400" dirty="0"/>
+              <a:t> Argentina y las </a:t>
+            </a:r>
+            <a:r>
+              <a:rPr sz="1400" dirty="0" err="1"/>
+              <a:t>nuevas</a:t>
+            </a:r>
+            <a:r>
+              <a:rPr sz="1400" dirty="0"/>
+              <a:t> </a:t>
+            </a:r>
+            <a:r>
+              <a:rPr sz="1400" dirty="0" err="1"/>
+              <a:t>extremas</a:t>
+            </a:r>
+            <a:r>
+              <a:rPr sz="1400" dirty="0"/>
+              <a:t> </a:t>
+            </a:r>
+            <a:r>
+              <a:rPr sz="1400" dirty="0" err="1"/>
+              <a:t>derechas</a:t>
+            </a:r>
+            <a:r>
+              <a:rPr sz="1400" dirty="0"/>
+              <a:t> de América Latina*,” n.d.)</a:t>
+            </a:r>
+          </a:p>
+          <a:p>
+            <a:pPr marL="0" lvl="0" indent="0">
+              <a:spcBef>
+                <a:spcPts val="3000"/>
+              </a:spcBef>
+              <a:buNone/>
+            </a:pPr>
+            <a:endParaRPr sz="1400" dirty="0"/>
+          </a:p>
+        </p:txBody>
+      </p:sp>
+      <p:sp>
+        <p:nvSpPr>
+          <p:cNvPr id="3" name="Marcador de contenido 2">
+            <a:extLst>
+              <a:ext uri="{FF2B5EF4-FFF2-40B4-BE49-F238E27FC236}">
+                <a16:creationId xmlns:a16="http://schemas.microsoft.com/office/drawing/2014/main" id="{4D6D91DE-4352-2BCF-001B-961E12C6B01D}"/>
+              </a:ext>
+            </a:extLst>
+          </p:cNvPr>
+          <p:cNvSpPr>
+            <a:spLocks noGrp="1"/>
+          </p:cNvSpPr>
+          <p:nvPr>
+            <p:ph idx="1"/>
           </p:nvPr>
         </p:nvSpPr>
         <p:spPr/>
@@ -3762,646 +7281,15 @@
           <a:bodyPr/>
           <a:lstStyle/>
           <a:p>
-            <a:pPr lvl="0" indent="0" marL="0">
-              <a:spcBef>
-                <a:spcPts val="3000"/>
-              </a:spcBef>
-              <a:buNone/>
-            </a:pPr>
-            <a:r>
-              <a:rPr b="1"/>
-              <a:t>problema de investigacion</a:t>
-            </a:r>
-          </a:p>
-          <a:p>
-            <a:pPr lvl="0" indent="0" marL="0">
-              <a:buNone/>
-            </a:pPr>
-            <a:r>
-              <a:rPr/>
-              <a:t>Diversos estudios han evidenciado un deterioro en la legitimidad de la democracia y una creciente insatisfacción ciudadana con su funcionamiento. En este contexto, resulta relevante analizar cómo se distribuye la satisfacción con la democracia en Argentina durante 2023 y de qué manera esta varía según características sociodemográficas de la población.</a:t>
-            </a:r>
-          </a:p>
-          <a:p>
-            <a:pPr lvl="0" indent="0" marL="0">
-              <a:buNone/>
-            </a:pPr>
-            <a:r>
-              <a:rPr/>
-              <a:t>La satisfacción con la democracia constituye un indicador relevante para comprender el contexto sociopolítico en el que emergen discursos antisistema y liderazgos críticos de las instituciones democráticas tradicionales, como el de Javier Milei.</a:t>
-            </a:r>
-          </a:p>
-          <a:p>
-            <a:pPr lvl="0" indent="0" marL="0">
-              <a:spcBef>
-                <a:spcPts val="3000"/>
-              </a:spcBef>
-              <a:buNone/>
-            </a:pPr>
-            <a:r>
-              <a:rPr b="1"/>
-              <a:t>Justificación</a:t>
-            </a:r>
-          </a:p>
-          <a:p>
-            <a:pPr lvl="0" indent="0" marL="0">
-              <a:buNone/>
-            </a:pPr>
-            <a:r>
-              <a:rPr/>
-              <a:t>La relevancia de esta investigación radica en comprender cómo distintos sectores de la población argentina evalúan el funcionamiento de la democracia en un contexto marcado por crisis económicas recurrentes, inflación sostenida, incertidumbre social y creciente desafección política.</a:t>
-            </a:r>
-          </a:p>
-          <a:p>
-            <a:pPr lvl="0" indent="0" marL="0">
-              <a:buNone/>
-            </a:pPr>
-            <a:r>
-              <a:rPr/>
-              <a:t>Para ello, se analizarán datos del Latinobarómetro 2023, debido a que este periodo concentra transformaciones políticas y sociales relevantes para observar las percepciones ciudadanas sobre la democracia en Argentina.(“El ascenso de Milei en Argentina y las nuevas extremas derechas de América Latina*,” n.d.)</a:t>
-            </a:r>
-          </a:p>
-          <a:p>
-            <a:pPr lvl="0" indent="0" marL="0">
-              <a:spcBef>
-                <a:spcPts val="3000"/>
-              </a:spcBef>
-              <a:buNone/>
-            </a:pPr>
-            <a:r>
-              <a:rPr b="1"/>
-              <a:t>Pregunta de investigacion</a:t>
-            </a:r>
-          </a:p>
-          <a:p>
-            <a:pPr lvl="0" indent="0" marL="0">
-              <a:buNone/>
-            </a:pPr>
-            <a:r>
-              <a:rPr/>
-              <a:t>¿Cómo se distribuye la satisfacción con la democracia según variables sociodemográficas (edad, sexo y nivel educativo) en Argentina (2023)?</a:t>
-            </a:r>
-          </a:p>
-          <a:p>
-            <a:pPr lvl="0" indent="0" marL="0">
-              <a:spcBef>
-                <a:spcPts val="3000"/>
-              </a:spcBef>
-              <a:buNone/>
-            </a:pPr>
-            <a:r>
-              <a:rPr b="1"/>
-              <a:t>Hipotesis</a:t>
-            </a:r>
-          </a:p>
-          <a:p>
-            <a:pPr lvl="0" indent="0" marL="0">
-              <a:buNone/>
-            </a:pPr>
-            <a:r>
-              <a:rPr/>
-              <a:t>La satisfacción con la democracia se distribuye de manera diferenciada según variables sociodemográficas (edad, sexo y nivel educativo) en Argentina (2023).</a:t>
-            </a:r>
-          </a:p>
-          <a:p>
-            <a:pPr lvl="0" indent="0" marL="0">
-              <a:spcBef>
-                <a:spcPts val="3000"/>
-              </a:spcBef>
-              <a:buNone/>
-            </a:pPr>
-            <a:r>
-              <a:rPr b="1"/>
-              <a:t>Variables</a:t>
-            </a:r>
-          </a:p>
-          <a:p>
-            <a:pPr lvl="0" indent="0" marL="0">
-              <a:buNone/>
-            </a:pPr>
-            <a:r>
-              <a:rPr/>
-              <a:t>A partir de la retroalimentación recibida en la última entrega, se decidió ajustar la operacionalización de las variables con el fin de fortalecer la coherencia entre la pregunta de investigación, las variables analizadas y las técnicas estadísticas utilizadas. En consecuencia, se optó por mantener únicamente las variables que responden de manera directa al objetivo del estudio: edad, sexo y nivel educativo como variables independientes, y satisfacción con la democracia como variable dependiente.</a:t>
-            </a:r>
-          </a:p>
-          <a:p>
-            <a:pPr lvl="0" indent="0" marL="0">
-              <a:spcBef>
-                <a:spcPts val="3000"/>
-              </a:spcBef>
-              <a:buNone/>
-            </a:pPr>
-          </a:p>
-          <a:p>
-            <a:pPr lvl="0" indent="-342900" marL="342900">
-              <a:buAutoNum type="arabicPeriod"/>
-            </a:pPr>
-            <a:r>
-              <a:rPr b="1"/>
-              <a:t>Edad (</a:t>
-            </a:r>
-            <a:r>
-              <a:rPr b="1">
-                <a:latin typeface="Courier"/>
-              </a:rPr>
-              <a:t>EDAD</a:t>
-            </a:r>
-            <a:r>
-              <a:rPr b="1"/>
-              <a:t>)</a:t>
-            </a:r>
-            <a:r>
-              <a:rPr/>
-              <a:t>: Es una variable de intervalo o razón, pues es numérica y permite establecer orden y distancia entre los valores observados. Corresponde a la edad declarada por el encuestado al momento de la entrevista y se encuentra registrada directamente en la base de datos.</a:t>
-            </a:r>
-          </a:p>
-          <a:p>
-            <a:pPr lvl="0" indent="-342900" marL="342900">
-              <a:buAutoNum type="arabicPeriod"/>
-            </a:pPr>
-            <a:r>
-              <a:rPr b="1"/>
-              <a:t>sexo (</a:t>
-            </a:r>
-            <a:r>
-              <a:rPr b="1">
-                <a:latin typeface="Courier"/>
-              </a:rPr>
-              <a:t>SEXO</a:t>
-            </a:r>
-            <a:r>
-              <a:rPr b="1"/>
-              <a:t>)</a:t>
-            </a:r>
-            <a:r>
-              <a:rPr/>
-              <a:t>: Es una variable nominal dicotómica que clasifica a los encuestados según sexo. En la base de datos se encuentra codificada como </a:t>
-            </a:r>
-            <a:r>
-              <a:rPr b="1"/>
-              <a:t>1 = Hombre</a:t>
-            </a:r>
-            <a:r>
-              <a:rPr/>
-              <a:t> y </a:t>
-            </a:r>
-            <a:r>
-              <a:rPr b="1"/>
-              <a:t>2 = Mujer</a:t>
-            </a:r>
-            <a:r>
-              <a:rPr/>
-              <a:t>.</a:t>
-            </a:r>
-          </a:p>
-          <a:p>
-            <a:pPr lvl="0" indent="-342900" marL="342900">
-              <a:buAutoNum type="arabicPeriod"/>
-            </a:pPr>
-            <a:r>
-              <a:rPr b="1"/>
-              <a:t>Nivel educativo (</a:t>
-            </a:r>
-            <a:r>
-              <a:rPr b="1">
-                <a:latin typeface="Courier"/>
-              </a:rPr>
-              <a:t>S11</a:t>
-            </a:r>
-            <a:r>
-              <a:rPr b="1"/>
-              <a:t>)</a:t>
-            </a:r>
-            <a:r>
-              <a:rPr/>
-              <a:t>: Corresponde al máximo nivel educativo alcanzado por el encuestado. Se trata de una variable ordinal, ya que sus categorías representan distintos niveles de escolaridad que pueden ordenarse jerárquicamente según el grado de educación alcanzado. La codificación va desde </a:t>
-            </a:r>
-            <a:r>
-              <a:rPr b="1"/>
-              <a:t>1 = Sin estudios</a:t>
-            </a:r>
-            <a:r>
-              <a:rPr/>
-              <a:t> hasta </a:t>
-            </a:r>
-            <a:r>
-              <a:rPr b="1"/>
-              <a:t>17 = Estudios técnicos superiores completos</a:t>
-            </a:r>
-            <a:r>
-              <a:rPr/>
-              <a:t>, incluyendo distintos niveles de educación primaria, secundaria, universitaria y técnica.–&gt;</a:t>
-            </a:r>
-          </a:p>
-          <a:p>
-            <a:pPr lvl="0" indent="0" marL="0">
-              <a:spcBef>
-                <a:spcPts val="3000"/>
-              </a:spcBef>
-              <a:buNone/>
-            </a:pPr>
-            <a:r>
-              <a:rPr b="1"/>
-              <a:t>Variable dependiente</a:t>
-            </a:r>
-          </a:p>
-          <a:p>
-            <a:pPr lvl="0" indent="0" marL="0">
-              <a:buNone/>
-            </a:pPr>
-            <a:r>
-              <a:rPr b="1"/>
-              <a:t>Satisfacción con la democracia (</a:t>
-            </a:r>
-            <a:r>
-              <a:rPr b="1">
-                <a:latin typeface="Courier"/>
-              </a:rPr>
-              <a:t>P11STGBS.A</a:t>
-            </a:r>
-            <a:r>
-              <a:rPr b="1"/>
-              <a:t>)</a:t>
-            </a:r>
-            <a:r>
-              <a:rPr/>
-              <a:t>: Es una variable ordinal que mide el grado de satisfacción de los encuestados con el funcionamiento de la democracia en su país. Sus categorías se encuentran ordenadas desde niveles altos de satisfacción hasta niveles altos de insatisfacción. La variable se codifica como </a:t>
-            </a:r>
-            <a:r>
-              <a:rPr b="1"/>
-              <a:t>1 = Muy satisfecho</a:t>
-            </a:r>
-            <a:r>
-              <a:rPr/>
-              <a:t>, </a:t>
-            </a:r>
-            <a:r>
-              <a:rPr b="1"/>
-              <a:t>2 = Más bien satisfecho</a:t>
-            </a:r>
-            <a:r>
-              <a:rPr/>
-              <a:t>, </a:t>
-            </a:r>
-            <a:r>
-              <a:rPr b="1"/>
-              <a:t>3 = No muy satisfecho</a:t>
-            </a:r>
-            <a:r>
-              <a:rPr/>
-              <a:t> y </a:t>
-            </a:r>
-            <a:r>
-              <a:rPr b="1"/>
-              <a:t>4 = Nada satisfecho</a:t>
-            </a:r>
-            <a:r>
-              <a:rPr/>
-              <a:t>. En consecuencia, valores más altos indican una menor satisfacción con el funcionamiento de la democracia.</a:t>
-            </a:r>
-          </a:p>
-          <a:p>
-            <a:pPr lvl="0" indent="0" marL="0">
-              <a:spcBef>
-                <a:spcPts val="3000"/>
-              </a:spcBef>
-              <a:buNone/>
-            </a:pPr>
-            <a:r>
-              <a:rPr b="1"/>
-              <a:t>Estadística descriptiva</a:t>
-            </a:r>
-          </a:p>
-          <a:p>
-            <a:pPr lvl="0" indent="0" marL="0">
-              <a:spcBef>
-                <a:spcPts val="3000"/>
-              </a:spcBef>
-              <a:buNone/>
-            </a:pPr>
-            <a:r>
-              <a:rPr b="1"/>
-              <a:t>Variables numéricas</a:t>
-            </a:r>
+            <a:endParaRPr lang="es-CL"/>
           </a:p>
         </p:txBody>
       </p:sp>
-      <p:graphicFrame>
-        <p:nvGraphicFramePr>
-          <p:cNvPr id="6" name="Content Placeholder 5"/>
-          <p:cNvGraphicFramePr>
-            <a:graphicFrameLocks noGrp="1"/>
-          </p:cNvGraphicFramePr>
-          <p:nvPr>
-            <p:ph idx="1"/>
-          </p:nvPr>
-        </p:nvGraphicFramePr>
-        <p:xfrm>
-          <a:off x="3568700" y="203200"/>
-          <a:ext cx="5105400" cy="4381500"/>
-        </p:xfrm>
-        <a:graphic>
-          <a:graphicData uri="http://schemas.openxmlformats.org/drawingml/2006/table">
-            <a:tbl>
-              <a:tblPr firstRow="1" bandRow="1">
-                <a:tableStyleId>{5C22544A-7EE6-4342-B048-85BDC9FD1C3A}</a:tableStyleId>
-              </a:tblPr>
-              <a:tblGrid>
-                <a:gridCol w="850900"/>
-                <a:gridCol w="850900"/>
-                <a:gridCol w="850900"/>
-                <a:gridCol w="850900"/>
-                <a:gridCol w="850900"/>
-                <a:gridCol w="850900"/>
-              </a:tblGrid>
-              <a:tr h="0">
-                <a:tc>
-                  <a:txBody>
-                    <a:bodyPr/>
-                    <a:lstStyle/>
-                    <a:p>
-                      <a:pPr lvl="0" indent="0" marL="0" algn="l">
-                        <a:buNone/>
-                      </a:pPr>
-                      <a:r>
-                        <a:rPr/>
-                        <a:t>var</a:t>
-                      </a:r>
-                    </a:p>
-                  </a:txBody>
-                  <a:tcPr/>
-                </a:tc>
-                <a:tc>
-                  <a:txBody>
-                    <a:bodyPr/>
-                    <a:lstStyle/>
-                    <a:p>
-                      <a:pPr lvl="0" indent="0" marL="0" algn="r">
-                        <a:buNone/>
-                      </a:pPr>
-                      <a:r>
-                        <a:rPr/>
-                        <a:t>n</a:t>
-                      </a:r>
-                    </a:p>
-                  </a:txBody>
-                  <a:tcPr/>
-                </a:tc>
-                <a:tc>
-                  <a:txBody>
-                    <a:bodyPr/>
-                    <a:lstStyle/>
-                    <a:p>
-                      <a:pPr lvl="0" indent="0" marL="0" algn="r">
-                        <a:buNone/>
-                      </a:pPr>
-                      <a:r>
-                        <a:rPr/>
-                        <a:t>NA.prc</a:t>
-                      </a:r>
-                    </a:p>
-                  </a:txBody>
-                  <a:tcPr/>
-                </a:tc>
-                <a:tc>
-                  <a:txBody>
-                    <a:bodyPr/>
-                    <a:lstStyle/>
-                    <a:p>
-                      <a:pPr lvl="0" indent="0" marL="0" algn="r">
-                        <a:buNone/>
-                      </a:pPr>
-                      <a:r>
-                        <a:rPr/>
-                        <a:t>mean</a:t>
-                      </a:r>
-                    </a:p>
-                  </a:txBody>
-                  <a:tcPr/>
-                </a:tc>
-                <a:tc>
-                  <a:txBody>
-                    <a:bodyPr/>
-                    <a:lstStyle/>
-                    <a:p>
-                      <a:pPr lvl="0" indent="0" marL="0" algn="r">
-                        <a:buNone/>
-                      </a:pPr>
-                      <a:r>
-                        <a:rPr/>
-                        <a:t>sd</a:t>
-                      </a:r>
-                    </a:p>
-                  </a:txBody>
-                  <a:tcPr/>
-                </a:tc>
-                <a:tc>
-                  <a:txBody>
-                    <a:bodyPr/>
-                    <a:lstStyle/>
-                    <a:p>
-                      <a:pPr lvl="0" indent="0" marL="0" algn="l">
-                        <a:buNone/>
-                      </a:pPr>
-                      <a:r>
-                        <a:rPr/>
-                        <a:t>range</a:t>
-                      </a:r>
-                    </a:p>
-                  </a:txBody>
-                  <a:tcPr/>
-                </a:tc>
-              </a:tr>
-              <a:tr h="0">
-                <a:tc>
-                  <a:txBody>
-                    <a:bodyPr/>
-                    <a:lstStyle/>
-                    <a:p>
-                      <a:pPr lvl="0" indent="0" marL="0" algn="l">
-                        <a:buNone/>
-                      </a:pPr>
-                      <a:r>
-                        <a:rPr/>
-                        <a:t>edad</a:t>
-                      </a:r>
-                    </a:p>
-                  </a:txBody>
-                </a:tc>
-                <a:tc>
-                  <a:txBody>
-                    <a:bodyPr/>
-                    <a:lstStyle/>
-                    <a:p>
-                      <a:pPr lvl="0" indent="0" marL="0" algn="r">
-                        <a:buNone/>
-                      </a:pPr>
-                      <a:r>
-                        <a:rPr/>
-                        <a:t>1174</a:t>
-                      </a:r>
-                    </a:p>
-                  </a:txBody>
-                </a:tc>
-                <a:tc>
-                  <a:txBody>
-                    <a:bodyPr/>
-                    <a:lstStyle/>
-                    <a:p>
-                      <a:pPr lvl="0" indent="0" marL="0" algn="r">
-                        <a:buNone/>
-                      </a:pPr>
-                      <a:r>
-                        <a:rPr/>
-                        <a:t>0</a:t>
-                      </a:r>
-                    </a:p>
-                  </a:txBody>
-                </a:tc>
-                <a:tc>
-                  <a:txBody>
-                    <a:bodyPr/>
-                    <a:lstStyle/>
-                    <a:p>
-                      <a:pPr lvl="0" indent="0" marL="0" algn="r">
-                        <a:buNone/>
-                      </a:pPr>
-                      <a:r>
-                        <a:rPr/>
-                        <a:t>42.94378</a:t>
-                      </a:r>
-                    </a:p>
-                  </a:txBody>
-                </a:tc>
-                <a:tc>
-                  <a:txBody>
-                    <a:bodyPr/>
-                    <a:lstStyle/>
-                    <a:p>
-                      <a:pPr lvl="0" indent="0" marL="0" algn="r">
-                        <a:buNone/>
-                      </a:pPr>
-                      <a:r>
-                        <a:rPr/>
-                        <a:t>16.929277</a:t>
-                      </a:r>
-                    </a:p>
-                  </a:txBody>
-                </a:tc>
-                <a:tc>
-                  <a:txBody>
-                    <a:bodyPr/>
-                    <a:lstStyle/>
-                    <a:p>
-                      <a:pPr lvl="0" indent="0" marL="0" algn="l">
-                        <a:buNone/>
-                      </a:pPr>
-                      <a:r>
-                        <a:rPr/>
-                        <a:t>72 (18-90)</a:t>
-                      </a:r>
-                    </a:p>
-                  </a:txBody>
-                </a:tc>
-              </a:tr>
-              <a:tr h="0">
-                <a:tc>
-                  <a:txBody>
-                    <a:bodyPr/>
-                    <a:lstStyle/>
-                    <a:p>
-                      <a:pPr lvl="0" indent="0" marL="0" algn="l">
-                        <a:buNone/>
-                      </a:pPr>
-                      <a:r>
-                        <a:rPr/>
-                        <a:t>nivel_educativo</a:t>
-                      </a:r>
-                    </a:p>
-                  </a:txBody>
-                </a:tc>
-                <a:tc>
-                  <a:txBody>
-                    <a:bodyPr/>
-                    <a:lstStyle/>
-                    <a:p>
-                      <a:pPr lvl="0" indent="0" marL="0" algn="r">
-                        <a:buNone/>
-                      </a:pPr>
-                      <a:r>
-                        <a:rPr/>
-                        <a:t>1174</a:t>
-                      </a:r>
-                    </a:p>
-                  </a:txBody>
-                </a:tc>
-                <a:tc>
-                  <a:txBody>
-                    <a:bodyPr/>
-                    <a:lstStyle/>
-                    <a:p>
-                      <a:pPr lvl="0" indent="0" marL="0" algn="r">
-                        <a:buNone/>
-                      </a:pPr>
-                      <a:r>
-                        <a:rPr/>
-                        <a:t>0</a:t>
-                      </a:r>
-                    </a:p>
-                  </a:txBody>
-                </a:tc>
-                <a:tc>
-                  <a:txBody>
-                    <a:bodyPr/>
-                    <a:lstStyle/>
-                    <a:p>
-                      <a:pPr lvl="0" indent="0" marL="0" algn="r">
-                        <a:buNone/>
-                      </a:pPr>
-                      <a:r>
-                        <a:rPr/>
-                        <a:t>12.78620</a:t>
-                      </a:r>
-                    </a:p>
-                  </a:txBody>
-                </a:tc>
-                <a:tc>
-                  <a:txBody>
-                    <a:bodyPr/>
-                    <a:lstStyle/>
-                    <a:p>
-                      <a:pPr lvl="0" indent="0" marL="0" algn="r">
-                        <a:buNone/>
-                      </a:pPr>
-                      <a:r>
-                        <a:rPr/>
-                        <a:t>3.228884</a:t>
-                      </a:r>
-                    </a:p>
-                  </a:txBody>
-                </a:tc>
-                <a:tc>
-                  <a:txBody>
-                    <a:bodyPr/>
-                    <a:lstStyle/>
-                    <a:p>
-                      <a:pPr lvl="0" indent="0" marL="0" algn="l">
-                        <a:buNone/>
-                      </a:pPr>
-                      <a:r>
-                        <a:rPr/>
-                        <a:t>16 (1-17)</a:t>
-                      </a:r>
-                    </a:p>
-                  </a:txBody>
-                </a:tc>
-              </a:tr>
-            </a:tbl>
-          </a:graphicData>
-        </a:graphic>
-      </p:graphicFrame>
     </p:spTree>
   </p:cSld>
+  <p:clrMapOvr>
+    <a:masterClrMapping/>
+  </p:clrMapOvr>
 </p:sld>
 </file>
 
@@ -4424,225 +7312,112 @@
       </p:grpSpPr>
       <p:sp>
         <p:nvSpPr>
-          <p:cNvPr id="4" name="Text Placeholder 3"/>
-          <p:cNvSpPr>
-            <a:spLocks noGrp="1"/>
-          </p:cNvSpPr>
-          <p:nvPr>
-            <p:ph idx="2" sz="half" type="body"/>
-          </p:nvPr>
+          <p:cNvPr id="3" name="CuadroTexto 2">
+            <a:extLst>
+              <a:ext uri="{FF2B5EF4-FFF2-40B4-BE49-F238E27FC236}">
+                <a16:creationId xmlns:a16="http://schemas.microsoft.com/office/drawing/2014/main" id="{BE891E19-8A5F-DBF1-F5BA-410E231F1359}"/>
+              </a:ext>
+            </a:extLst>
+          </p:cNvPr>
+          <p:cNvSpPr txBox="1"/>
+          <p:nvPr/>
         </p:nvSpPr>
-        <p:spPr/>
+        <p:spPr>
+          <a:xfrm>
+            <a:off x="783773" y="849490"/>
+            <a:ext cx="7111092" cy="3662541"/>
+          </a:xfrm>
+          <a:prstGeom prst="rect">
+            <a:avLst/>
+          </a:prstGeom>
+          <a:noFill/>
+        </p:spPr>
         <p:txBody>
-          <a:bodyPr/>
+          <a:bodyPr wrap="square">
+            <a:spAutoFit/>
+          </a:bodyPr>
           <a:lstStyle/>
           <a:p>
-            <a:pPr lvl="0" indent="0" marL="0">
-              <a:buNone/>
-            </a:pPr>
-            <a:r>
-              <a:rPr/>
-              <a:t>La muestra analizada está compuesta por 1.174 casos válidos para las variables edad y nivel educativo. La edad promedio de los encuestados es de 42,9 años, con una desviación estándar de 16,9 años, lo que indica una distribución etaria relativamente amplia. Los participantes tienen edades comprendidas entre los 18 y los 90 años.</a:t>
-            </a:r>
-          </a:p>
-          <a:p>
-            <a:pPr lvl="0" indent="0" marL="0">
-              <a:buNone/>
-            </a:pPr>
-            <a:r>
-              <a:rPr/>
-              <a:t>Por su parte, el nivel educativo presenta un promedio de 12,8 puntos en la escala utilizada por Latinobarómetro, con una desviación estándar de 3,2 puntos. El rango observado abarca desde la categoría 1 (sin estudios) hasta la categoría 17 (estudios técnicos superiores completos), lo que evidencia una importante heterogeneidad en los niveles educativos presentes en la muestra.</a:t>
-            </a:r>
-          </a:p>
-          <a:p>
-            <a:pPr lvl="0" indent="0" marL="0">
+            <a:pPr marL="0" lvl="0" indent="0">
               <a:spcBef>
                 <a:spcPts val="3000"/>
               </a:spcBef>
               <a:buNone/>
             </a:pPr>
             <a:r>
-              <a:rPr b="1"/>
-              <a:t>Variables categóricas</a:t>
+              <a:rPr lang="es-ES" sz="1400" b="1" dirty="0"/>
+              <a:t>Pregunta de </a:t>
+            </a:r>
+            <a:r>
+              <a:rPr lang="es-ES" sz="1400" b="1" dirty="0" err="1"/>
+              <a:t>investigacion</a:t>
+            </a:r>
+            <a:endParaRPr lang="es-ES" sz="1400" b="1" dirty="0"/>
+          </a:p>
+          <a:p>
+            <a:pPr marL="0" lvl="0" indent="0">
+              <a:buNone/>
+            </a:pPr>
+            <a:r>
+              <a:rPr lang="es-ES" sz="1400" dirty="0"/>
+              <a:t>¿Cómo se distribuye la satisfacción con la democracia según variables sociodemográficas (edad, sexo y nivel educativo) en Argentina (2023)?</a:t>
+            </a:r>
+          </a:p>
+          <a:p>
+            <a:pPr marL="0" lvl="0" indent="0">
+              <a:spcBef>
+                <a:spcPts val="3000"/>
+              </a:spcBef>
+              <a:buNone/>
+            </a:pPr>
+            <a:r>
+              <a:rPr lang="es-ES" sz="1400" b="1" dirty="0" err="1"/>
+              <a:t>Hipotesis</a:t>
+            </a:r>
+            <a:endParaRPr lang="es-ES" sz="1400" b="1" dirty="0"/>
+          </a:p>
+          <a:p>
+            <a:pPr marL="0" lvl="0" indent="0">
+              <a:buNone/>
+            </a:pPr>
+            <a:r>
+              <a:rPr lang="es-ES" sz="1400" dirty="0"/>
+              <a:t>La satisfacción con la democracia se distribuye de manera diferenciada según variables sociodemográficas (edad, sexo y nivel educativo) en Argentina (2023).</a:t>
+            </a:r>
+          </a:p>
+          <a:p>
+            <a:pPr marL="0" lvl="0" indent="0">
+              <a:spcBef>
+                <a:spcPts val="3000"/>
+              </a:spcBef>
+              <a:buNone/>
+            </a:pPr>
+            <a:r>
+              <a:rPr lang="es-ES" sz="1400" b="1" dirty="0"/>
+              <a:t>Variables</a:t>
+            </a:r>
+          </a:p>
+          <a:p>
+            <a:pPr marL="0" lvl="0" indent="0">
+              <a:buNone/>
+            </a:pPr>
+            <a:r>
+              <a:rPr lang="es-ES" sz="1400" dirty="0"/>
+              <a:t>A partir de la retroalimentación recibida en la última entrega, se decidió ajustar la operacionalización de las variables con el fin de fortalecer la coherencia entre la pregunta de investigación, las variables analizadas y las técnicas estadísticas utilizadas. En consecuencia, se optó por mantener únicamente las variables que responden de manera directa al objetivo del estudio: edad, sexo y nivel educativo como variables independientes, y satisfacción con la democracia como variable dependiente.</a:t>
             </a:r>
           </a:p>
         </p:txBody>
       </p:sp>
-      <p:graphicFrame>
-        <p:nvGraphicFramePr>
-          <p:cNvPr id="6" name="Content Placeholder 5"/>
-          <p:cNvGraphicFramePr>
-            <a:graphicFrameLocks noGrp="1"/>
-          </p:cNvGraphicFramePr>
-          <p:nvPr>
-            <p:ph idx="1"/>
-          </p:nvPr>
-        </p:nvGraphicFramePr>
-        <p:xfrm>
-          <a:off x="3568700" y="203200"/>
-          <a:ext cx="5105400" cy="4381500"/>
-        </p:xfrm>
-        <a:graphic>
-          <a:graphicData uri="http://schemas.openxmlformats.org/drawingml/2006/table">
-            <a:tbl>
-              <a:tblPr firstRow="1" bandRow="1">
-                <a:tableStyleId>{5C22544A-7EE6-4342-B048-85BDC9FD1C3A}</a:tableStyleId>
-              </a:tblPr>
-              <a:tblGrid>
-                <a:gridCol w="1701800"/>
-                <a:gridCol w="1701800"/>
-                <a:gridCol w="1701800"/>
-              </a:tblGrid>
-              <a:tr h="0">
-                <a:tc>
-                  <a:txBody>
-                    <a:bodyPr/>
-                    <a:lstStyle/>
-                    <a:p>
-                      <a:pPr lvl="0" indent="0" marL="0" algn="l">
-                        <a:buNone/>
-                      </a:pPr>
-                      <a:r>
-                        <a:rPr/>
-                        <a:t>sexo</a:t>
-                      </a:r>
-                    </a:p>
-                  </a:txBody>
-                  <a:tcPr/>
-                </a:tc>
-                <a:tc>
-                  <a:txBody>
-                    <a:bodyPr/>
-                    <a:lstStyle/>
-                    <a:p>
-                      <a:pPr lvl="0" indent="0" marL="0" algn="r">
-                        <a:buNone/>
-                      </a:pPr>
-                      <a:r>
-                        <a:rPr/>
-                        <a:t>n</a:t>
-                      </a:r>
-                    </a:p>
-                  </a:txBody>
-                  <a:tcPr/>
-                </a:tc>
-                <a:tc>
-                  <a:txBody>
-                    <a:bodyPr/>
-                    <a:lstStyle/>
-                    <a:p>
-                      <a:pPr lvl="0" indent="0" marL="0" algn="r">
-                        <a:buNone/>
-                      </a:pPr>
-                      <a:r>
-                        <a:rPr/>
-                        <a:t>porcentaje</a:t>
-                      </a:r>
-                    </a:p>
-                  </a:txBody>
-                  <a:tcPr/>
-                </a:tc>
-              </a:tr>
-              <a:tr h="0">
-                <a:tc>
-                  <a:txBody>
-                    <a:bodyPr/>
-                    <a:lstStyle/>
-                    <a:p>
-                      <a:pPr lvl="0" indent="0" marL="0" algn="l">
-                        <a:buNone/>
-                      </a:pPr>
-                      <a:r>
-                        <a:rPr/>
-                        <a:t>Hombre</a:t>
-                      </a:r>
-                    </a:p>
-                  </a:txBody>
-                </a:tc>
-                <a:tc>
-                  <a:txBody>
-                    <a:bodyPr/>
-                    <a:lstStyle/>
-                    <a:p>
-                      <a:pPr lvl="0" indent="0" marL="0" algn="r">
-                        <a:buNone/>
-                      </a:pPr>
-                      <a:r>
-                        <a:rPr/>
-                        <a:t>566</a:t>
-                      </a:r>
-                    </a:p>
-                  </a:txBody>
-                </a:tc>
-                <a:tc>
-                  <a:txBody>
-                    <a:bodyPr/>
-                    <a:lstStyle/>
-                    <a:p>
-                      <a:pPr lvl="0" indent="0" marL="0" algn="r">
-                        <a:buNone/>
-                      </a:pPr>
-                      <a:r>
-                        <a:rPr/>
-                        <a:t>48.2</a:t>
-                      </a:r>
-                    </a:p>
-                  </a:txBody>
-                </a:tc>
-              </a:tr>
-              <a:tr h="0">
-                <a:tc>
-                  <a:txBody>
-                    <a:bodyPr/>
-                    <a:lstStyle/>
-                    <a:p>
-                      <a:pPr lvl="0" indent="0" marL="0" algn="l">
-                        <a:buNone/>
-                      </a:pPr>
-                      <a:r>
-                        <a:rPr/>
-                        <a:t>Mujer</a:t>
-                      </a:r>
-                    </a:p>
-                  </a:txBody>
-                </a:tc>
-                <a:tc>
-                  <a:txBody>
-                    <a:bodyPr/>
-                    <a:lstStyle/>
-                    <a:p>
-                      <a:pPr lvl="0" indent="0" marL="0" algn="r">
-                        <a:buNone/>
-                      </a:pPr>
-                      <a:r>
-                        <a:rPr/>
-                        <a:t>608</a:t>
-                      </a:r>
-                    </a:p>
-                  </a:txBody>
-                </a:tc>
-                <a:tc>
-                  <a:txBody>
-                    <a:bodyPr/>
-                    <a:lstStyle/>
-                    <a:p>
-                      <a:pPr lvl="0" indent="0" marL="0" algn="r">
-                        <a:buNone/>
-                      </a:pPr>
-                      <a:r>
-                        <a:rPr/>
-                        <a:t>51.8</a:t>
-                      </a:r>
-                    </a:p>
-                  </a:txBody>
-                </a:tc>
-              </a:tr>
-            </a:tbl>
-          </a:graphicData>
-        </a:graphic>
-      </p:graphicFrame>
     </p:spTree>
+    <p:extLst>
+      <p:ext uri="{BB962C8B-B14F-4D97-AF65-F5344CB8AC3E}">
+        <p14:creationId xmlns:p14="http://schemas.microsoft.com/office/powerpoint/2010/main" val="3033524622"/>
+      </p:ext>
+    </p:extLst>
   </p:cSld>
+  <p:clrMapOvr>
+    <a:masterClrMapping/>
+  </p:clrMapOvr>
 </p:sld>
 </file>
 
@@ -4663,56 +7438,29 @@
           <a:chExt cx="0" cy="0"/>
         </a:xfrm>
       </p:grpSpPr>
-      <p:sp>
-        <p:nvSpPr>
-          <p:cNvPr id="4" name="Text Placeholder 3"/>
-          <p:cNvSpPr>
-            <a:spLocks noGrp="1"/>
-          </p:cNvSpPr>
-          <p:nvPr>
-            <p:ph idx="2" sz="half" type="body"/>
-          </p:nvPr>
-        </p:nvSpPr>
-        <p:spPr/>
-        <p:txBody>
-          <a:bodyPr/>
-          <a:lstStyle/>
-          <a:p>
-            <a:pPr lvl="0" indent="0" marL="0">
-              <a:buNone/>
-            </a:pPr>
-            <a:r>
-              <a:rPr/>
-              <a:t>La muestra presenta una distribución equilibrada por sexo. Del total de casos analizados, el 51,8% corresponde a mujeres y el 48,2% a hombres. Esta distribución reduce el riesgo de sesgos derivados de una sobrerrepresentación de alguno de los grupos y permite realizar comparaciones entre ambos sexos en condiciones relativamente equivalentes.</a:t>
-            </a:r>
-          </a:p>
-          <a:p>
-            <a:pPr lvl="0" indent="0" marL="0">
-              <a:spcBef>
-                <a:spcPts val="3000"/>
-              </a:spcBef>
-              <a:buNone/>
-            </a:pPr>
-            <a:r>
-              <a:rPr b="1"/>
-              <a:t>Frecuencia satisfacción con la democracia</a:t>
-            </a:r>
-          </a:p>
-        </p:txBody>
-      </p:sp>
       <p:graphicFrame>
         <p:nvGraphicFramePr>
-          <p:cNvPr id="6" name="Content Placeholder 5"/>
+          <p:cNvPr id="4" name="Content Placeholder 5">
+            <a:extLst>
+              <a:ext uri="{FF2B5EF4-FFF2-40B4-BE49-F238E27FC236}">
+                <a16:creationId xmlns:a16="http://schemas.microsoft.com/office/drawing/2014/main" id="{1B1CCC1E-3D90-070D-D965-C846E49E7330}"/>
+              </a:ext>
+            </a:extLst>
+          </p:cNvPr>
           <p:cNvGraphicFramePr>
-            <a:graphicFrameLocks noGrp="1"/>
+            <a:graphicFrameLocks/>
           </p:cNvGraphicFramePr>
           <p:nvPr>
-            <p:ph idx="1"/>
+            <p:extLst>
+              <p:ext uri="{D42A27DB-BD31-4B8C-83A1-F6EECF244321}">
+                <p14:modId xmlns:p14="http://schemas.microsoft.com/office/powerpoint/2010/main" val="1572522384"/>
+              </p:ext>
+            </p:extLst>
           </p:nvPr>
         </p:nvGraphicFramePr>
         <p:xfrm>
-          <a:off x="3568700" y="203200"/>
-          <a:ext cx="5105400" cy="4381500"/>
+          <a:off x="1216479" y="1061358"/>
+          <a:ext cx="6711042" cy="2179864"/>
         </p:xfrm>
         <a:graphic>
           <a:graphicData uri="http://schemas.openxmlformats.org/drawingml/2006/table">
@@ -4721,22 +7469,60 @@
                 <a:tableStyleId>{5C22544A-7EE6-4342-B048-85BDC9FD1C3A}</a:tableStyleId>
               </a:tblPr>
               <a:tblGrid>
-                <a:gridCol w="1701800"/>
-                <a:gridCol w="1701800"/>
-                <a:gridCol w="1701800"/>
+                <a:gridCol w="1118507">
+                  <a:extLst>
+                    <a:ext uri="{9D8B030D-6E8A-4147-A177-3AD203B41FA5}">
+                      <a16:colId xmlns:a16="http://schemas.microsoft.com/office/drawing/2014/main" val="20000"/>
+                    </a:ext>
+                  </a:extLst>
+                </a:gridCol>
+                <a:gridCol w="1118507">
+                  <a:extLst>
+                    <a:ext uri="{9D8B030D-6E8A-4147-A177-3AD203B41FA5}">
+                      <a16:colId xmlns:a16="http://schemas.microsoft.com/office/drawing/2014/main" val="20001"/>
+                    </a:ext>
+                  </a:extLst>
+                </a:gridCol>
+                <a:gridCol w="1118507">
+                  <a:extLst>
+                    <a:ext uri="{9D8B030D-6E8A-4147-A177-3AD203B41FA5}">
+                      <a16:colId xmlns:a16="http://schemas.microsoft.com/office/drawing/2014/main" val="20002"/>
+                    </a:ext>
+                  </a:extLst>
+                </a:gridCol>
+                <a:gridCol w="1118507">
+                  <a:extLst>
+                    <a:ext uri="{9D8B030D-6E8A-4147-A177-3AD203B41FA5}">
+                      <a16:colId xmlns:a16="http://schemas.microsoft.com/office/drawing/2014/main" val="20003"/>
+                    </a:ext>
+                  </a:extLst>
+                </a:gridCol>
+                <a:gridCol w="1118507">
+                  <a:extLst>
+                    <a:ext uri="{9D8B030D-6E8A-4147-A177-3AD203B41FA5}">
+                      <a16:colId xmlns:a16="http://schemas.microsoft.com/office/drawing/2014/main" val="20004"/>
+                    </a:ext>
+                  </a:extLst>
+                </a:gridCol>
+                <a:gridCol w="1118507">
+                  <a:extLst>
+                    <a:ext uri="{9D8B030D-6E8A-4147-A177-3AD203B41FA5}">
+                      <a16:colId xmlns:a16="http://schemas.microsoft.com/office/drawing/2014/main" val="20005"/>
+                    </a:ext>
+                  </a:extLst>
+                </a:gridCol>
               </a:tblGrid>
-              <a:tr h="0">
+              <a:tr h="497162">
                 <a:tc>
                   <a:txBody>
                     <a:bodyPr/>
                     <a:lstStyle/>
                     <a:p>
-                      <a:pPr lvl="0" indent="0" marL="0" algn="l">
+                      <a:pPr marL="0" lvl="0" indent="0" algn="l">
                         <a:buNone/>
                       </a:pPr>
                       <a:r>
-                        <a:rPr/>
-                        <a:t>satisfaccion_democracia</a:t>
+                        <a:t>var</a:t>
                       </a:r>
                     </a:p>
                   </a:txBody>
@@ -4747,11 +7533,10 @@
                     <a:bodyPr/>
                     <a:lstStyle/>
                     <a:p>
-                      <a:pPr lvl="0" indent="0" marL="0" algn="r">
+                      <a:pPr marL="0" lvl="0" indent="0" algn="r">
                         <a:buNone/>
                       </a:pPr>
                       <a:r>
-                        <a:rPr/>
                         <a:t>n</a:t>
                       </a:r>
                     </a:p>
@@ -4763,212 +7548,276 @@
                     <a:bodyPr/>
                     <a:lstStyle/>
                     <a:p>
-                      <a:pPr lvl="0" indent="0" marL="0" algn="r">
+                      <a:pPr marL="0" lvl="0" indent="0" algn="r">
                         <a:buNone/>
                       </a:pPr>
                       <a:r>
-                        <a:rPr/>
-                        <a:t>porcentaje</a:t>
+                        <a:t>NA.prc</a:t>
                       </a:r>
                     </a:p>
                   </a:txBody>
                   <a:tcPr/>
-                </a:tc>
-              </a:tr>
-              <a:tr h="0">
-                <a:tc>
-                  <a:txBody>
-                    <a:bodyPr/>
-                    <a:lstStyle/>
-                    <a:p>
-                      <a:pPr lvl="0" indent="0" marL="0" algn="l">
-                        <a:buNone/>
-                      </a:pPr>
-                      <a:r>
-                        <a:rPr/>
-                        <a:t>Muy satisfecho</a:t>
-                      </a:r>
-                    </a:p>
-                  </a:txBody>
                 </a:tc>
                 <a:tc>
                   <a:txBody>
                     <a:bodyPr/>
                     <a:lstStyle/>
                     <a:p>
-                      <a:pPr lvl="0" indent="0" marL="0" algn="r">
+                      <a:pPr marL="0" lvl="0" indent="0" algn="r">
                         <a:buNone/>
                       </a:pPr>
                       <a:r>
-                        <a:rPr/>
-                        <a:t>94</a:t>
+                        <a:t>mean</a:t>
                       </a:r>
                     </a:p>
                   </a:txBody>
+                  <a:tcPr/>
                 </a:tc>
                 <a:tc>
                   <a:txBody>
                     <a:bodyPr/>
                     <a:lstStyle/>
                     <a:p>
-                      <a:pPr lvl="0" indent="0" marL="0" algn="r">
+                      <a:pPr marL="0" lvl="0" indent="0" algn="r">
                         <a:buNone/>
                       </a:pPr>
                       <a:r>
-                        <a:rPr/>
-                        <a:t>8.0</a:t>
+                        <a:t>sd</a:t>
                       </a:r>
                     </a:p>
                   </a:txBody>
-                </a:tc>
-              </a:tr>
-              <a:tr h="0">
-                <a:tc>
-                  <a:txBody>
-                    <a:bodyPr/>
-                    <a:lstStyle/>
-                    <a:p>
-                      <a:pPr lvl="0" indent="0" marL="0" algn="l">
-                        <a:buNone/>
-                      </a:pPr>
-                      <a:r>
-                        <a:rPr/>
-                        <a:t>Más bien satisfecho</a:t>
-                      </a:r>
-                    </a:p>
-                  </a:txBody>
+                  <a:tcPr/>
                 </a:tc>
                 <a:tc>
                   <a:txBody>
                     <a:bodyPr/>
                     <a:lstStyle/>
                     <a:p>
-                      <a:pPr lvl="0" indent="0" marL="0" algn="r">
+                      <a:pPr marL="0" lvl="0" indent="0" algn="l">
                         <a:buNone/>
                       </a:pPr>
                       <a:r>
-                        <a:rPr/>
-                        <a:t>353</a:t>
+                        <a:t>range</a:t>
                       </a:r>
                     </a:p>
                   </a:txBody>
+                  <a:tcPr/>
+                </a:tc>
+                <a:extLst>
+                  <a:ext uri="{0D108BD9-81ED-4DB2-BD59-A6C34878D82A}">
+                    <a16:rowId xmlns:a16="http://schemas.microsoft.com/office/drawing/2014/main" val="10000"/>
+                  </a:ext>
+                </a:extLst>
+              </a:tr>
+              <a:tr h="841351">
+                <a:tc>
+                  <a:txBody>
+                    <a:bodyPr/>
+                    <a:lstStyle/>
+                    <a:p>
+                      <a:pPr marL="0" lvl="0" indent="0" algn="l">
+                        <a:buNone/>
+                      </a:pPr>
+                      <a:r>
+                        <a:t>edad</a:t>
+                      </a:r>
+                    </a:p>
+                  </a:txBody>
+                  <a:tcPr/>
                 </a:tc>
                 <a:tc>
                   <a:txBody>
                     <a:bodyPr/>
                     <a:lstStyle/>
                     <a:p>
-                      <a:pPr lvl="0" indent="0" marL="0" algn="r">
+                      <a:pPr marL="0" lvl="0" indent="0" algn="r">
                         <a:buNone/>
                       </a:pPr>
                       <a:r>
-                        <a:rPr/>
-                        <a:t>30.1</a:t>
+                        <a:t>1174</a:t>
                       </a:r>
                     </a:p>
                   </a:txBody>
-                </a:tc>
-              </a:tr>
-              <a:tr h="0">
-                <a:tc>
-                  <a:txBody>
-                    <a:bodyPr/>
-                    <a:lstStyle/>
-                    <a:p>
-                      <a:pPr lvl="0" indent="0" marL="0" algn="l">
-                        <a:buNone/>
-                      </a:pPr>
-                      <a:r>
-                        <a:rPr/>
-                        <a:t>Nada satisfecho</a:t>
-                      </a:r>
-                    </a:p>
-                  </a:txBody>
+                  <a:tcPr/>
                 </a:tc>
                 <a:tc>
                   <a:txBody>
                     <a:bodyPr/>
                     <a:lstStyle/>
                     <a:p>
-                      <a:pPr lvl="0" indent="0" marL="0" algn="r">
+                      <a:pPr marL="0" lvl="0" indent="0" algn="r">
                         <a:buNone/>
                       </a:pPr>
                       <a:r>
-                        <a:rPr/>
-                        <a:t>230</a:t>
+                        <a:t>0</a:t>
                       </a:r>
                     </a:p>
                   </a:txBody>
+                  <a:tcPr/>
                 </a:tc>
                 <a:tc>
                   <a:txBody>
                     <a:bodyPr/>
                     <a:lstStyle/>
                     <a:p>
-                      <a:pPr lvl="0" indent="0" marL="0" algn="r">
+                      <a:pPr marL="0" lvl="0" indent="0" algn="r">
                         <a:buNone/>
                       </a:pPr>
                       <a:r>
-                        <a:rPr/>
-                        <a:t>19.6</a:t>
+                        <a:t>42.94378</a:t>
                       </a:r>
                     </a:p>
                   </a:txBody>
-                </a:tc>
-              </a:tr>
-              <a:tr h="0">
-                <a:tc>
-                  <a:txBody>
-                    <a:bodyPr/>
-                    <a:lstStyle/>
-                    <a:p>
-                      <a:pPr lvl="0" indent="0" marL="0" algn="l">
-                        <a:buNone/>
-                      </a:pPr>
-                      <a:r>
-                        <a:rPr/>
-                        <a:t>No muy satisfecho</a:t>
-                      </a:r>
-                    </a:p>
-                  </a:txBody>
+                  <a:tcPr/>
                 </a:tc>
                 <a:tc>
                   <a:txBody>
                     <a:bodyPr/>
                     <a:lstStyle/>
                     <a:p>
-                      <a:pPr lvl="0" indent="0" marL="0" algn="r">
+                      <a:pPr marL="0" lvl="0" indent="0" algn="r">
                         <a:buNone/>
                       </a:pPr>
                       <a:r>
-                        <a:rPr/>
-                        <a:t>497</a:t>
+                        <a:t>16.929277</a:t>
                       </a:r>
                     </a:p>
                   </a:txBody>
+                  <a:tcPr/>
                 </a:tc>
                 <a:tc>
                   <a:txBody>
                     <a:bodyPr/>
                     <a:lstStyle/>
                     <a:p>
-                      <a:pPr lvl="0" indent="0" marL="0" algn="r">
+                      <a:pPr marL="0" lvl="0" indent="0" algn="l">
                         <a:buNone/>
                       </a:pPr>
                       <a:r>
-                        <a:rPr/>
-                        <a:t>42.3</a:t>
+                        <a:t>72 (18-90)</a:t>
                       </a:r>
                     </a:p>
                   </a:txBody>
+                  <a:tcPr/>
                 </a:tc>
+                <a:extLst>
+                  <a:ext uri="{0D108BD9-81ED-4DB2-BD59-A6C34878D82A}">
+                    <a16:rowId xmlns:a16="http://schemas.microsoft.com/office/drawing/2014/main" val="10001"/>
+                  </a:ext>
+                </a:extLst>
+              </a:tr>
+              <a:tr h="841351">
+                <a:tc>
+                  <a:txBody>
+                    <a:bodyPr/>
+                    <a:lstStyle/>
+                    <a:p>
+                      <a:pPr marL="0" lvl="0" indent="0" algn="l">
+                        <a:buNone/>
+                      </a:pPr>
+                      <a:r>
+                        <a:t>nivel_educativo</a:t>
+                      </a:r>
+                    </a:p>
+                  </a:txBody>
+                  <a:tcPr/>
+                </a:tc>
+                <a:tc>
+                  <a:txBody>
+                    <a:bodyPr/>
+                    <a:lstStyle/>
+                    <a:p>
+                      <a:pPr marL="0" lvl="0" indent="0" algn="r">
+                        <a:buNone/>
+                      </a:pPr>
+                      <a:r>
+                        <a:t>1174</a:t>
+                      </a:r>
+                    </a:p>
+                  </a:txBody>
+                  <a:tcPr/>
+                </a:tc>
+                <a:tc>
+                  <a:txBody>
+                    <a:bodyPr/>
+                    <a:lstStyle/>
+                    <a:p>
+                      <a:pPr marL="0" lvl="0" indent="0" algn="r">
+                        <a:buNone/>
+                      </a:pPr>
+                      <a:r>
+                        <a:t>0</a:t>
+                      </a:r>
+                    </a:p>
+                  </a:txBody>
+                  <a:tcPr/>
+                </a:tc>
+                <a:tc>
+                  <a:txBody>
+                    <a:bodyPr/>
+                    <a:lstStyle/>
+                    <a:p>
+                      <a:pPr marL="0" lvl="0" indent="0" algn="r">
+                        <a:buNone/>
+                      </a:pPr>
+                      <a:r>
+                        <a:t>12.78620</a:t>
+                      </a:r>
+                    </a:p>
+                  </a:txBody>
+                  <a:tcPr/>
+                </a:tc>
+                <a:tc>
+                  <a:txBody>
+                    <a:bodyPr/>
+                    <a:lstStyle/>
+                    <a:p>
+                      <a:pPr marL="0" lvl="0" indent="0" algn="r">
+                        <a:buNone/>
+                      </a:pPr>
+                      <a:r>
+                        <a:t>3.228884</a:t>
+                      </a:r>
+                    </a:p>
+                  </a:txBody>
+                  <a:tcPr/>
+                </a:tc>
+                <a:tc>
+                  <a:txBody>
+                    <a:bodyPr/>
+                    <a:lstStyle/>
+                    <a:p>
+                      <a:pPr marL="0" lvl="0" indent="0" algn="l">
+                        <a:buNone/>
+                      </a:pPr>
+                      <a:r>
+                        <a:rPr dirty="0"/>
+                        <a:t>16 (1-17)</a:t>
+                      </a:r>
+                    </a:p>
+                  </a:txBody>
+                  <a:tcPr/>
+                </a:tc>
+                <a:extLst>
+                  <a:ext uri="{0D108BD9-81ED-4DB2-BD59-A6C34878D82A}">
+                    <a16:rowId xmlns:a16="http://schemas.microsoft.com/office/drawing/2014/main" val="10002"/>
+                  </a:ext>
+                </a:extLst>
               </a:tr>
             </a:tbl>
           </a:graphicData>
         </a:graphic>
       </p:graphicFrame>
     </p:spTree>
+    <p:extLst>
+      <p:ext uri="{BB962C8B-B14F-4D97-AF65-F5344CB8AC3E}">
+        <p14:creationId xmlns:p14="http://schemas.microsoft.com/office/powerpoint/2010/main" val="3364651352"/>
+      </p:ext>
+    </p:extLst>
   </p:cSld>
+  <p:clrMapOvr>
+    <a:masterClrMapping/>
+  </p:clrMapOvr>
 </p:sld>
 </file>
 
@@ -4996,7 +7845,1492 @@
             <a:spLocks noGrp="1"/>
           </p:cNvSpPr>
           <p:nvPr>
-            <p:ph idx="2" sz="half" type="body"/>
+            <p:ph type="body" sz="half" idx="2"/>
+          </p:nvPr>
+        </p:nvSpPr>
+        <p:spPr>
+          <a:xfrm>
+            <a:off x="587828" y="1592036"/>
+            <a:ext cx="8417379" cy="2947307"/>
+          </a:xfrm>
+        </p:spPr>
+        <p:txBody>
+          <a:bodyPr>
+            <a:normAutofit/>
+          </a:bodyPr>
+          <a:lstStyle/>
+          <a:p>
+            <a:pPr marL="0" lvl="0" indent="0">
+              <a:buNone/>
+            </a:pPr>
+            <a:r>
+              <a:rPr sz="1400" dirty="0"/>
+              <a:t>La </a:t>
+            </a:r>
+            <a:r>
+              <a:rPr sz="1400" dirty="0" err="1"/>
+              <a:t>muestra</a:t>
+            </a:r>
+            <a:r>
+              <a:rPr sz="1400" dirty="0"/>
+              <a:t> </a:t>
+            </a:r>
+            <a:r>
+              <a:rPr sz="1400" dirty="0" err="1"/>
+              <a:t>analizada</a:t>
+            </a:r>
+            <a:r>
+              <a:rPr sz="1400" dirty="0"/>
+              <a:t> </a:t>
+            </a:r>
+            <a:r>
+              <a:rPr sz="1400" dirty="0" err="1"/>
+              <a:t>está</a:t>
+            </a:r>
+            <a:r>
+              <a:rPr sz="1400" dirty="0"/>
+              <a:t> </a:t>
+            </a:r>
+            <a:r>
+              <a:rPr sz="1400" dirty="0" err="1"/>
+              <a:t>compuesta</a:t>
+            </a:r>
+            <a:r>
+              <a:rPr sz="1400" dirty="0"/>
+              <a:t> </a:t>
+            </a:r>
+            <a:r>
+              <a:rPr sz="1400" dirty="0" err="1"/>
+              <a:t>por</a:t>
+            </a:r>
+            <a:r>
+              <a:rPr sz="1400" dirty="0"/>
+              <a:t> 1.174 </a:t>
+            </a:r>
+            <a:r>
+              <a:rPr sz="1400" dirty="0" err="1"/>
+              <a:t>casos</a:t>
+            </a:r>
+            <a:r>
+              <a:rPr sz="1400" dirty="0"/>
+              <a:t> </a:t>
+            </a:r>
+            <a:r>
+              <a:rPr sz="1400" dirty="0" err="1"/>
+              <a:t>válidos</a:t>
+            </a:r>
+            <a:r>
+              <a:rPr sz="1400" dirty="0"/>
+              <a:t> para las variables </a:t>
+            </a:r>
+            <a:r>
+              <a:rPr sz="1400" dirty="0" err="1"/>
+              <a:t>edad</a:t>
+            </a:r>
+            <a:r>
+              <a:rPr sz="1400" dirty="0"/>
+              <a:t> y </a:t>
+            </a:r>
+            <a:r>
+              <a:rPr sz="1400" dirty="0" err="1"/>
+              <a:t>nivel</a:t>
+            </a:r>
+            <a:r>
+              <a:rPr sz="1400" dirty="0"/>
+              <a:t> </a:t>
+            </a:r>
+            <a:r>
+              <a:rPr sz="1400" dirty="0" err="1"/>
+              <a:t>educativo</a:t>
+            </a:r>
+            <a:r>
+              <a:rPr sz="1400" dirty="0"/>
+              <a:t>. La </a:t>
+            </a:r>
+            <a:r>
+              <a:rPr sz="1400" dirty="0" err="1"/>
+              <a:t>edad</a:t>
+            </a:r>
+            <a:r>
+              <a:rPr sz="1400" dirty="0"/>
+              <a:t> </a:t>
+            </a:r>
+            <a:r>
+              <a:rPr sz="1400" dirty="0" err="1"/>
+              <a:t>promedio</a:t>
+            </a:r>
+            <a:r>
+              <a:rPr sz="1400" dirty="0"/>
+              <a:t> de </a:t>
+            </a:r>
+            <a:r>
+              <a:rPr sz="1400" dirty="0" err="1"/>
+              <a:t>los</a:t>
+            </a:r>
+            <a:r>
+              <a:rPr sz="1400" dirty="0"/>
+              <a:t> </a:t>
+            </a:r>
+            <a:r>
+              <a:rPr sz="1400" dirty="0" err="1"/>
+              <a:t>encuestados</a:t>
+            </a:r>
+            <a:r>
+              <a:rPr sz="1400" dirty="0"/>
+              <a:t> es de 42,9 </a:t>
+            </a:r>
+            <a:r>
+              <a:rPr sz="1400" dirty="0" err="1"/>
+              <a:t>años</a:t>
+            </a:r>
+            <a:r>
+              <a:rPr sz="1400" dirty="0"/>
+              <a:t>, con </a:t>
+            </a:r>
+            <a:r>
+              <a:rPr sz="1400" dirty="0" err="1"/>
+              <a:t>una</a:t>
+            </a:r>
+            <a:r>
+              <a:rPr sz="1400" dirty="0"/>
+              <a:t> </a:t>
+            </a:r>
+            <a:r>
+              <a:rPr sz="1400" dirty="0" err="1"/>
+              <a:t>desviación</a:t>
+            </a:r>
+            <a:r>
+              <a:rPr sz="1400" dirty="0"/>
+              <a:t> </a:t>
+            </a:r>
+            <a:r>
+              <a:rPr sz="1400" dirty="0" err="1"/>
+              <a:t>estándar</a:t>
+            </a:r>
+            <a:r>
+              <a:rPr sz="1400" dirty="0"/>
+              <a:t> de 16,9 </a:t>
+            </a:r>
+            <a:r>
+              <a:rPr sz="1400" dirty="0" err="1"/>
+              <a:t>años</a:t>
+            </a:r>
+            <a:r>
+              <a:rPr sz="1400" dirty="0"/>
+              <a:t>, lo </a:t>
+            </a:r>
+            <a:r>
+              <a:rPr sz="1400" dirty="0" err="1"/>
+              <a:t>que</a:t>
+            </a:r>
+            <a:r>
+              <a:rPr sz="1400" dirty="0"/>
+              <a:t> indica </a:t>
+            </a:r>
+            <a:r>
+              <a:rPr sz="1400" dirty="0" err="1"/>
+              <a:t>una</a:t>
+            </a:r>
+            <a:r>
+              <a:rPr sz="1400" dirty="0"/>
+              <a:t> </a:t>
+            </a:r>
+            <a:r>
+              <a:rPr sz="1400" dirty="0" err="1"/>
+              <a:t>distribución</a:t>
+            </a:r>
+            <a:r>
+              <a:rPr sz="1400" dirty="0"/>
+              <a:t> </a:t>
+            </a:r>
+            <a:r>
+              <a:rPr sz="1400" dirty="0" err="1"/>
+              <a:t>etaria</a:t>
+            </a:r>
+            <a:r>
+              <a:rPr sz="1400" dirty="0"/>
+              <a:t> </a:t>
+            </a:r>
+            <a:r>
+              <a:rPr sz="1400" dirty="0" err="1"/>
+              <a:t>relativamente</a:t>
+            </a:r>
+            <a:r>
+              <a:rPr sz="1400" dirty="0"/>
+              <a:t> </a:t>
+            </a:r>
+            <a:r>
+              <a:rPr sz="1400" dirty="0" err="1"/>
+              <a:t>amplia</a:t>
+            </a:r>
+            <a:r>
+              <a:rPr sz="1400" dirty="0"/>
+              <a:t>. Los </a:t>
+            </a:r>
+            <a:r>
+              <a:rPr sz="1400" dirty="0" err="1"/>
+              <a:t>participantes</a:t>
+            </a:r>
+            <a:r>
+              <a:rPr sz="1400" dirty="0"/>
+              <a:t> </a:t>
+            </a:r>
+            <a:r>
+              <a:rPr sz="1400" dirty="0" err="1"/>
+              <a:t>tienen</a:t>
+            </a:r>
+            <a:r>
+              <a:rPr sz="1400" dirty="0"/>
+              <a:t> </a:t>
+            </a:r>
+            <a:r>
+              <a:rPr sz="1400" dirty="0" err="1"/>
+              <a:t>edades</a:t>
+            </a:r>
+            <a:r>
+              <a:rPr sz="1400" dirty="0"/>
+              <a:t> </a:t>
+            </a:r>
+            <a:r>
+              <a:rPr sz="1400" dirty="0" err="1"/>
+              <a:t>comprendidas</a:t>
+            </a:r>
+            <a:r>
+              <a:rPr sz="1400" dirty="0"/>
+              <a:t> entre </a:t>
+            </a:r>
+            <a:r>
+              <a:rPr sz="1400" dirty="0" err="1"/>
+              <a:t>los</a:t>
+            </a:r>
+            <a:r>
+              <a:rPr sz="1400" dirty="0"/>
+              <a:t> 18 y </a:t>
+            </a:r>
+            <a:r>
+              <a:rPr sz="1400" dirty="0" err="1"/>
+              <a:t>los</a:t>
+            </a:r>
+            <a:r>
+              <a:rPr sz="1400" dirty="0"/>
+              <a:t> 90 </a:t>
+            </a:r>
+            <a:r>
+              <a:rPr sz="1400" dirty="0" err="1"/>
+              <a:t>años</a:t>
+            </a:r>
+            <a:r>
+              <a:rPr sz="1400" dirty="0"/>
+              <a:t>.</a:t>
+            </a:r>
+          </a:p>
+          <a:p>
+            <a:pPr marL="0" lvl="0" indent="0">
+              <a:buNone/>
+            </a:pPr>
+            <a:r>
+              <a:rPr sz="1400" dirty="0"/>
+              <a:t>Por </a:t>
+            </a:r>
+            <a:r>
+              <a:rPr sz="1400" dirty="0" err="1"/>
+              <a:t>su</a:t>
+            </a:r>
+            <a:r>
+              <a:rPr sz="1400" dirty="0"/>
+              <a:t> </a:t>
+            </a:r>
+            <a:r>
+              <a:rPr sz="1400" dirty="0" err="1"/>
+              <a:t>parte</a:t>
+            </a:r>
+            <a:r>
+              <a:rPr sz="1400" dirty="0"/>
+              <a:t>, </a:t>
+            </a:r>
+            <a:r>
+              <a:rPr sz="1400" dirty="0" err="1"/>
+              <a:t>el</a:t>
+            </a:r>
+            <a:r>
+              <a:rPr sz="1400" dirty="0"/>
+              <a:t> </a:t>
+            </a:r>
+            <a:r>
+              <a:rPr sz="1400" dirty="0" err="1"/>
+              <a:t>nivel</a:t>
+            </a:r>
+            <a:r>
+              <a:rPr sz="1400" dirty="0"/>
+              <a:t> </a:t>
+            </a:r>
+            <a:r>
+              <a:rPr sz="1400" dirty="0" err="1"/>
+              <a:t>educativo</a:t>
+            </a:r>
+            <a:r>
+              <a:rPr sz="1400" dirty="0"/>
+              <a:t> </a:t>
+            </a:r>
+            <a:r>
+              <a:rPr sz="1400" dirty="0" err="1"/>
+              <a:t>presenta</a:t>
+            </a:r>
+            <a:r>
+              <a:rPr sz="1400" dirty="0"/>
+              <a:t> un </a:t>
+            </a:r>
+            <a:r>
+              <a:rPr sz="1400" dirty="0" err="1"/>
+              <a:t>promedio</a:t>
+            </a:r>
+            <a:r>
+              <a:rPr sz="1400" dirty="0"/>
+              <a:t> de 12,8 puntos </a:t>
+            </a:r>
+            <a:r>
+              <a:rPr sz="1400" dirty="0" err="1"/>
+              <a:t>en</a:t>
+            </a:r>
+            <a:r>
+              <a:rPr sz="1400" dirty="0"/>
+              <a:t> la </a:t>
+            </a:r>
+            <a:r>
+              <a:rPr sz="1400" dirty="0" err="1"/>
+              <a:t>escala</a:t>
+            </a:r>
+            <a:r>
+              <a:rPr sz="1400" dirty="0"/>
+              <a:t> </a:t>
+            </a:r>
+            <a:r>
+              <a:rPr sz="1400" dirty="0" err="1"/>
+              <a:t>utilizada</a:t>
+            </a:r>
+            <a:r>
+              <a:rPr sz="1400" dirty="0"/>
+              <a:t> </a:t>
+            </a:r>
+            <a:r>
+              <a:rPr sz="1400" dirty="0" err="1"/>
+              <a:t>por</a:t>
+            </a:r>
+            <a:r>
+              <a:rPr sz="1400" dirty="0"/>
+              <a:t> </a:t>
+            </a:r>
+            <a:r>
+              <a:rPr sz="1400" dirty="0" err="1"/>
+              <a:t>Latinobarómetro</a:t>
+            </a:r>
+            <a:r>
+              <a:rPr sz="1400" dirty="0"/>
+              <a:t>, con </a:t>
+            </a:r>
+            <a:r>
+              <a:rPr sz="1400" dirty="0" err="1"/>
+              <a:t>una</a:t>
+            </a:r>
+            <a:r>
+              <a:rPr sz="1400" dirty="0"/>
+              <a:t> </a:t>
+            </a:r>
+            <a:r>
+              <a:rPr sz="1400" dirty="0" err="1"/>
+              <a:t>desviación</a:t>
+            </a:r>
+            <a:r>
+              <a:rPr sz="1400" dirty="0"/>
+              <a:t> </a:t>
+            </a:r>
+            <a:r>
+              <a:rPr sz="1400" dirty="0" err="1"/>
+              <a:t>estándar</a:t>
+            </a:r>
+            <a:r>
+              <a:rPr sz="1400" dirty="0"/>
+              <a:t> de 3,2 puntos. El </a:t>
+            </a:r>
+            <a:r>
+              <a:rPr sz="1400" dirty="0" err="1"/>
+              <a:t>rango</a:t>
+            </a:r>
+            <a:r>
+              <a:rPr sz="1400" dirty="0"/>
+              <a:t> </a:t>
+            </a:r>
+            <a:r>
+              <a:rPr sz="1400" dirty="0" err="1"/>
+              <a:t>observado</a:t>
+            </a:r>
+            <a:r>
+              <a:rPr sz="1400" dirty="0"/>
+              <a:t> </a:t>
+            </a:r>
+            <a:r>
+              <a:rPr sz="1400" dirty="0" err="1"/>
+              <a:t>abarca</a:t>
+            </a:r>
+            <a:r>
+              <a:rPr sz="1400" dirty="0"/>
+              <a:t> </a:t>
+            </a:r>
+            <a:r>
+              <a:rPr sz="1400" dirty="0" err="1"/>
+              <a:t>desde</a:t>
+            </a:r>
+            <a:r>
+              <a:rPr sz="1400" dirty="0"/>
+              <a:t> la </a:t>
+            </a:r>
+            <a:r>
+              <a:rPr sz="1400" dirty="0" err="1"/>
+              <a:t>categoría</a:t>
+            </a:r>
+            <a:r>
+              <a:rPr sz="1400" dirty="0"/>
+              <a:t> 1 (sin </a:t>
+            </a:r>
+            <a:r>
+              <a:rPr sz="1400" dirty="0" err="1"/>
+              <a:t>estudios</a:t>
+            </a:r>
+            <a:r>
+              <a:rPr sz="1400" dirty="0"/>
+              <a:t>) hasta la </a:t>
+            </a:r>
+            <a:r>
+              <a:rPr sz="1400" dirty="0" err="1"/>
+              <a:t>categoría</a:t>
+            </a:r>
+            <a:r>
+              <a:rPr sz="1400" dirty="0"/>
+              <a:t> 17 (</a:t>
+            </a:r>
+            <a:r>
+              <a:rPr sz="1400" dirty="0" err="1"/>
+              <a:t>estudios</a:t>
+            </a:r>
+            <a:r>
+              <a:rPr sz="1400" dirty="0"/>
+              <a:t> </a:t>
+            </a:r>
+            <a:r>
+              <a:rPr sz="1400" dirty="0" err="1"/>
+              <a:t>técnicos</a:t>
+            </a:r>
+            <a:r>
+              <a:rPr sz="1400" dirty="0"/>
+              <a:t> </a:t>
+            </a:r>
+            <a:r>
+              <a:rPr sz="1400" dirty="0" err="1"/>
+              <a:t>superiores</a:t>
+            </a:r>
+            <a:r>
+              <a:rPr sz="1400" dirty="0"/>
+              <a:t> </a:t>
+            </a:r>
+            <a:r>
+              <a:rPr sz="1400" dirty="0" err="1"/>
+              <a:t>completos</a:t>
+            </a:r>
+            <a:r>
+              <a:rPr sz="1400" dirty="0"/>
+              <a:t>), lo </a:t>
+            </a:r>
+            <a:r>
+              <a:rPr sz="1400" dirty="0" err="1"/>
+              <a:t>que</a:t>
+            </a:r>
+            <a:r>
+              <a:rPr sz="1400" dirty="0"/>
+              <a:t> </a:t>
+            </a:r>
+            <a:r>
+              <a:rPr sz="1400" dirty="0" err="1"/>
+              <a:t>evidencia</a:t>
+            </a:r>
+            <a:r>
+              <a:rPr sz="1400" dirty="0"/>
+              <a:t> </a:t>
+            </a:r>
+            <a:r>
+              <a:rPr sz="1400" dirty="0" err="1"/>
+              <a:t>una</a:t>
+            </a:r>
+            <a:r>
+              <a:rPr sz="1400" dirty="0"/>
+              <a:t> </a:t>
+            </a:r>
+            <a:r>
+              <a:rPr sz="1400" dirty="0" err="1"/>
+              <a:t>importante</a:t>
+            </a:r>
+            <a:r>
+              <a:rPr sz="1400" dirty="0"/>
+              <a:t> </a:t>
+            </a:r>
+            <a:r>
+              <a:rPr sz="1400" dirty="0" err="1"/>
+              <a:t>heterogeneidad</a:t>
+            </a:r>
+            <a:r>
+              <a:rPr sz="1400" dirty="0"/>
+              <a:t> </a:t>
+            </a:r>
+            <a:r>
+              <a:rPr sz="1400" dirty="0" err="1"/>
+              <a:t>en</a:t>
+            </a:r>
+            <a:r>
+              <a:rPr sz="1400" dirty="0"/>
+              <a:t> </a:t>
+            </a:r>
+            <a:r>
+              <a:rPr sz="1400" dirty="0" err="1"/>
+              <a:t>los</a:t>
+            </a:r>
+            <a:r>
+              <a:rPr sz="1400" dirty="0"/>
+              <a:t> </a:t>
+            </a:r>
+            <a:r>
+              <a:rPr sz="1400" dirty="0" err="1"/>
+              <a:t>niveles</a:t>
+            </a:r>
+            <a:r>
+              <a:rPr sz="1400" dirty="0"/>
+              <a:t> </a:t>
+            </a:r>
+            <a:r>
+              <a:rPr sz="1400" dirty="0" err="1"/>
+              <a:t>educativos</a:t>
+            </a:r>
+            <a:r>
+              <a:rPr sz="1400" dirty="0"/>
+              <a:t> </a:t>
+            </a:r>
+            <a:r>
+              <a:rPr sz="1400" dirty="0" err="1"/>
+              <a:t>presentes</a:t>
+            </a:r>
+            <a:r>
+              <a:rPr sz="1400" dirty="0"/>
+              <a:t> </a:t>
+            </a:r>
+            <a:r>
+              <a:rPr sz="1400" dirty="0" err="1"/>
+              <a:t>en</a:t>
+            </a:r>
+            <a:r>
+              <a:rPr sz="1400" dirty="0"/>
+              <a:t> la </a:t>
+            </a:r>
+            <a:r>
+              <a:rPr sz="1400" dirty="0" err="1"/>
+              <a:t>muestra</a:t>
+            </a:r>
+            <a:r>
+              <a:rPr sz="1400" dirty="0"/>
+              <a:t>.</a:t>
+            </a:r>
+          </a:p>
+        </p:txBody>
+      </p:sp>
+      <p:graphicFrame>
+        <p:nvGraphicFramePr>
+          <p:cNvPr id="6" name="Content Placeholder 5"/>
+          <p:cNvGraphicFramePr>
+            <a:graphicFrameLocks noGrp="1"/>
+          </p:cNvGraphicFramePr>
+          <p:nvPr>
+            <p:ph idx="1"/>
+            <p:extLst>
+              <p:ext uri="{D42A27DB-BD31-4B8C-83A1-F6EECF244321}">
+                <p14:modId xmlns:p14="http://schemas.microsoft.com/office/powerpoint/2010/main" val="1832850331"/>
+              </p:ext>
+            </p:extLst>
+          </p:nvPr>
+        </p:nvGraphicFramePr>
+        <p:xfrm>
+          <a:off x="1387928" y="228600"/>
+          <a:ext cx="5830659" cy="1078410"/>
+        </p:xfrm>
+        <a:graphic>
+          <a:graphicData uri="http://schemas.openxmlformats.org/drawingml/2006/table">
+            <a:tbl>
+              <a:tblPr firstRow="1" bandRow="1">
+                <a:tableStyleId>{5C22544A-7EE6-4342-B048-85BDC9FD1C3A}</a:tableStyleId>
+              </a:tblPr>
+              <a:tblGrid>
+                <a:gridCol w="1943553">
+                  <a:extLst>
+                    <a:ext uri="{9D8B030D-6E8A-4147-A177-3AD203B41FA5}">
+                      <a16:colId xmlns:a16="http://schemas.microsoft.com/office/drawing/2014/main" val="20000"/>
+                    </a:ext>
+                  </a:extLst>
+                </a:gridCol>
+                <a:gridCol w="1943553">
+                  <a:extLst>
+                    <a:ext uri="{9D8B030D-6E8A-4147-A177-3AD203B41FA5}">
+                      <a16:colId xmlns:a16="http://schemas.microsoft.com/office/drawing/2014/main" val="20001"/>
+                    </a:ext>
+                  </a:extLst>
+                </a:gridCol>
+                <a:gridCol w="1943553">
+                  <a:extLst>
+                    <a:ext uri="{9D8B030D-6E8A-4147-A177-3AD203B41FA5}">
+                      <a16:colId xmlns:a16="http://schemas.microsoft.com/office/drawing/2014/main" val="20002"/>
+                    </a:ext>
+                  </a:extLst>
+                </a:gridCol>
+              </a:tblGrid>
+              <a:tr h="359470">
+                <a:tc>
+                  <a:txBody>
+                    <a:bodyPr/>
+                    <a:lstStyle/>
+                    <a:p>
+                      <a:pPr marL="0" lvl="0" indent="0" algn="l">
+                        <a:buNone/>
+                      </a:pPr>
+                      <a:r>
+                        <a:rPr dirty="0" err="1"/>
+                        <a:t>sexo</a:t>
+                      </a:r>
+                      <a:endParaRPr dirty="0"/>
+                    </a:p>
+                  </a:txBody>
+                  <a:tcPr/>
+                </a:tc>
+                <a:tc>
+                  <a:txBody>
+                    <a:bodyPr/>
+                    <a:lstStyle/>
+                    <a:p>
+                      <a:pPr marL="0" lvl="0" indent="0" algn="r">
+                        <a:buNone/>
+                      </a:pPr>
+                      <a:r>
+                        <a:t>n</a:t>
+                      </a:r>
+                    </a:p>
+                  </a:txBody>
+                  <a:tcPr/>
+                </a:tc>
+                <a:tc>
+                  <a:txBody>
+                    <a:bodyPr/>
+                    <a:lstStyle/>
+                    <a:p>
+                      <a:pPr marL="0" lvl="0" indent="0" algn="r">
+                        <a:buNone/>
+                      </a:pPr>
+                      <a:r>
+                        <a:t>porcentaje</a:t>
+                      </a:r>
+                    </a:p>
+                  </a:txBody>
+                  <a:tcPr/>
+                </a:tc>
+                <a:extLst>
+                  <a:ext uri="{0D108BD9-81ED-4DB2-BD59-A6C34878D82A}">
+                    <a16:rowId xmlns:a16="http://schemas.microsoft.com/office/drawing/2014/main" val="10000"/>
+                  </a:ext>
+                </a:extLst>
+              </a:tr>
+              <a:tr h="359470">
+                <a:tc>
+                  <a:txBody>
+                    <a:bodyPr/>
+                    <a:lstStyle/>
+                    <a:p>
+                      <a:pPr marL="0" lvl="0" indent="0" algn="l">
+                        <a:buNone/>
+                      </a:pPr>
+                      <a:r>
+                        <a:t>Hombre</a:t>
+                      </a:r>
+                    </a:p>
+                  </a:txBody>
+                  <a:tcPr/>
+                </a:tc>
+                <a:tc>
+                  <a:txBody>
+                    <a:bodyPr/>
+                    <a:lstStyle/>
+                    <a:p>
+                      <a:pPr marL="0" lvl="0" indent="0" algn="r">
+                        <a:buNone/>
+                      </a:pPr>
+                      <a:r>
+                        <a:t>566</a:t>
+                      </a:r>
+                    </a:p>
+                  </a:txBody>
+                  <a:tcPr/>
+                </a:tc>
+                <a:tc>
+                  <a:txBody>
+                    <a:bodyPr/>
+                    <a:lstStyle/>
+                    <a:p>
+                      <a:pPr marL="0" lvl="0" indent="0" algn="r">
+                        <a:buNone/>
+                      </a:pPr>
+                      <a:r>
+                        <a:t>48.2</a:t>
+                      </a:r>
+                    </a:p>
+                  </a:txBody>
+                  <a:tcPr/>
+                </a:tc>
+                <a:extLst>
+                  <a:ext uri="{0D108BD9-81ED-4DB2-BD59-A6C34878D82A}">
+                    <a16:rowId xmlns:a16="http://schemas.microsoft.com/office/drawing/2014/main" val="10001"/>
+                  </a:ext>
+                </a:extLst>
+              </a:tr>
+              <a:tr h="359470">
+                <a:tc>
+                  <a:txBody>
+                    <a:bodyPr/>
+                    <a:lstStyle/>
+                    <a:p>
+                      <a:pPr marL="0" lvl="0" indent="0" algn="l">
+                        <a:buNone/>
+                      </a:pPr>
+                      <a:r>
+                        <a:t>Mujer</a:t>
+                      </a:r>
+                    </a:p>
+                  </a:txBody>
+                  <a:tcPr/>
+                </a:tc>
+                <a:tc>
+                  <a:txBody>
+                    <a:bodyPr/>
+                    <a:lstStyle/>
+                    <a:p>
+                      <a:pPr marL="0" lvl="0" indent="0" algn="r">
+                        <a:buNone/>
+                      </a:pPr>
+                      <a:r>
+                        <a:t>608</a:t>
+                      </a:r>
+                    </a:p>
+                  </a:txBody>
+                  <a:tcPr/>
+                </a:tc>
+                <a:tc>
+                  <a:txBody>
+                    <a:bodyPr/>
+                    <a:lstStyle/>
+                    <a:p>
+                      <a:pPr marL="0" lvl="0" indent="0" algn="r">
+                        <a:buNone/>
+                      </a:pPr>
+                      <a:r>
+                        <a:rPr dirty="0"/>
+                        <a:t>51.8</a:t>
+                      </a:r>
+                    </a:p>
+                  </a:txBody>
+                  <a:tcPr/>
+                </a:tc>
+                <a:extLst>
+                  <a:ext uri="{0D108BD9-81ED-4DB2-BD59-A6C34878D82A}">
+                    <a16:rowId xmlns:a16="http://schemas.microsoft.com/office/drawing/2014/main" val="10002"/>
+                  </a:ext>
+                </a:extLst>
+              </a:tr>
+            </a:tbl>
+          </a:graphicData>
+        </a:graphic>
+      </p:graphicFrame>
+    </p:spTree>
+  </p:cSld>
+  <p:clrMapOvr>
+    <a:masterClrMapping/>
+  </p:clrMapOvr>
+</p:sld>
+</file>
+
+<file path=ppt/slides/slide7.xml><?xml version="1.0" encoding="utf-8"?>
+<p:sld xmlns:a="http://schemas.openxmlformats.org/drawingml/2006/main" xmlns:r="http://schemas.openxmlformats.org/officeDocument/2006/relationships" xmlns:p="http://schemas.openxmlformats.org/presentationml/2006/main">
+  <p:cSld>
+    <p:spTree>
+      <p:nvGrpSpPr>
+        <p:cNvPr id="1" name=""/>
+        <p:cNvGrpSpPr/>
+        <p:nvPr/>
+      </p:nvGrpSpPr>
+      <p:grpSpPr>
+        <a:xfrm>
+          <a:off x="0" y="0"/>
+          <a:ext cx="0" cy="0"/>
+          <a:chOff x="0" y="0"/>
+          <a:chExt cx="0" cy="0"/>
+        </a:xfrm>
+      </p:grpSpPr>
+      <p:sp>
+        <p:nvSpPr>
+          <p:cNvPr id="4" name="Text Placeholder 3"/>
+          <p:cNvSpPr>
+            <a:spLocks noGrp="1"/>
+          </p:cNvSpPr>
+          <p:nvPr>
+            <p:ph type="body" sz="half" idx="2"/>
+          </p:nvPr>
+        </p:nvSpPr>
+        <p:spPr>
+          <a:xfrm>
+            <a:off x="1043668" y="394209"/>
+            <a:ext cx="6621236" cy="3518297"/>
+          </a:xfrm>
+        </p:spPr>
+        <p:txBody>
+          <a:bodyPr>
+            <a:normAutofit/>
+          </a:bodyPr>
+          <a:lstStyle/>
+          <a:p>
+            <a:pPr marL="0" lvl="0" indent="0">
+              <a:buNone/>
+            </a:pPr>
+            <a:r>
+              <a:rPr sz="1400" dirty="0"/>
+              <a:t>La </a:t>
+            </a:r>
+            <a:r>
+              <a:rPr sz="1400" dirty="0" err="1"/>
+              <a:t>muestra</a:t>
+            </a:r>
+            <a:r>
+              <a:rPr sz="1400" dirty="0"/>
+              <a:t> </a:t>
+            </a:r>
+            <a:r>
+              <a:rPr sz="1400" dirty="0" err="1"/>
+              <a:t>presenta</a:t>
+            </a:r>
+            <a:r>
+              <a:rPr sz="1400" dirty="0"/>
+              <a:t> </a:t>
+            </a:r>
+            <a:r>
+              <a:rPr sz="1400" dirty="0" err="1"/>
+              <a:t>una</a:t>
+            </a:r>
+            <a:r>
+              <a:rPr sz="1400" dirty="0"/>
+              <a:t> </a:t>
+            </a:r>
+            <a:r>
+              <a:rPr sz="1400" dirty="0" err="1"/>
+              <a:t>distribución</a:t>
+            </a:r>
+            <a:r>
+              <a:rPr sz="1400" dirty="0"/>
+              <a:t> </a:t>
+            </a:r>
+            <a:r>
+              <a:rPr sz="1400" dirty="0" err="1"/>
+              <a:t>equilibrada</a:t>
+            </a:r>
+            <a:r>
+              <a:rPr sz="1400" dirty="0"/>
+              <a:t> </a:t>
+            </a:r>
+            <a:r>
+              <a:rPr sz="1400" dirty="0" err="1"/>
+              <a:t>por</a:t>
+            </a:r>
+            <a:r>
+              <a:rPr sz="1400" dirty="0"/>
+              <a:t> </a:t>
+            </a:r>
+            <a:r>
+              <a:rPr sz="1400" dirty="0" err="1"/>
+              <a:t>sexo</a:t>
+            </a:r>
+            <a:r>
+              <a:rPr sz="1400" dirty="0"/>
+              <a:t>. Del total de </a:t>
+            </a:r>
+            <a:r>
+              <a:rPr sz="1400" dirty="0" err="1"/>
+              <a:t>casos</a:t>
+            </a:r>
+            <a:r>
+              <a:rPr sz="1400" dirty="0"/>
+              <a:t> </a:t>
+            </a:r>
+            <a:r>
+              <a:rPr sz="1400" dirty="0" err="1"/>
+              <a:t>analizados</a:t>
+            </a:r>
+            <a:r>
+              <a:rPr sz="1400" dirty="0"/>
+              <a:t>, </a:t>
+            </a:r>
+            <a:r>
+              <a:rPr sz="1400" dirty="0" err="1"/>
+              <a:t>el</a:t>
+            </a:r>
+            <a:r>
+              <a:rPr sz="1400" dirty="0"/>
+              <a:t> 51,8% </a:t>
+            </a:r>
+            <a:r>
+              <a:rPr sz="1400" dirty="0" err="1"/>
+              <a:t>corresponde</a:t>
+            </a:r>
+            <a:r>
+              <a:rPr sz="1400" dirty="0"/>
+              <a:t> a </a:t>
+            </a:r>
+            <a:r>
+              <a:rPr sz="1400" dirty="0" err="1"/>
+              <a:t>mujeres</a:t>
+            </a:r>
+            <a:r>
+              <a:rPr sz="1400" dirty="0"/>
+              <a:t> y </a:t>
+            </a:r>
+            <a:r>
+              <a:rPr sz="1400" dirty="0" err="1"/>
+              <a:t>el</a:t>
+            </a:r>
+            <a:r>
+              <a:rPr sz="1400" dirty="0"/>
+              <a:t> 48,2% a hombres. Esta </a:t>
+            </a:r>
+            <a:r>
+              <a:rPr sz="1400" dirty="0" err="1"/>
+              <a:t>distribución</a:t>
+            </a:r>
+            <a:r>
+              <a:rPr sz="1400" dirty="0"/>
+              <a:t> reduce </a:t>
+            </a:r>
+            <a:r>
+              <a:rPr sz="1400" dirty="0" err="1"/>
+              <a:t>el</a:t>
+            </a:r>
+            <a:r>
+              <a:rPr sz="1400" dirty="0"/>
+              <a:t> </a:t>
+            </a:r>
+            <a:r>
+              <a:rPr sz="1400" dirty="0" err="1"/>
+              <a:t>riesgo</a:t>
+            </a:r>
+            <a:r>
+              <a:rPr sz="1400" dirty="0"/>
+              <a:t> de </a:t>
+            </a:r>
+            <a:r>
+              <a:rPr sz="1400" dirty="0" err="1"/>
+              <a:t>sesgos</a:t>
+            </a:r>
+            <a:r>
+              <a:rPr sz="1400" dirty="0"/>
+              <a:t> </a:t>
+            </a:r>
+            <a:r>
+              <a:rPr sz="1400" dirty="0" err="1"/>
+              <a:t>derivados</a:t>
+            </a:r>
+            <a:r>
+              <a:rPr sz="1400" dirty="0"/>
+              <a:t> de </a:t>
+            </a:r>
+            <a:r>
+              <a:rPr sz="1400" dirty="0" err="1"/>
+              <a:t>una</a:t>
+            </a:r>
+            <a:r>
+              <a:rPr sz="1400" dirty="0"/>
+              <a:t> </a:t>
+            </a:r>
+            <a:r>
+              <a:rPr sz="1400" dirty="0" err="1"/>
+              <a:t>sobrerrepresentación</a:t>
+            </a:r>
+            <a:r>
+              <a:rPr sz="1400" dirty="0"/>
+              <a:t> de </a:t>
+            </a:r>
+            <a:r>
+              <a:rPr sz="1400" dirty="0" err="1"/>
+              <a:t>alguno</a:t>
+            </a:r>
+            <a:r>
+              <a:rPr sz="1400" dirty="0"/>
+              <a:t> de </a:t>
+            </a:r>
+            <a:r>
+              <a:rPr sz="1400" dirty="0" err="1"/>
+              <a:t>los</a:t>
+            </a:r>
+            <a:r>
+              <a:rPr sz="1400" dirty="0"/>
+              <a:t> </a:t>
+            </a:r>
+            <a:r>
+              <a:rPr sz="1400" dirty="0" err="1"/>
+              <a:t>grupos</a:t>
+            </a:r>
+            <a:r>
+              <a:rPr sz="1400" dirty="0"/>
+              <a:t> y </a:t>
+            </a:r>
+            <a:r>
+              <a:rPr sz="1400" dirty="0" err="1"/>
+              <a:t>permite</a:t>
+            </a:r>
+            <a:r>
+              <a:rPr sz="1400" dirty="0"/>
+              <a:t> </a:t>
+            </a:r>
+            <a:r>
+              <a:rPr sz="1400" dirty="0" err="1"/>
+              <a:t>realizar</a:t>
+            </a:r>
+            <a:r>
+              <a:rPr sz="1400" dirty="0"/>
+              <a:t> </a:t>
+            </a:r>
+            <a:r>
+              <a:rPr sz="1400" dirty="0" err="1"/>
+              <a:t>comparaciones</a:t>
+            </a:r>
+            <a:r>
+              <a:rPr sz="1400" dirty="0"/>
+              <a:t> entre ambos </a:t>
+            </a:r>
+            <a:r>
+              <a:rPr sz="1400" dirty="0" err="1"/>
+              <a:t>sexos</a:t>
+            </a:r>
+            <a:r>
+              <a:rPr sz="1400" dirty="0"/>
+              <a:t> </a:t>
+            </a:r>
+            <a:r>
+              <a:rPr sz="1400" dirty="0" err="1"/>
+              <a:t>en</a:t>
+            </a:r>
+            <a:r>
+              <a:rPr sz="1400" dirty="0"/>
+              <a:t> </a:t>
+            </a:r>
+            <a:r>
+              <a:rPr sz="1400" dirty="0" err="1"/>
+              <a:t>condiciones</a:t>
+            </a:r>
+            <a:r>
+              <a:rPr sz="1400" dirty="0"/>
+              <a:t> </a:t>
+            </a:r>
+            <a:r>
+              <a:rPr sz="1400" dirty="0" err="1"/>
+              <a:t>relativamente</a:t>
+            </a:r>
+            <a:r>
+              <a:rPr sz="1400" dirty="0"/>
+              <a:t> </a:t>
+            </a:r>
+            <a:r>
+              <a:rPr sz="1400" dirty="0" err="1"/>
+              <a:t>equivalentes</a:t>
+            </a:r>
+            <a:r>
+              <a:rPr sz="1400" dirty="0"/>
+              <a:t>.</a:t>
+            </a:r>
+          </a:p>
+          <a:p>
+            <a:pPr marL="0" lvl="0" indent="0">
+              <a:spcBef>
+                <a:spcPts val="3000"/>
+              </a:spcBef>
+              <a:buNone/>
+            </a:pPr>
+            <a:r>
+              <a:rPr sz="1400" b="1" dirty="0" err="1"/>
+              <a:t>Frecuencia</a:t>
+            </a:r>
+            <a:r>
+              <a:rPr sz="1400" b="1" dirty="0"/>
+              <a:t> </a:t>
+            </a:r>
+            <a:r>
+              <a:rPr sz="1400" b="1" dirty="0" err="1"/>
+              <a:t>satisfacción</a:t>
+            </a:r>
+            <a:r>
+              <a:rPr sz="1400" b="1" dirty="0"/>
+              <a:t> con la </a:t>
+            </a:r>
+            <a:r>
+              <a:rPr sz="1400" b="1" dirty="0" err="1"/>
+              <a:t>democracia</a:t>
+            </a:r>
+            <a:endParaRPr sz="1400" b="1" dirty="0"/>
+          </a:p>
+        </p:txBody>
+      </p:sp>
+      <p:graphicFrame>
+        <p:nvGraphicFramePr>
+          <p:cNvPr id="6" name="Content Placeholder 5"/>
+          <p:cNvGraphicFramePr>
+            <a:graphicFrameLocks noGrp="1"/>
+          </p:cNvGraphicFramePr>
+          <p:nvPr>
+            <p:ph idx="1"/>
+            <p:extLst>
+              <p:ext uri="{D42A27DB-BD31-4B8C-83A1-F6EECF244321}">
+                <p14:modId xmlns:p14="http://schemas.microsoft.com/office/powerpoint/2010/main" val="3493034685"/>
+              </p:ext>
+            </p:extLst>
+          </p:nvPr>
+        </p:nvGraphicFramePr>
+        <p:xfrm>
+          <a:off x="1043668" y="2735037"/>
+          <a:ext cx="6034767" cy="1772374"/>
+        </p:xfrm>
+        <a:graphic>
+          <a:graphicData uri="http://schemas.openxmlformats.org/drawingml/2006/table">
+            <a:tbl>
+              <a:tblPr firstRow="1" bandRow="1">
+                <a:tableStyleId>{5C22544A-7EE6-4342-B048-85BDC9FD1C3A}</a:tableStyleId>
+              </a:tblPr>
+              <a:tblGrid>
+                <a:gridCol w="2011589">
+                  <a:extLst>
+                    <a:ext uri="{9D8B030D-6E8A-4147-A177-3AD203B41FA5}">
+                      <a16:colId xmlns:a16="http://schemas.microsoft.com/office/drawing/2014/main" val="20000"/>
+                    </a:ext>
+                  </a:extLst>
+                </a:gridCol>
+                <a:gridCol w="2011589">
+                  <a:extLst>
+                    <a:ext uri="{9D8B030D-6E8A-4147-A177-3AD203B41FA5}">
+                      <a16:colId xmlns:a16="http://schemas.microsoft.com/office/drawing/2014/main" val="20001"/>
+                    </a:ext>
+                  </a:extLst>
+                </a:gridCol>
+                <a:gridCol w="2011589">
+                  <a:extLst>
+                    <a:ext uri="{9D8B030D-6E8A-4147-A177-3AD203B41FA5}">
+                      <a16:colId xmlns:a16="http://schemas.microsoft.com/office/drawing/2014/main" val="20002"/>
+                    </a:ext>
+                  </a:extLst>
+                </a:gridCol>
+              </a:tblGrid>
+              <a:tr h="526922">
+                <a:tc>
+                  <a:txBody>
+                    <a:bodyPr/>
+                    <a:lstStyle/>
+                    <a:p>
+                      <a:pPr marL="0" lvl="0" indent="0" algn="l">
+                        <a:buNone/>
+                      </a:pPr>
+                      <a:r>
+                        <a:t>satisfaccion_democracia</a:t>
+                      </a:r>
+                    </a:p>
+                  </a:txBody>
+                  <a:tcPr/>
+                </a:tc>
+                <a:tc>
+                  <a:txBody>
+                    <a:bodyPr/>
+                    <a:lstStyle/>
+                    <a:p>
+                      <a:pPr marL="0" lvl="0" indent="0" algn="r">
+                        <a:buNone/>
+                      </a:pPr>
+                      <a:r>
+                        <a:rPr dirty="0"/>
+                        <a:t>n</a:t>
+                      </a:r>
+                    </a:p>
+                  </a:txBody>
+                  <a:tcPr/>
+                </a:tc>
+                <a:tc>
+                  <a:txBody>
+                    <a:bodyPr/>
+                    <a:lstStyle/>
+                    <a:p>
+                      <a:pPr marL="0" lvl="0" indent="0" algn="r">
+                        <a:buNone/>
+                      </a:pPr>
+                      <a:r>
+                        <a:t>porcentaje</a:t>
+                      </a:r>
+                    </a:p>
+                  </a:txBody>
+                  <a:tcPr/>
+                </a:tc>
+                <a:extLst>
+                  <a:ext uri="{0D108BD9-81ED-4DB2-BD59-A6C34878D82A}">
+                    <a16:rowId xmlns:a16="http://schemas.microsoft.com/office/drawing/2014/main" val="10000"/>
+                  </a:ext>
+                </a:extLst>
+              </a:tr>
+              <a:tr h="311363">
+                <a:tc>
+                  <a:txBody>
+                    <a:bodyPr/>
+                    <a:lstStyle/>
+                    <a:p>
+                      <a:pPr marL="0" lvl="0" indent="0" algn="l">
+                        <a:buNone/>
+                      </a:pPr>
+                      <a:r>
+                        <a:t>Muy satisfecho</a:t>
+                      </a:r>
+                    </a:p>
+                  </a:txBody>
+                  <a:tcPr/>
+                </a:tc>
+                <a:tc>
+                  <a:txBody>
+                    <a:bodyPr/>
+                    <a:lstStyle/>
+                    <a:p>
+                      <a:pPr marL="0" lvl="0" indent="0" algn="r">
+                        <a:buNone/>
+                      </a:pPr>
+                      <a:r>
+                        <a:t>94</a:t>
+                      </a:r>
+                    </a:p>
+                  </a:txBody>
+                  <a:tcPr/>
+                </a:tc>
+                <a:tc>
+                  <a:txBody>
+                    <a:bodyPr/>
+                    <a:lstStyle/>
+                    <a:p>
+                      <a:pPr marL="0" lvl="0" indent="0" algn="r">
+                        <a:buNone/>
+                      </a:pPr>
+                      <a:r>
+                        <a:t>8.0</a:t>
+                      </a:r>
+                    </a:p>
+                  </a:txBody>
+                  <a:tcPr/>
+                </a:tc>
+                <a:extLst>
+                  <a:ext uri="{0D108BD9-81ED-4DB2-BD59-A6C34878D82A}">
+                    <a16:rowId xmlns:a16="http://schemas.microsoft.com/office/drawing/2014/main" val="10001"/>
+                  </a:ext>
+                </a:extLst>
+              </a:tr>
+              <a:tr h="311363">
+                <a:tc>
+                  <a:txBody>
+                    <a:bodyPr/>
+                    <a:lstStyle/>
+                    <a:p>
+                      <a:pPr marL="0" lvl="0" indent="0" algn="l">
+                        <a:buNone/>
+                      </a:pPr>
+                      <a:r>
+                        <a:t>Más bien satisfecho</a:t>
+                      </a:r>
+                    </a:p>
+                  </a:txBody>
+                  <a:tcPr/>
+                </a:tc>
+                <a:tc>
+                  <a:txBody>
+                    <a:bodyPr/>
+                    <a:lstStyle/>
+                    <a:p>
+                      <a:pPr marL="0" lvl="0" indent="0" algn="r">
+                        <a:buNone/>
+                      </a:pPr>
+                      <a:r>
+                        <a:t>353</a:t>
+                      </a:r>
+                    </a:p>
+                  </a:txBody>
+                  <a:tcPr/>
+                </a:tc>
+                <a:tc>
+                  <a:txBody>
+                    <a:bodyPr/>
+                    <a:lstStyle/>
+                    <a:p>
+                      <a:pPr marL="0" lvl="0" indent="0" algn="r">
+                        <a:buNone/>
+                      </a:pPr>
+                      <a:r>
+                        <a:t>30.1</a:t>
+                      </a:r>
+                    </a:p>
+                  </a:txBody>
+                  <a:tcPr/>
+                </a:tc>
+                <a:extLst>
+                  <a:ext uri="{0D108BD9-81ED-4DB2-BD59-A6C34878D82A}">
+                    <a16:rowId xmlns:a16="http://schemas.microsoft.com/office/drawing/2014/main" val="10002"/>
+                  </a:ext>
+                </a:extLst>
+              </a:tr>
+              <a:tr h="311363">
+                <a:tc>
+                  <a:txBody>
+                    <a:bodyPr/>
+                    <a:lstStyle/>
+                    <a:p>
+                      <a:pPr marL="0" lvl="0" indent="0" algn="l">
+                        <a:buNone/>
+                      </a:pPr>
+                      <a:r>
+                        <a:t>Nada satisfecho</a:t>
+                      </a:r>
+                    </a:p>
+                  </a:txBody>
+                  <a:tcPr/>
+                </a:tc>
+                <a:tc>
+                  <a:txBody>
+                    <a:bodyPr/>
+                    <a:lstStyle/>
+                    <a:p>
+                      <a:pPr marL="0" lvl="0" indent="0" algn="r">
+                        <a:buNone/>
+                      </a:pPr>
+                      <a:r>
+                        <a:t>230</a:t>
+                      </a:r>
+                    </a:p>
+                  </a:txBody>
+                  <a:tcPr/>
+                </a:tc>
+                <a:tc>
+                  <a:txBody>
+                    <a:bodyPr/>
+                    <a:lstStyle/>
+                    <a:p>
+                      <a:pPr marL="0" lvl="0" indent="0" algn="r">
+                        <a:buNone/>
+                      </a:pPr>
+                      <a:r>
+                        <a:t>19.6</a:t>
+                      </a:r>
+                    </a:p>
+                  </a:txBody>
+                  <a:tcPr/>
+                </a:tc>
+                <a:extLst>
+                  <a:ext uri="{0D108BD9-81ED-4DB2-BD59-A6C34878D82A}">
+                    <a16:rowId xmlns:a16="http://schemas.microsoft.com/office/drawing/2014/main" val="10003"/>
+                  </a:ext>
+                </a:extLst>
+              </a:tr>
+              <a:tr h="311363">
+                <a:tc>
+                  <a:txBody>
+                    <a:bodyPr/>
+                    <a:lstStyle/>
+                    <a:p>
+                      <a:pPr marL="0" lvl="0" indent="0" algn="l">
+                        <a:buNone/>
+                      </a:pPr>
+                      <a:r>
+                        <a:t>No muy satisfecho</a:t>
+                      </a:r>
+                    </a:p>
+                  </a:txBody>
+                  <a:tcPr/>
+                </a:tc>
+                <a:tc>
+                  <a:txBody>
+                    <a:bodyPr/>
+                    <a:lstStyle/>
+                    <a:p>
+                      <a:pPr marL="0" lvl="0" indent="0" algn="r">
+                        <a:buNone/>
+                      </a:pPr>
+                      <a:r>
+                        <a:t>497</a:t>
+                      </a:r>
+                    </a:p>
+                  </a:txBody>
+                  <a:tcPr/>
+                </a:tc>
+                <a:tc>
+                  <a:txBody>
+                    <a:bodyPr/>
+                    <a:lstStyle/>
+                    <a:p>
+                      <a:pPr marL="0" lvl="0" indent="0" algn="r">
+                        <a:buNone/>
+                      </a:pPr>
+                      <a:r>
+                        <a:rPr dirty="0"/>
+                        <a:t>42.3</a:t>
+                      </a:r>
+                    </a:p>
+                  </a:txBody>
+                  <a:tcPr/>
+                </a:tc>
+                <a:extLst>
+                  <a:ext uri="{0D108BD9-81ED-4DB2-BD59-A6C34878D82A}">
+                    <a16:rowId xmlns:a16="http://schemas.microsoft.com/office/drawing/2014/main" val="10004"/>
+                  </a:ext>
+                </a:extLst>
+              </a:tr>
+            </a:tbl>
+          </a:graphicData>
+        </a:graphic>
+      </p:graphicFrame>
+    </p:spTree>
+  </p:cSld>
+  <p:clrMapOvr>
+    <a:masterClrMapping/>
+  </p:clrMapOvr>
+</p:sld>
+</file>
+
+<file path=ppt/slides/slide8.xml><?xml version="1.0" encoding="utf-8"?>
+<p:sld xmlns:a="http://schemas.openxmlformats.org/drawingml/2006/main" xmlns:r="http://schemas.openxmlformats.org/officeDocument/2006/relationships" xmlns:p="http://schemas.openxmlformats.org/presentationml/2006/main">
+  <p:cSld>
+    <p:spTree>
+      <p:nvGrpSpPr>
+        <p:cNvPr id="1" name=""/>
+        <p:cNvGrpSpPr/>
+        <p:nvPr/>
+      </p:nvGrpSpPr>
+      <p:grpSpPr>
+        <a:xfrm>
+          <a:off x="0" y="0"/>
+          <a:ext cx="0" cy="0"/>
+          <a:chOff x="0" y="0"/>
+          <a:chExt cx="0" cy="0"/>
+        </a:xfrm>
+      </p:grpSpPr>
+      <p:sp>
+        <p:nvSpPr>
+          <p:cNvPr id="4" name="Text Placeholder 3"/>
+          <p:cNvSpPr>
+            <a:spLocks noGrp="1"/>
+          </p:cNvSpPr>
+          <p:nvPr>
+            <p:ph type="body" sz="half" idx="2"/>
           </p:nvPr>
         </p:nvSpPr>
         <p:spPr/>
@@ -5004,11 +9338,10 @@
           <a:bodyPr/>
           <a:lstStyle/>
           <a:p>
-            <a:pPr lvl="0" indent="0" marL="0">
+            <a:pPr marL="0" lvl="0" indent="0">
               <a:buNone/>
             </a:pPr>
             <a:r>
-              <a:rPr/>
               <a:t>La distribución de la satisfacción con la democracia muestra un predominio de evaluaciones negativas respecto de su funcionamiento en Argentina durante 2023. La categoría más frecuente corresponde a los encuestados </a:t>
             </a:r>
             <a:r>
@@ -5016,7 +9349,6 @@
               <a:t>no muy satisfechos</a:t>
             </a:r>
             <a:r>
-              <a:rPr/>
               <a:t> (42,3%), seguida por quienes se declaran </a:t>
             </a:r>
             <a:r>
@@ -5024,7 +9356,6 @@
               <a:t>más bien satisfechos</a:t>
             </a:r>
             <a:r>
-              <a:rPr/>
               <a:t> (30,1%). Por su parte, un 19,6% señala estar </a:t>
             </a:r>
             <a:r>
@@ -5032,7 +9363,6 @@
               <a:t>nada satisfecho</a:t>
             </a:r>
             <a:r>
-              <a:rPr/>
               <a:t>, mientras que solo un 8,0% manifiesta estar </a:t>
             </a:r>
             <a:r>
@@ -5040,16 +9370,14 @@
               <a:t>muy satisfecho</a:t>
             </a:r>
             <a:r>
-              <a:rPr/>
               <a:t> con el funcionamiento de la democracia.</a:t>
             </a:r>
           </a:p>
           <a:p>
-            <a:pPr lvl="0" indent="0" marL="0">
+            <a:pPr marL="0" lvl="0" indent="0">
               <a:buNone/>
             </a:pPr>
             <a:r>
-              <a:rPr/>
               <a:t>En términos generales, los resultados sugieren una percepción crítica de la democracia entre los encuestados, ya que más del 60% de la muestra se concentra en categorías de insatisfacción. Este hallazgo resulta consistente con el contexto político y social argentino de 2023, caracterizado por elevados niveles de incertidumbre económica, polarización política y cuestionamientos hacia las instituciones tradicionales.</a:t>
             </a:r>
           </a:p>
@@ -5057,7 +9385,7 @@
       </p:sp>
       <p:pic>
         <p:nvPicPr>
-          <p:cNvPr descr="trabajo2_files/figure-pptx/grafico-satisfaccion-democracia-1.png" id="0" name="Picture 1"/>
+          <p:cNvPr id="2" name="Picture 1" descr="trabajo2_files/figure-pptx/grafico-satisfaccion-democracia-1.png"/>
           <p:cNvPicPr>
             <a:picLocks noGrp="1" noChangeAspect="1"/>
           </p:cNvPicPr>
@@ -5087,7 +9415,7 @@
       </p:pic>
       <p:sp>
         <p:nvSpPr>
-          <p:cNvPr id="1" name="TextBox 3"/>
+          <p:cNvPr id="5" name="TextBox 3"/>
           <p:cNvSpPr txBox="1"/>
           <p:nvPr/>
         </p:nvSpPr>
@@ -5105,11 +9433,10 @@
           <a:bodyPr/>
           <a:lstStyle/>
           <a:p>
-            <a:pPr lvl="0" indent="0" marL="0" algn="ctr">
+            <a:pPr marL="0" lvl="0" indent="0" algn="ctr">
               <a:buNone/>
             </a:pPr>
             <a:r>
-              <a:rPr/>
               <a:t>Distribución de la satisfacción con la democracia en Argentina (2023)</a:t>
             </a:r>
           </a:p>
@@ -5127,61 +9454,58 @@
         </p:nvSpPr>
         <p:spPr/>
         <p:txBody>
-          <a:bodyPr/>
+          <a:bodyPr>
+            <a:normAutofit/>
+          </a:bodyPr>
           <a:lstStyle/>
           <a:p>
-            <a:pPr lvl="0" indent="0" marL="1270000">
-              <a:buNone/>
-            </a:pPr>
-            <a:r>
-              <a:rPr sz="2000"/>
-              <a:t>La distribución de frecuencias muestra que la categoría más frecuente es </a:t>
-            </a:r>
-            <a:r>
-              <a:rPr sz="2000" i="1"/>
-              <a:t>“No muy satisfecho”</a:t>
-            </a:r>
-            <a:r>
-              <a:rPr sz="2000"/>
-              <a:t>, seguida por </a:t>
-            </a:r>
-            <a:r>
-              <a:rPr sz="2000" i="1"/>
-              <a:t>“Más bien satisfecho”</a:t>
-            </a:r>
-            <a:r>
-              <a:rPr sz="2000"/>
-              <a:t>. En contraste, las categorías extremas presentan una menor proporción de casos, especialmente </a:t>
-            </a:r>
-            <a:r>
-              <a:rPr sz="2000" i="1"/>
-              <a:t>“Muy satisfecho”</a:t>
-            </a:r>
-            <a:r>
-              <a:rPr sz="2000"/>
-              <a:t>. Estos resultados sugieren una evaluación predominantemente crítica o moderadamente negativa respecto del funcionamiento de la democracia entre las personas encuestadas.</a:t>
-            </a:r>
-          </a:p>
-          <a:p>
-            <a:pPr lvl="0" indent="0" marL="0">
+            <a:pPr marL="0" lvl="0" indent="0">
               <a:spcBef>
                 <a:spcPts val="3000"/>
               </a:spcBef>
               <a:buNone/>
             </a:pPr>
             <a:r>
-              <a:rPr b="1"/>
-              <a:t>Asociación entre sexo y satisfacción con la democracia</a:t>
-            </a:r>
+              <a:rPr b="1" dirty="0" err="1"/>
+              <a:t>Asociación</a:t>
+            </a:r>
+            <a:r>
+              <a:rPr b="1" dirty="0"/>
+              <a:t> entre </a:t>
+            </a:r>
+            <a:r>
+              <a:rPr b="1" dirty="0" err="1"/>
+              <a:t>sexo</a:t>
+            </a:r>
+            <a:r>
+              <a:rPr b="1" dirty="0"/>
+              <a:t> y </a:t>
+            </a:r>
+            <a:r>
+              <a:rPr b="1" dirty="0" err="1"/>
+              <a:t>satisfacción</a:t>
+            </a:r>
+            <a:r>
+              <a:rPr b="1" dirty="0"/>
+              <a:t> con la </a:t>
+            </a:r>
+            <a:r>
+              <a:rPr b="1" dirty="0" err="1"/>
+              <a:t>democracia</a:t>
+            </a:r>
+            <a:endParaRPr b="1" dirty="0"/>
           </a:p>
         </p:txBody>
       </p:sp>
     </p:spTree>
   </p:cSld>
+  <p:clrMapOvr>
+    <a:masterClrMapping/>
+  </p:clrMapOvr>
 </p:sld>
 </file>
 
-<file path=ppt/slides/slide7.xml><?xml version="1.0" encoding="utf-8"?>
+<file path=ppt/slides/slide9.xml><?xml version="1.0" encoding="utf-8"?>
 <p:sld xmlns:a="http://schemas.openxmlformats.org/drawingml/2006/main" xmlns:r="http://schemas.openxmlformats.org/officeDocument/2006/relationships" xmlns:p="http://schemas.openxmlformats.org/presentationml/2006/main">
   <p:cSld>
     <p:spTree>
@@ -5210,7 +9534,7 @@
         </p:nvGraphicFramePr>
         <p:xfrm>
           <a:off x="457200" y="1193800"/>
-          <a:ext cx="8229600" cy="2882900"/>
+          <a:ext cx="8229600" cy="2880360"/>
         </p:xfrm>
         <a:graphic>
           <a:graphicData uri="http://schemas.openxmlformats.org/drawingml/2006/table">
@@ -5219,10 +9543,34 @@
                 <a:tableStyleId>{5C22544A-7EE6-4342-B048-85BDC9FD1C3A}</a:tableStyleId>
               </a:tblPr>
               <a:tblGrid>
-                <a:gridCol w="2057400"/>
-                <a:gridCol w="2057400"/>
-                <a:gridCol w="2057400"/>
-                <a:gridCol w="2057400"/>
+                <a:gridCol w="2057400">
+                  <a:extLst>
+                    <a:ext uri="{9D8B030D-6E8A-4147-A177-3AD203B41FA5}">
+                      <a16:colId xmlns:a16="http://schemas.microsoft.com/office/drawing/2014/main" val="20000"/>
+                    </a:ext>
+                  </a:extLst>
+                </a:gridCol>
+                <a:gridCol w="2057400">
+                  <a:extLst>
+                    <a:ext uri="{9D8B030D-6E8A-4147-A177-3AD203B41FA5}">
+                      <a16:colId xmlns:a16="http://schemas.microsoft.com/office/drawing/2014/main" val="20001"/>
+                    </a:ext>
+                  </a:extLst>
+                </a:gridCol>
+                <a:gridCol w="2057400">
+                  <a:extLst>
+                    <a:ext uri="{9D8B030D-6E8A-4147-A177-3AD203B41FA5}">
+                      <a16:colId xmlns:a16="http://schemas.microsoft.com/office/drawing/2014/main" val="20002"/>
+                    </a:ext>
+                  </a:extLst>
+                </a:gridCol>
+                <a:gridCol w="2057400">
+                  <a:extLst>
+                    <a:ext uri="{9D8B030D-6E8A-4147-A177-3AD203B41FA5}">
+                      <a16:colId xmlns:a16="http://schemas.microsoft.com/office/drawing/2014/main" val="20003"/>
+                    </a:ext>
+                  </a:extLst>
+                </a:gridCol>
               </a:tblGrid>
               <a:tr h="0">
                 <a:tc>
@@ -5230,11 +9578,10 @@
                     <a:bodyPr/>
                     <a:lstStyle/>
                     <a:p>
-                      <a:pPr lvl="0" indent="0" marL="0" algn="l">
+                      <a:pPr marL="0" lvl="0" indent="0" algn="l">
                         <a:buNone/>
                       </a:pPr>
                       <a:r>
-                        <a:rPr/>
                         <a:t>Sexo</a:t>
                       </a:r>
                     </a:p>
@@ -5246,11 +9593,10 @@
                     <a:bodyPr/>
                     <a:lstStyle/>
                     <a:p>
-                      <a:pPr lvl="0" indent="0" marL="0" algn="l">
+                      <a:pPr marL="0" lvl="0" indent="0" algn="l">
                         <a:buNone/>
                       </a:pPr>
                       <a:r>
-                        <a:rPr/>
                         <a:t>Satisfacción con la democracia</a:t>
                       </a:r>
                     </a:p>
@@ -5262,11 +9608,10 @@
                     <a:bodyPr/>
                     <a:lstStyle/>
                     <a:p>
-                      <a:pPr lvl="0" indent="0" marL="0" algn="r">
+                      <a:pPr marL="0" lvl="0" indent="0" algn="r">
                         <a:buNone/>
                       </a:pPr>
                       <a:r>
-                        <a:rPr/>
                         <a:t>Frecuencia</a:t>
                       </a:r>
                     </a:p>
@@ -5278,17 +9623,21 @@
                     <a:bodyPr/>
                     <a:lstStyle/>
                     <a:p>
-                      <a:pPr lvl="0" indent="0" marL="0" algn="r">
+                      <a:pPr marL="0" lvl="0" indent="0" algn="r">
                         <a:buNone/>
                       </a:pPr>
                       <a:r>
-                        <a:rPr/>
                         <a:t>Porcentaje</a:t>
                       </a:r>
                     </a:p>
                   </a:txBody>
                   <a:tcPr/>
                 </a:tc>
+                <a:extLst>
+                  <a:ext uri="{0D108BD9-81ED-4DB2-BD59-A6C34878D82A}">
+                    <a16:rowId xmlns:a16="http://schemas.microsoft.com/office/drawing/2014/main" val="10000"/>
+                  </a:ext>
+                </a:extLst>
               </a:tr>
               <a:tr h="0">
                 <a:tc>
@@ -5296,61 +9645,66 @@
                     <a:bodyPr/>
                     <a:lstStyle/>
                     <a:p>
-                      <a:pPr lvl="0" indent="0" marL="0" algn="l">
+                      <a:pPr marL="0" lvl="0" indent="0" algn="l">
                         <a:buNone/>
                       </a:pPr>
                       <a:r>
-                        <a:rPr/>
                         <a:t>Hombre</a:t>
                       </a:r>
                     </a:p>
                   </a:txBody>
+                  <a:tcPr/>
                 </a:tc>
                 <a:tc>
                   <a:txBody>
                     <a:bodyPr/>
                     <a:lstStyle/>
                     <a:p>
-                      <a:pPr lvl="0" indent="0" marL="0" algn="l">
+                      <a:pPr marL="0" lvl="0" indent="0" algn="l">
                         <a:buNone/>
                       </a:pPr>
                       <a:r>
-                        <a:rPr/>
                         <a:t>Muy satisfecho</a:t>
                       </a:r>
                     </a:p>
                   </a:txBody>
+                  <a:tcPr/>
                 </a:tc>
                 <a:tc>
                   <a:txBody>
                     <a:bodyPr/>
                     <a:lstStyle/>
                     <a:p>
-                      <a:pPr lvl="0" indent="0" marL="0" algn="r">
+                      <a:pPr marL="0" lvl="0" indent="0" algn="r">
                         <a:buNone/>
                       </a:pPr>
                       <a:r>
-                        <a:rPr/>
                         <a:t>41</a:t>
                       </a:r>
                     </a:p>
                   </a:txBody>
+                  <a:tcPr/>
                 </a:tc>
                 <a:tc>
                   <a:txBody>
                     <a:bodyPr/>
                     <a:lstStyle/>
                     <a:p>
-                      <a:pPr lvl="0" indent="0" marL="0" algn="r">
+                      <a:pPr marL="0" lvl="0" indent="0" algn="r">
                         <a:buNone/>
                       </a:pPr>
                       <a:r>
-                        <a:rPr/>
                         <a:t>7.2</a:t>
                       </a:r>
                     </a:p>
                   </a:txBody>
+                  <a:tcPr/>
                 </a:tc>
+                <a:extLst>
+                  <a:ext uri="{0D108BD9-81ED-4DB2-BD59-A6C34878D82A}">
+                    <a16:rowId xmlns:a16="http://schemas.microsoft.com/office/drawing/2014/main" val="10001"/>
+                  </a:ext>
+                </a:extLst>
               </a:tr>
               <a:tr h="0">
                 <a:tc>
@@ -5358,61 +9712,66 @@
                     <a:bodyPr/>
                     <a:lstStyle/>
                     <a:p>
-                      <a:pPr lvl="0" indent="0" marL="0" algn="l">
+                      <a:pPr marL="0" lvl="0" indent="0" algn="l">
                         <a:buNone/>
                       </a:pPr>
                       <a:r>
-                        <a:rPr/>
                         <a:t>Hombre</a:t>
                       </a:r>
                     </a:p>
                   </a:txBody>
+                  <a:tcPr/>
                 </a:tc>
                 <a:tc>
                   <a:txBody>
                     <a:bodyPr/>
                     <a:lstStyle/>
                     <a:p>
-                      <a:pPr lvl="0" indent="0" marL="0" algn="l">
+                      <a:pPr marL="0" lvl="0" indent="0" algn="l">
                         <a:buNone/>
                       </a:pPr>
                       <a:r>
-                        <a:rPr/>
                         <a:t>Más bien satisfecho</a:t>
                       </a:r>
                     </a:p>
                   </a:txBody>
+                  <a:tcPr/>
                 </a:tc>
                 <a:tc>
                   <a:txBody>
                     <a:bodyPr/>
                     <a:lstStyle/>
                     <a:p>
-                      <a:pPr lvl="0" indent="0" marL="0" algn="r">
+                      <a:pPr marL="0" lvl="0" indent="0" algn="r">
                         <a:buNone/>
                       </a:pPr>
                       <a:r>
-                        <a:rPr/>
                         <a:t>158</a:t>
                       </a:r>
                     </a:p>
                   </a:txBody>
+                  <a:tcPr/>
                 </a:tc>
                 <a:tc>
                   <a:txBody>
                     <a:bodyPr/>
                     <a:lstStyle/>
                     <a:p>
-                      <a:pPr lvl="0" indent="0" marL="0" algn="r">
+                      <a:pPr marL="0" lvl="0" indent="0" algn="r">
                         <a:buNone/>
                       </a:pPr>
                       <a:r>
-                        <a:rPr/>
                         <a:t>27.9</a:t>
                       </a:r>
                     </a:p>
                   </a:txBody>
+                  <a:tcPr/>
                 </a:tc>
+                <a:extLst>
+                  <a:ext uri="{0D108BD9-81ED-4DB2-BD59-A6C34878D82A}">
+                    <a16:rowId xmlns:a16="http://schemas.microsoft.com/office/drawing/2014/main" val="10002"/>
+                  </a:ext>
+                </a:extLst>
               </a:tr>
               <a:tr h="0">
                 <a:tc>
@@ -5420,61 +9779,66 @@
                     <a:bodyPr/>
                     <a:lstStyle/>
                     <a:p>
-                      <a:pPr lvl="0" indent="0" marL="0" algn="l">
+                      <a:pPr marL="0" lvl="0" indent="0" algn="l">
                         <a:buNone/>
                       </a:pPr>
                       <a:r>
-                        <a:rPr/>
                         <a:t>Hombre</a:t>
                       </a:r>
                     </a:p>
                   </a:txBody>
+                  <a:tcPr/>
                 </a:tc>
                 <a:tc>
                   <a:txBody>
                     <a:bodyPr/>
                     <a:lstStyle/>
                     <a:p>
-                      <a:pPr lvl="0" indent="0" marL="0" algn="l">
+                      <a:pPr marL="0" lvl="0" indent="0" algn="l">
                         <a:buNone/>
                       </a:pPr>
                       <a:r>
-                        <a:rPr/>
                         <a:t>No muy satisfecho</a:t>
                       </a:r>
                     </a:p>
                   </a:txBody>
+                  <a:tcPr/>
                 </a:tc>
                 <a:tc>
                   <a:txBody>
                     <a:bodyPr/>
                     <a:lstStyle/>
                     <a:p>
-                      <a:pPr lvl="0" indent="0" marL="0" algn="r">
+                      <a:pPr marL="0" lvl="0" indent="0" algn="r">
                         <a:buNone/>
                       </a:pPr>
                       <a:r>
-                        <a:rPr/>
                         <a:t>255</a:t>
                       </a:r>
                     </a:p>
                   </a:txBody>
+                  <a:tcPr/>
                 </a:tc>
                 <a:tc>
                   <a:txBody>
                     <a:bodyPr/>
                     <a:lstStyle/>
                     <a:p>
-                      <a:pPr lvl="0" indent="0" marL="0" algn="r">
+                      <a:pPr marL="0" lvl="0" indent="0" algn="r">
                         <a:buNone/>
                       </a:pPr>
                       <a:r>
-                        <a:rPr/>
                         <a:t>45.1</a:t>
                       </a:r>
                     </a:p>
                   </a:txBody>
+                  <a:tcPr/>
                 </a:tc>
+                <a:extLst>
+                  <a:ext uri="{0D108BD9-81ED-4DB2-BD59-A6C34878D82A}">
+                    <a16:rowId xmlns:a16="http://schemas.microsoft.com/office/drawing/2014/main" val="10003"/>
+                  </a:ext>
+                </a:extLst>
               </a:tr>
               <a:tr h="0">
                 <a:tc>
@@ -5482,61 +9846,66 @@
                     <a:bodyPr/>
                     <a:lstStyle/>
                     <a:p>
-                      <a:pPr lvl="0" indent="0" marL="0" algn="l">
+                      <a:pPr marL="0" lvl="0" indent="0" algn="l">
                         <a:buNone/>
                       </a:pPr>
                       <a:r>
-                        <a:rPr/>
                         <a:t>Hombre</a:t>
                       </a:r>
                     </a:p>
                   </a:txBody>
+                  <a:tcPr/>
                 </a:tc>
                 <a:tc>
                   <a:txBody>
                     <a:bodyPr/>
                     <a:lstStyle/>
                     <a:p>
-                      <a:pPr lvl="0" indent="0" marL="0" algn="l">
+                      <a:pPr marL="0" lvl="0" indent="0" algn="l">
                         <a:buNone/>
                       </a:pPr>
                       <a:r>
-                        <a:rPr/>
                         <a:t>Nada satisfecho</a:t>
                       </a:r>
                     </a:p>
                   </a:txBody>
+                  <a:tcPr/>
                 </a:tc>
                 <a:tc>
                   <a:txBody>
                     <a:bodyPr/>
                     <a:lstStyle/>
                     <a:p>
-                      <a:pPr lvl="0" indent="0" marL="0" algn="r">
+                      <a:pPr marL="0" lvl="0" indent="0" algn="r">
                         <a:buNone/>
                       </a:pPr>
                       <a:r>
-                        <a:rPr/>
                         <a:t>112</a:t>
                       </a:r>
                     </a:p>
                   </a:txBody>
+                  <a:tcPr/>
                 </a:tc>
                 <a:tc>
                   <a:txBody>
                     <a:bodyPr/>
                     <a:lstStyle/>
                     <a:p>
-                      <a:pPr lvl="0" indent="0" marL="0" algn="r">
+                      <a:pPr marL="0" lvl="0" indent="0" algn="r">
                         <a:buNone/>
                       </a:pPr>
                       <a:r>
-                        <a:rPr/>
                         <a:t>19.8</a:t>
                       </a:r>
                     </a:p>
                   </a:txBody>
+                  <a:tcPr/>
                 </a:tc>
+                <a:extLst>
+                  <a:ext uri="{0D108BD9-81ED-4DB2-BD59-A6C34878D82A}">
+                    <a16:rowId xmlns:a16="http://schemas.microsoft.com/office/drawing/2014/main" val="10004"/>
+                  </a:ext>
+                </a:extLst>
               </a:tr>
               <a:tr h="0">
                 <a:tc>
@@ -5544,61 +9913,66 @@
                     <a:bodyPr/>
                     <a:lstStyle/>
                     <a:p>
-                      <a:pPr lvl="0" indent="0" marL="0" algn="l">
+                      <a:pPr marL="0" lvl="0" indent="0" algn="l">
                         <a:buNone/>
                       </a:pPr>
                       <a:r>
-                        <a:rPr/>
                         <a:t>Mujer</a:t>
                       </a:r>
                     </a:p>
                   </a:txBody>
+                  <a:tcPr/>
                 </a:tc>
                 <a:tc>
                   <a:txBody>
                     <a:bodyPr/>
                     <a:lstStyle/>
                     <a:p>
-                      <a:pPr lvl="0" indent="0" marL="0" algn="l">
+                      <a:pPr marL="0" lvl="0" indent="0" algn="l">
                         <a:buNone/>
                       </a:pPr>
                       <a:r>
-                        <a:rPr/>
                         <a:t>Muy satisfecho</a:t>
                       </a:r>
                     </a:p>
                   </a:txBody>
+                  <a:tcPr/>
                 </a:tc>
                 <a:tc>
                   <a:txBody>
                     <a:bodyPr/>
                     <a:lstStyle/>
                     <a:p>
-                      <a:pPr lvl="0" indent="0" marL="0" algn="r">
+                      <a:pPr marL="0" lvl="0" indent="0" algn="r">
                         <a:buNone/>
                       </a:pPr>
                       <a:r>
-                        <a:rPr/>
                         <a:t>53</a:t>
                       </a:r>
                     </a:p>
                   </a:txBody>
+                  <a:tcPr/>
                 </a:tc>
                 <a:tc>
                   <a:txBody>
                     <a:bodyPr/>
                     <a:lstStyle/>
                     <a:p>
-                      <a:pPr lvl="0" indent="0" marL="0" algn="r">
+                      <a:pPr marL="0" lvl="0" indent="0" algn="r">
                         <a:buNone/>
                       </a:pPr>
                       <a:r>
-                        <a:rPr/>
                         <a:t>8.7</a:t>
                       </a:r>
                     </a:p>
                   </a:txBody>
+                  <a:tcPr/>
                 </a:tc>
+                <a:extLst>
+                  <a:ext uri="{0D108BD9-81ED-4DB2-BD59-A6C34878D82A}">
+                    <a16:rowId xmlns:a16="http://schemas.microsoft.com/office/drawing/2014/main" val="10005"/>
+                  </a:ext>
+                </a:extLst>
               </a:tr>
               <a:tr h="0">
                 <a:tc>
@@ -5606,61 +9980,66 @@
                     <a:bodyPr/>
                     <a:lstStyle/>
                     <a:p>
-                      <a:pPr lvl="0" indent="0" marL="0" algn="l">
+                      <a:pPr marL="0" lvl="0" indent="0" algn="l">
                         <a:buNone/>
                       </a:pPr>
                       <a:r>
-                        <a:rPr/>
                         <a:t>Mujer</a:t>
                       </a:r>
                     </a:p>
                   </a:txBody>
+                  <a:tcPr/>
                 </a:tc>
                 <a:tc>
                   <a:txBody>
                     <a:bodyPr/>
                     <a:lstStyle/>
                     <a:p>
-                      <a:pPr lvl="0" indent="0" marL="0" algn="l">
+                      <a:pPr marL="0" lvl="0" indent="0" algn="l">
                         <a:buNone/>
                       </a:pPr>
                       <a:r>
-                        <a:rPr/>
                         <a:t>Más bien satisfecho</a:t>
                       </a:r>
                     </a:p>
                   </a:txBody>
+                  <a:tcPr/>
                 </a:tc>
                 <a:tc>
                   <a:txBody>
                     <a:bodyPr/>
                     <a:lstStyle/>
                     <a:p>
-                      <a:pPr lvl="0" indent="0" marL="0" algn="r">
+                      <a:pPr marL="0" lvl="0" indent="0" algn="r">
                         <a:buNone/>
                       </a:pPr>
                       <a:r>
-                        <a:rPr/>
                         <a:t>195</a:t>
                       </a:r>
                     </a:p>
                   </a:txBody>
+                  <a:tcPr/>
                 </a:tc>
                 <a:tc>
                   <a:txBody>
                     <a:bodyPr/>
                     <a:lstStyle/>
                     <a:p>
-                      <a:pPr lvl="0" indent="0" marL="0" algn="r">
+                      <a:pPr marL="0" lvl="0" indent="0" algn="r">
                         <a:buNone/>
                       </a:pPr>
                       <a:r>
-                        <a:rPr/>
                         <a:t>32.1</a:t>
                       </a:r>
                     </a:p>
                   </a:txBody>
+                  <a:tcPr/>
                 </a:tc>
+                <a:extLst>
+                  <a:ext uri="{0D108BD9-81ED-4DB2-BD59-A6C34878D82A}">
+                    <a16:rowId xmlns:a16="http://schemas.microsoft.com/office/drawing/2014/main" val="10006"/>
+                  </a:ext>
+                </a:extLst>
               </a:tr>
               <a:tr h="0">
                 <a:tc>
@@ -5668,61 +10047,66 @@
                     <a:bodyPr/>
                     <a:lstStyle/>
                     <a:p>
-                      <a:pPr lvl="0" indent="0" marL="0" algn="l">
+                      <a:pPr marL="0" lvl="0" indent="0" algn="l">
                         <a:buNone/>
                       </a:pPr>
                       <a:r>
-                        <a:rPr/>
                         <a:t>Mujer</a:t>
                       </a:r>
                     </a:p>
                   </a:txBody>
+                  <a:tcPr/>
                 </a:tc>
                 <a:tc>
                   <a:txBody>
                     <a:bodyPr/>
                     <a:lstStyle/>
                     <a:p>
-                      <a:pPr lvl="0" indent="0" marL="0" algn="l">
+                      <a:pPr marL="0" lvl="0" indent="0" algn="l">
                         <a:buNone/>
                       </a:pPr>
                       <a:r>
-                        <a:rPr/>
                         <a:t>No muy satisfecho</a:t>
                       </a:r>
                     </a:p>
                   </a:txBody>
+                  <a:tcPr/>
                 </a:tc>
                 <a:tc>
                   <a:txBody>
                     <a:bodyPr/>
                     <a:lstStyle/>
                     <a:p>
-                      <a:pPr lvl="0" indent="0" marL="0" algn="r">
+                      <a:pPr marL="0" lvl="0" indent="0" algn="r">
                         <a:buNone/>
                       </a:pPr>
                       <a:r>
-                        <a:rPr/>
                         <a:t>242</a:t>
                       </a:r>
                     </a:p>
                   </a:txBody>
+                  <a:tcPr/>
                 </a:tc>
                 <a:tc>
                   <a:txBody>
                     <a:bodyPr/>
                     <a:lstStyle/>
                     <a:p>
-                      <a:pPr lvl="0" indent="0" marL="0" algn="r">
+                      <a:pPr marL="0" lvl="0" indent="0" algn="r">
                         <a:buNone/>
                       </a:pPr>
                       <a:r>
-                        <a:rPr/>
                         <a:t>39.8</a:t>
                       </a:r>
                     </a:p>
                   </a:txBody>
+                  <a:tcPr/>
                 </a:tc>
+                <a:extLst>
+                  <a:ext uri="{0D108BD9-81ED-4DB2-BD59-A6C34878D82A}">
+                    <a16:rowId xmlns:a16="http://schemas.microsoft.com/office/drawing/2014/main" val="10007"/>
+                  </a:ext>
+                </a:extLst>
               </a:tr>
               <a:tr h="0">
                 <a:tc>
@@ -5730,61 +10114,66 @@
                     <a:bodyPr/>
                     <a:lstStyle/>
                     <a:p>
-                      <a:pPr lvl="0" indent="0" marL="0" algn="l">
+                      <a:pPr marL="0" lvl="0" indent="0" algn="l">
                         <a:buNone/>
                       </a:pPr>
                       <a:r>
-                        <a:rPr/>
                         <a:t>Mujer</a:t>
                       </a:r>
                     </a:p>
                   </a:txBody>
+                  <a:tcPr/>
                 </a:tc>
                 <a:tc>
                   <a:txBody>
                     <a:bodyPr/>
                     <a:lstStyle/>
                     <a:p>
-                      <a:pPr lvl="0" indent="0" marL="0" algn="l">
+                      <a:pPr marL="0" lvl="0" indent="0" algn="l">
                         <a:buNone/>
                       </a:pPr>
                       <a:r>
-                        <a:rPr/>
                         <a:t>Nada satisfecho</a:t>
                       </a:r>
                     </a:p>
                   </a:txBody>
+                  <a:tcPr/>
                 </a:tc>
                 <a:tc>
                   <a:txBody>
                     <a:bodyPr/>
                     <a:lstStyle/>
                     <a:p>
-                      <a:pPr lvl="0" indent="0" marL="0" algn="r">
+                      <a:pPr marL="0" lvl="0" indent="0" algn="r">
                         <a:buNone/>
                       </a:pPr>
                       <a:r>
-                        <a:rPr/>
                         <a:t>118</a:t>
                       </a:r>
                     </a:p>
                   </a:txBody>
+                  <a:tcPr/>
                 </a:tc>
                 <a:tc>
                   <a:txBody>
                     <a:bodyPr/>
                     <a:lstStyle/>
                     <a:p>
-                      <a:pPr lvl="0" indent="0" marL="0" algn="r">
+                      <a:pPr marL="0" lvl="0" indent="0" algn="r">
                         <a:buNone/>
                       </a:pPr>
                       <a:r>
-                        <a:rPr/>
                         <a:t>19.4</a:t>
                       </a:r>
                     </a:p>
                   </a:txBody>
+                  <a:tcPr/>
                 </a:tc>
+                <a:extLst>
+                  <a:ext uri="{0D108BD9-81ED-4DB2-BD59-A6C34878D82A}">
+                    <a16:rowId xmlns:a16="http://schemas.microsoft.com/office/drawing/2014/main" val="10008"/>
+                  </a:ext>
+                </a:extLst>
               </a:tr>
             </a:tbl>
           </a:graphicData>
@@ -5792,7 +10181,7 @@
       </p:graphicFrame>
       <p:sp>
         <p:nvSpPr>
-          <p:cNvPr id="1" name="TextBox 3"/>
+          <p:cNvPr id="2" name="TextBox 3"/>
           <p:cNvSpPr txBox="1"/>
           <p:nvPr/>
         </p:nvSpPr>
@@ -5810,11 +10199,10 @@
           <a:bodyPr/>
           <a:lstStyle/>
           <a:p>
-            <a:pPr lvl="0" indent="0" marL="0" algn="ctr">
+            <a:pPr marL="0" lvl="0" indent="0" algn="ctr">
               <a:buNone/>
             </a:pPr>
             <a:r>
-              <a:rPr/>
               <a:t>Tabla 1. Distribución de la satisfacción con la democracia según sexo</a:t>
             </a:r>
           </a:p>
@@ -5822,295 +10210,9 @@
       </p:sp>
     </p:spTree>
   </p:cSld>
-</p:sld>
-</file>
-
-<file path=ppt/slides/slide8.xml><?xml version="1.0" encoding="utf-8"?>
-<p:sld xmlns:a="http://schemas.openxmlformats.org/drawingml/2006/main" xmlns:r="http://schemas.openxmlformats.org/officeDocument/2006/relationships" xmlns:p="http://schemas.openxmlformats.org/presentationml/2006/main">
-  <p:cSld>
-    <p:spTree>
-      <p:nvGrpSpPr>
-        <p:cNvPr id="1" name=""/>
-        <p:cNvGrpSpPr/>
-        <p:nvPr/>
-      </p:nvGrpSpPr>
-      <p:grpSpPr>
-        <a:xfrm>
-          <a:off x="0" y="0"/>
-          <a:ext cx="0" cy="0"/>
-          <a:chOff x="0" y="0"/>
-          <a:chExt cx="0" cy="0"/>
-        </a:xfrm>
-      </p:grpSpPr>
-      <p:sp>
-        <p:nvSpPr>
-          <p:cNvPr id="4" name="Text Placeholder 3"/>
-          <p:cNvSpPr>
-            <a:spLocks noGrp="1"/>
-          </p:cNvSpPr>
-          <p:nvPr>
-            <p:ph idx="2" sz="half" type="body"/>
-          </p:nvPr>
-        </p:nvSpPr>
-        <p:spPr/>
-        <p:txBody>
-          <a:bodyPr/>
-          <a:lstStyle/>
-          <a:p>
-            <a:pPr lvl="0" indent="0" marL="0">
-              <a:spcBef>
-                <a:spcPts val="3000"/>
-              </a:spcBef>
-              <a:buNone/>
-            </a:pPr>
-            <a:r>
-              <a:rPr b="1"/>
-              <a:t>Prueba de independencia entre sexo y satisfacción con la democracia</a:t>
-            </a:r>
-          </a:p>
-          <a:p>
-            <a:pPr lvl="0" indent="0">
-              <a:buNone/>
-            </a:pPr>
-            <a:r>
-              <a:rPr>
-                <a:latin typeface="Courier"/>
-              </a:rPr>
-              <a:t>
-    Pearson's Chi-squared test
-data:  tabla_sexo
-X-squared = 4.4098, df = 3, p-value = 0.2205</a:t>
-            </a:r>
-          </a:p>
-          <a:p>
-            <a:pPr lvl="0" indent="0" marL="0">
-              <a:spcBef>
-                <a:spcPts val="3000"/>
-              </a:spcBef>
-              <a:buNone/>
-            </a:pPr>
-            <a:r>
-              <a:rPr b="1"/>
-              <a:t>Interpretación de pruebas asociación de sexo con la democracia</a:t>
-            </a:r>
-          </a:p>
-          <a:p>
-            <a:pPr lvl="0" indent="0" marL="0">
-              <a:buNone/>
-            </a:pPr>
-            <a:r>
-              <a:rPr/>
-              <a:t>La distribución de la satisfacción con la democracia presenta patrones similares entre hombres y mujeres. En ambos grupos, la categoría más frecuente corresponde a los encuestados </a:t>
-            </a:r>
-            <a:r>
-              <a:rPr i="1"/>
-              <a:t>no muy satisfechos</a:t>
-            </a:r>
-            <a:r>
-              <a:rPr/>
-              <a:t> con la democracia, alcanzando un 45,1% entre los hombres y un 39,8% entre las mujeres. Asimismo, las mujeres presentan una proporción ligeramente mayor de personas </a:t>
-            </a:r>
-            <a:r>
-              <a:rPr i="1"/>
-              <a:t>más bien satisfechas</a:t>
-            </a:r>
-            <a:r>
-              <a:rPr/>
-              <a:t> (32,1%) en comparación con los hombres (27,9%). Por su parte, las categorías </a:t>
-            </a:r>
-            <a:r>
-              <a:rPr i="1"/>
-              <a:t>muy satisfecho</a:t>
-            </a:r>
-            <a:r>
-              <a:rPr/>
-              <a:t> y </a:t>
-            </a:r>
-            <a:r>
-              <a:rPr i="1"/>
-              <a:t>nada satisfecho</a:t>
-            </a:r>
-            <a:r>
-              <a:rPr/>
-              <a:t> registran porcentajes relativamente similares entre ambos sexos.</a:t>
-            </a:r>
-          </a:p>
-          <a:p>
-            <a:pPr lvl="0" indent="0" marL="0">
-              <a:buNone/>
-            </a:pPr>
-            <a:r>
-              <a:rPr/>
-              <a:t>Con el fin de determinar si estas diferencias observadas son estadísticamente significativas, se aplicó una prueba de independencia Chi-cuadrado. Los resultados indican que no existe una asociación estadísticamente significativa entre el sexo y la satisfacción con la democracia (χ² = 4,41; gl = 3; p = 0,2205). En consecuencia, no se dispone de evidencia suficiente para afirmar que la satisfacción con la democracia varíe según el sexo de los encuestados en Argentina durante 2023.</a:t>
-            </a:r>
-          </a:p>
-          <a:p>
-            <a:pPr lvl="0" indent="0" marL="0">
-              <a:spcBef>
-                <a:spcPts val="3000"/>
-              </a:spcBef>
-              <a:buNone/>
-            </a:pPr>
-            <a:r>
-              <a:rPr b="1"/>
-              <a:t>Asociación entre edad y satisfacción con la democracia</a:t>
-            </a:r>
-          </a:p>
-        </p:txBody>
-      </p:sp>
-      <p:pic>
-        <p:nvPicPr>
-          <p:cNvPr descr="trabajo2_files/figure-pptx/grafico-edad-satisfaccion-1.png" id="0" name="Picture 1"/>
-          <p:cNvPicPr>
-            <a:picLocks noGrp="1" noChangeAspect="1"/>
-          </p:cNvPicPr>
-          <p:nvPr/>
-        </p:nvPicPr>
-        <p:blipFill>
-          <a:blip r:embed="rId2"/>
-          <a:stretch>
-            <a:fillRect/>
-          </a:stretch>
-        </p:blipFill>
-        <p:spPr bwMode="auto">
-          <a:xfrm>
-            <a:off x="3568700" y="1117600"/>
-            <a:ext cx="5105400" cy="2552700"/>
-          </a:xfrm>
-          <a:prstGeom prst="rect">
-            <a:avLst/>
-          </a:prstGeom>
-          <a:noFill/>
-          <a:ln w="9525">
-            <a:noFill/>
-            <a:headEnd/>
-            <a:tailEnd/>
-          </a:ln>
-        </p:spPr>
-      </p:pic>
-    </p:spTree>
-  </p:cSld>
-</p:sld>
-</file>
-
-<file path=ppt/slides/slide9.xml><?xml version="1.0" encoding="utf-8"?>
-<p:sld xmlns:a="http://schemas.openxmlformats.org/drawingml/2006/main" xmlns:r="http://schemas.openxmlformats.org/officeDocument/2006/relationships" xmlns:p="http://schemas.openxmlformats.org/presentationml/2006/main">
-  <p:cSld>
-    <p:spTree>
-      <p:nvGrpSpPr>
-        <p:cNvPr id="1" name=""/>
-        <p:cNvGrpSpPr/>
-        <p:nvPr/>
-      </p:nvGrpSpPr>
-      <p:grpSpPr>
-        <a:xfrm>
-          <a:off x="0" y="0"/>
-          <a:ext cx="0" cy="0"/>
-          <a:chOff x="0" y="0"/>
-          <a:chExt cx="0" cy="0"/>
-        </a:xfrm>
-      </p:grpSpPr>
-      <p:sp>
-        <p:nvSpPr>
-          <p:cNvPr id="4" name="Text Placeholder 3"/>
-          <p:cNvSpPr>
-            <a:spLocks noGrp="1"/>
-          </p:cNvSpPr>
-          <p:nvPr>
-            <p:ph idx="2" sz="half" type="body"/>
-          </p:nvPr>
-        </p:nvSpPr>
-        <p:spPr/>
-        <p:txBody>
-          <a:bodyPr/>
-          <a:lstStyle/>
-          <a:p>
-            <a:pPr lvl="0" indent="0">
-              <a:buNone/>
-            </a:pPr>
-            <a:r>
-              <a:rPr>
-                <a:latin typeface="Courier"/>
-              </a:rPr>
-              <a:t>
-    Kruskal-Wallis rank sum test
-data:  edad by satisfaccion_democracia
-Kruskal-Wallis chi-squared = 6.7823, df = 3, p-value = 0.07917</a:t>
-            </a:r>
-          </a:p>
-          <a:p>
-            <a:pPr lvl="0" indent="0" marL="0">
-              <a:buNone/>
-            </a:pPr>
-            <a:r>
-              <a:rPr/>
-              <a:t>El gráfico de cajas sugiere algunas diferencias en la distribución de la edad según el nivel de satisfacción con la democracia. En particular, los encuestados que se declaran muy satisfechos presentan una mediana de edad ligeramente inferior al resto de los grupos. Sin embargo, las distribuciones muestran un amplio grado de superposición entre categorías.</a:t>
-            </a:r>
-          </a:p>
-          <a:p>
-            <a:pPr lvl="0" indent="0" marL="0">
-              <a:buNone/>
-            </a:pPr>
-            <a:r>
-              <a:rPr/>
-              <a:t>Para evaluar formalmente estas diferencias se aplicó la prueba no paramétrica de Kruskal-Wallis. Los resultados indican que las diferencias observadas no son estadísticamente significativas al nivel convencional del 5% (χ² = 6,78; gl = 3; p = 0,079). En consecuencia, no existe evidencia suficiente para afirmar que la edad se asocie con el nivel de satisfacción con la democracia en Argentina durante 2023.</a:t>
-            </a:r>
-          </a:p>
-          <a:p>
-            <a:pPr lvl="0" indent="0" marL="0">
-              <a:buNone/>
-            </a:pPr>
-            <a:r>
-              <a:rPr/>
-              <a:t>No obstante, el valor p obtenido se aproxima al umbral de significancia estadística, por lo que los resultados sugieren una posible tendencia que podría explorarse con mayor profundidad en futuras investigaciones.</a:t>
-            </a:r>
-          </a:p>
-          <a:p>
-            <a:pPr lvl="0" indent="0" marL="0">
-              <a:spcBef>
-                <a:spcPts val="3000"/>
-              </a:spcBef>
-              <a:buNone/>
-            </a:pPr>
-            <a:r>
-              <a:rPr b="1"/>
-              <a:t>Asociación entre nivel educativo y satisfacción con la democracia</a:t>
-            </a:r>
-          </a:p>
-        </p:txBody>
-      </p:sp>
-      <p:pic>
-        <p:nvPicPr>
-          <p:cNvPr descr="trabajo2_files/figure-pptx/grafico-educacion-satisfaccion-1.png" id="0" name="Picture 1"/>
-          <p:cNvPicPr>
-            <a:picLocks noGrp="1" noChangeAspect="1"/>
-          </p:cNvPicPr>
-          <p:nvPr/>
-        </p:nvPicPr>
-        <p:blipFill>
-          <a:blip r:embed="rId2"/>
-          <a:stretch>
-            <a:fillRect/>
-          </a:stretch>
-        </p:blipFill>
-        <p:spPr bwMode="auto">
-          <a:xfrm>
-            <a:off x="3568700" y="1117600"/>
-            <a:ext cx="5105400" cy="2552700"/>
-          </a:xfrm>
-          <a:prstGeom prst="rect">
-            <a:avLst/>
-          </a:prstGeom>
-          <a:noFill/>
-          <a:ln w="9525">
-            <a:noFill/>
-            <a:headEnd/>
-            <a:tailEnd/>
-          </a:ln>
-        </p:spPr>
-      </p:pic>
-    </p:spTree>
-  </p:cSld>
+  <p:clrMapOvr>
+    <a:masterClrMapping/>
+  </p:clrMapOvr>
 </p:sld>
 </file>
 
@@ -6432,265 +10534,4 @@
   </a:objectDefaults>
   <a:extraClrSchemeLst/>
 </a:theme>
-</file>
-
-<file path=ppt/theme/theme2.xml><?xml version="1.0" encoding="utf-8"?>
-<a:theme xmlns:a="http://schemas.openxmlformats.org/drawingml/2006/main" name="Office Theme">
-  <a:themeElements>
-    <a:clrScheme name="Office">
-      <a:dk1>
-        <a:sysClr val="windowText" lastClr="000000"/>
-      </a:dk1>
-      <a:lt1>
-        <a:sysClr val="window" lastClr="FFFFFF"/>
-      </a:lt1>
-      <a:dk2>
-        <a:srgbClr val="44546A"/>
-      </a:dk2>
-      <a:lt2>
-        <a:srgbClr val="E7E6E6"/>
-      </a:lt2>
-      <a:accent1>
-        <a:srgbClr val="5B9BD5"/>
-      </a:accent1>
-      <a:accent2>
-        <a:srgbClr val="ED7D31"/>
-      </a:accent2>
-      <a:accent3>
-        <a:srgbClr val="A5A5A5"/>
-      </a:accent3>
-      <a:accent4>
-        <a:srgbClr val="FFC000"/>
-      </a:accent4>
-      <a:accent5>
-        <a:srgbClr val="4472C4"/>
-      </a:accent5>
-      <a:accent6>
-        <a:srgbClr val="70AD47"/>
-      </a:accent6>
-      <a:hlink>
-        <a:srgbClr val="0563C1"/>
-      </a:hlink>
-      <a:folHlink>
-        <a:srgbClr val="954F72"/>
-      </a:folHlink>
-    </a:clrScheme>
-    <a:fontScheme name="Office">
-      <a:majorFont>
-        <a:latin typeface="Calibri Light" panose="020F0302020204030204"/>
-        <a:ea typeface=""/>
-        <a:cs typeface=""/>
-        <a:font script="Jpan" typeface="ＭＳ Ｐゴシック"/>
-        <a:font script="Hang" typeface="맑은 고딕"/>
-        <a:font script="Hans" typeface="宋体"/>
-        <a:font script="Hant" typeface="新細明體"/>
-        <a:font script="Arab" typeface="Times New Roman"/>
-        <a:font script="Hebr" typeface="Times New Roman"/>
-        <a:font script="Thai" typeface="Angsana New"/>
-        <a:font script="Ethi" typeface="Nyala"/>
-        <a:font script="Beng" typeface="Vrinda"/>
-        <a:font script="Gujr" typeface="Shruti"/>
-        <a:font script="Khmr" typeface="MoolBoran"/>
-        <a:font script="Knda" typeface="Tunga"/>
-        <a:font script="Guru" typeface="Raavi"/>
-        <a:font script="Cans" typeface="Euphemia"/>
-        <a:font script="Cher" typeface="Plantagenet Cherokee"/>
-        <a:font script="Yiii" typeface="Microsoft Yi Baiti"/>
-        <a:font script="Tibt" typeface="Microsoft Himalaya"/>
-        <a:font script="Thaa" typeface="MV Boli"/>
-        <a:font script="Deva" typeface="Mangal"/>
-        <a:font script="Telu" typeface="Gautami"/>
-        <a:font script="Taml" typeface="Latha"/>
-        <a:font script="Syrc" typeface="Estrangelo Edessa"/>
-        <a:font script="Orya" typeface="Kalinga"/>
-        <a:font script="Mlym" typeface="Kartika"/>
-        <a:font script="Laoo" typeface="DokChampa"/>
-        <a:font script="Sinh" typeface="Iskoola Pota"/>
-        <a:font script="Mong" typeface="Mongolian Baiti"/>
-        <a:font script="Viet" typeface="Times New Roman"/>
-        <a:font script="Uigh" typeface="Microsoft Uighur"/>
-        <a:font script="Geor" typeface="Sylfaen"/>
-      </a:majorFont>
-      <a:minorFont>
-        <a:latin typeface="Calibri" panose="020F0502020204030204"/>
-        <a:ea typeface=""/>
-        <a:cs typeface=""/>
-        <a:font script="Jpan" typeface="ＭＳ Ｐゴシック"/>
-        <a:font script="Hang" typeface="맑은 고딕"/>
-        <a:font script="Hans" typeface="宋体"/>
-        <a:font script="Hant" typeface="新細明體"/>
-        <a:font script="Arab" typeface="Arial"/>
-        <a:font script="Hebr" typeface="Arial"/>
-        <a:font script="Thai" typeface="Cordia New"/>
-        <a:font script="Ethi" typeface="Nyala"/>
-        <a:font script="Beng" typeface="Vrinda"/>
-        <a:font script="Gujr" typeface="Shruti"/>
-        <a:font script="Khmr" typeface="DaunPenh"/>
-        <a:font script="Knda" typeface="Tunga"/>
-        <a:font script="Guru" typeface="Raavi"/>
-        <a:font script="Cans" typeface="Euphemia"/>
-        <a:font script="Cher" typeface="Plantagenet Cherokee"/>
-        <a:font script="Yiii" typeface="Microsoft Yi Baiti"/>
-        <a:font script="Tibt" typeface="Microsoft Himalaya"/>
-        <a:font script="Thaa" typeface="MV Boli"/>
-        <a:font script="Deva" typeface="Mangal"/>
-        <a:font script="Telu" typeface="Gautami"/>
-        <a:font script="Taml" typeface="Latha"/>
-        <a:font script="Syrc" typeface="Estrangelo Edessa"/>
-        <a:font script="Orya" typeface="Kalinga"/>
-        <a:font script="Mlym" typeface="Kartika"/>
-        <a:font script="Laoo" typeface="DokChampa"/>
-        <a:font script="Sinh" typeface="Iskoola Pota"/>
-        <a:font script="Mong" typeface="Mongolian Baiti"/>
-        <a:font script="Viet" typeface="Arial"/>
-        <a:font script="Uigh" typeface="Microsoft Uighur"/>
-        <a:font script="Geor" typeface="Sylfaen"/>
-      </a:minorFont>
-    </a:fontScheme>
-    <a:fmtScheme name="Office">
-      <a:fillStyleLst>
-        <a:solidFill>
-          <a:schemeClr val="phClr"/>
-        </a:solidFill>
-        <a:gradFill rotWithShape="1">
-          <a:gsLst>
-            <a:gs pos="0">
-              <a:schemeClr val="phClr">
-                <a:lumMod val="110000"/>
-                <a:satMod val="105000"/>
-                <a:tint val="67000"/>
-              </a:schemeClr>
-            </a:gs>
-            <a:gs pos="50000">
-              <a:schemeClr val="phClr">
-                <a:lumMod val="105000"/>
-                <a:satMod val="103000"/>
-                <a:tint val="73000"/>
-              </a:schemeClr>
-            </a:gs>
-            <a:gs pos="100000">
-              <a:schemeClr val="phClr">
-                <a:lumMod val="105000"/>
-                <a:satMod val="109000"/>
-                <a:tint val="81000"/>
-              </a:schemeClr>
-            </a:gs>
-          </a:gsLst>
-          <a:lin ang="5400000" scaled="0"/>
-        </a:gradFill>
-        <a:gradFill rotWithShape="1">
-          <a:gsLst>
-            <a:gs pos="0">
-              <a:schemeClr val="phClr">
-                <a:satMod val="103000"/>
-                <a:lumMod val="102000"/>
-                <a:tint val="94000"/>
-              </a:schemeClr>
-            </a:gs>
-            <a:gs pos="50000">
-              <a:schemeClr val="phClr">
-                <a:satMod val="110000"/>
-                <a:lumMod val="100000"/>
-                <a:shade val="100000"/>
-              </a:schemeClr>
-            </a:gs>
-            <a:gs pos="100000">
-              <a:schemeClr val="phClr">
-                <a:lumMod val="99000"/>
-                <a:satMod val="120000"/>
-                <a:shade val="78000"/>
-              </a:schemeClr>
-            </a:gs>
-          </a:gsLst>
-          <a:lin ang="5400000" scaled="0"/>
-        </a:gradFill>
-      </a:fillStyleLst>
-      <a:lnStyleLst>
-        <a:ln w="6350" cap="flat" cmpd="sng" algn="ctr">
-          <a:solidFill>
-            <a:schemeClr val="phClr"/>
-          </a:solidFill>
-          <a:prstDash val="solid"/>
-          <a:miter lim="800000"/>
-        </a:ln>
-        <a:ln w="12700" cap="flat" cmpd="sng" algn="ctr">
-          <a:solidFill>
-            <a:schemeClr val="phClr"/>
-          </a:solidFill>
-          <a:prstDash val="solid"/>
-          <a:miter lim="800000"/>
-        </a:ln>
-        <a:ln w="19050" cap="flat" cmpd="sng" algn="ctr">
-          <a:solidFill>
-            <a:schemeClr val="phClr"/>
-          </a:solidFill>
-          <a:prstDash val="solid"/>
-          <a:miter lim="800000"/>
-        </a:ln>
-      </a:lnStyleLst>
-      <a:effectStyleLst>
-        <a:effectStyle>
-          <a:effectLst/>
-        </a:effectStyle>
-        <a:effectStyle>
-          <a:effectLst/>
-        </a:effectStyle>
-        <a:effectStyle>
-          <a:effectLst>
-            <a:outerShdw blurRad="57150" dist="19050" dir="5400000" algn="ctr" rotWithShape="0">
-              <a:srgbClr val="000000">
-                <a:alpha val="63000"/>
-              </a:srgbClr>
-            </a:outerShdw>
-          </a:effectLst>
-        </a:effectStyle>
-      </a:effectStyleLst>
-      <a:bgFillStyleLst>
-        <a:solidFill>
-          <a:schemeClr val="phClr"/>
-        </a:solidFill>
-        <a:solidFill>
-          <a:schemeClr val="phClr">
-            <a:tint val="95000"/>
-            <a:satMod val="170000"/>
-          </a:schemeClr>
-        </a:solidFill>
-        <a:gradFill rotWithShape="1">
-          <a:gsLst>
-            <a:gs pos="0">
-              <a:schemeClr val="phClr">
-                <a:tint val="93000"/>
-                <a:satMod val="150000"/>
-                <a:shade val="98000"/>
-                <a:lumMod val="102000"/>
-              </a:schemeClr>
-            </a:gs>
-            <a:gs pos="50000">
-              <a:schemeClr val="phClr">
-                <a:tint val="98000"/>
-                <a:satMod val="130000"/>
-                <a:shade val="90000"/>
-                <a:lumMod val="103000"/>
-              </a:schemeClr>
-            </a:gs>
-            <a:gs pos="100000">
-              <a:schemeClr val="phClr">
-                <a:shade val="63000"/>
-                <a:satMod val="120000"/>
-              </a:schemeClr>
-            </a:gs>
-          </a:gsLst>
-          <a:lin ang="5400000" scaled="0"/>
-        </a:gradFill>
-      </a:bgFillStyleLst>
-    </a:fmtScheme>
-  </a:themeElements>
-  <a:objectDefaults/>
-  <a:extraClrSchemeLst/>
-  <a:extLst>
-    <a:ext uri="{05A4C25C-085E-4340-85A3-A5531E510DB2}">
-      <thm15:themeFamily xmlns:thm15="http://schemas.microsoft.com/office/thememl/2012/main" name="Office Theme" id="{62F939B6-93AF-4DB8-9C6B-D6C7DFDC589F}" vid="{4A3C46E8-61CC-4603-A589-7422A47A8E4A}"/>
-    </a:ext>
-  </a:extLst>
-</a:theme>
 </file>